--- a/presentasjoner/Nautech - Kundepresentasjon v2.pptx
+++ b/presentasjoner/Nautech - Kundepresentasjon v2.pptx
@@ -118,13 +118,13 @@
   <p:extLst>
     <p:ext uri="{521415D9-36F7-43E2-AB2F-B90AF26B5E84}">
       <p14:sectionLst xmlns:p14="http://schemas.microsoft.com/office/powerpoint/2010/main">
-        <p14:section name="Utfordringen" id="{2f7bb6e8-c320-5977-db94-b1908dec729a}">
+        <p14:section name="Utfordringen" id="{3ca7a28d-e996-db9f-1c0f-2d21ee3a0740}">
           <p14:sldIdLst>
             <p14:sldId id="256"/>
             <p14:sldId id="257"/>
           </p14:sldIdLst>
         </p14:section>
-        <p14:section name="Nautech" id="{3772bd97-066a-91e8-6a8f-85bf08bb6d64}">
+        <p14:section name="Nautech" id="{8393551d-c088-8b2d-2055-584a4573711e}">
           <p14:sldIdLst>
             <p14:sldId id="258"/>
             <p14:sldId id="259"/>
@@ -133,7 +133,7 @@
             <p14:sldId id="262"/>
           </p14:sldIdLst>
         </p14:section>
-        <p14:section name="Bytte og pris" id="{846a9140-8a1a-b366-0af9-dbeba41b7a23}">
+        <p14:section name="Bytte og pris" id="{c3549309-ebc2-cda0-c565-9e558f7f3182}">
           <p14:sldIdLst>
             <p14:sldId id="263"/>
             <p14:sldId id="264"/>
@@ -2837,7 +2837,7 @@
                 <a:ea typeface="Calibri" pitchFamily="34" charset="-122"/>
                 <a:cs typeface="Calibri" pitchFamily="34" charset="-120"/>
               </a:rPr>
-              <a:t>Data i Norge/EU</a:t>
+              <a:t>Data i Norge</a:t>
             </a:r>
             <a:endParaRPr lang="en-US" sz="1800" dirty="0"/>
           </a:p>
@@ -3039,7 +3039,7 @@
                 <a:ea typeface="Arial" pitchFamily="34" charset="-122"/>
                 <a:cs typeface="Arial" pitchFamily="34" charset="-120"/>
               </a:rPr>
-              <a:t>Én fast pris per fartøy</a:t>
+              <a:t>Betal for modulene dere bruker</a:t>
             </a:r>
             <a:endParaRPr lang="en-US" sz="3000" dirty="0"/>
           </a:p>
@@ -3078,7 +3078,7 @@
                 <a:ea typeface="Arial" pitchFamily="34" charset="-122"/>
                 <a:cs typeface="Arial" pitchFamily="34" charset="-120"/>
               </a:rPr>
-              <a:t>10 000 kr</a:t>
+              <a:t>14 000 kr</a:t>
             </a:r>
             <a:endParaRPr lang="en-US" sz="6000" dirty="0"/>
           </a:p>
@@ -3095,7 +3095,24 @@
                 <a:ea typeface="Calibri" pitchFamily="34" charset="-122"/>
                 <a:cs typeface="Calibri" pitchFamily="34" charset="-120"/>
               </a:rPr>
-              <a:t>per fartøy per måned, ekskl. mva.</a:t>
+              <a:t>per fartøy per måned for alle 14 moduler</a:t>
+            </a:r>
+            <a:endParaRPr lang="en-US" sz="6000" dirty="0"/>
+          </a:p>
+          <a:p>
+            <a:pPr indent="0" marL="0">
+              <a:buNone/>
+            </a:pPr>
+            <a:r>
+              <a:rPr lang="en-US" sz="1600" dirty="0">
+                <a:solidFill>
+                  <a:srgbClr val="5B6B7A"/>
+                </a:solidFill>
+                <a:latin typeface="Calibri" pitchFamily="34" charset="0"/>
+                <a:ea typeface="Calibri" pitchFamily="34" charset="-122"/>
+                <a:cs typeface="Calibri" pitchFamily="34" charset="-120"/>
+              </a:rPr>
+              <a:t>Eller 1 000 kr per modul. Alle priser ekskl. mva.</a:t>
             </a:r>
             <a:endParaRPr lang="en-US" sz="6000" dirty="0"/>
           </a:p>
@@ -3295,7 +3312,7 @@
                 <a:ea typeface="Calibri" pitchFamily="34" charset="-122"/>
                 <a:cs typeface="Calibri" pitchFamily="34" charset="-120"/>
               </a:rPr>
-              <a:t>Moduler: </a:t>
+              <a:t>KI-assistent: </a:t>
             </a:r>
             <a:pPr indent="0" marL="0">
               <a:spcAft>
@@ -3304,25 +3321,36 @@
               <a:buNone/>
             </a:pPr>
             <a:r>
-              <a:rPr lang="en-US" sz="1500" b="1" dirty="0">
-                <a:solidFill>
-                  <a:srgbClr val="E8751A"/>
-                </a:solidFill>
-                <a:latin typeface="Calibri" pitchFamily="34" charset="0"/>
-                <a:ea typeface="Calibri" pitchFamily="34" charset="-122"/>
-                <a:cs typeface="Calibri" pitchFamily="34" charset="-120"/>
-              </a:rPr>
-              <a:t>[FYLL INN: alle 14, eller et utvalg?]</a:t>
-            </a:r>
+              <a:rPr lang="en-US" sz="1500" dirty="0">
+                <a:solidFill>
+                  <a:srgbClr val="1B2A38"/>
+                </a:solidFill>
+                <a:latin typeface="Calibri" pitchFamily="34" charset="0"/>
+                <a:ea typeface="Calibri" pitchFamily="34" charset="-122"/>
+                <a:cs typeface="Calibri" pitchFamily="34" charset="-120"/>
+              </a:rPr>
+              <a:t>inkludert i full pakke</a:t>
+            </a:r>
+            <a:endParaRPr lang="en-US" sz="1500" dirty="0"/>
+          </a:p>
+          <a:p>
             <a:pPr indent="0" marL="0">
               <a:spcAft>
                 <a:spcPts val="800"/>
               </a:spcAft>
               <a:buNone/>
             </a:pPr>
-            <a:endParaRPr lang="en-US" sz="1500" dirty="0"/>
-          </a:p>
-          <a:p>
+            <a:r>
+              <a:rPr lang="en-US" sz="1500" b="1" dirty="0">
+                <a:solidFill>
+                  <a:srgbClr val="1B2A38"/>
+                </a:solidFill>
+                <a:latin typeface="Calibri" pitchFamily="34" charset="0"/>
+                <a:ea typeface="Calibri" pitchFamily="34" charset="-122"/>
+                <a:cs typeface="Calibri" pitchFamily="34" charset="-120"/>
+              </a:rPr>
+              <a:t>Support: </a:t>
+            </a:r>
             <a:pPr indent="0" marL="0">
               <a:spcAft>
                 <a:spcPts val="800"/>
@@ -3330,7 +3358,7 @@
               <a:buNone/>
             </a:pPr>
             <a:r>
-              <a:rPr lang="en-US" sz="1500" b="1" dirty="0">
+              <a:rPr lang="en-US" sz="1500" dirty="0">
                 <a:solidFill>
                   <a:srgbClr val="1B2A38"/>
                 </a:solidFill>
@@ -3338,8 +3366,11 @@
                 <a:ea typeface="Calibri" pitchFamily="34" charset="-122"/>
                 <a:cs typeface="Calibri" pitchFamily="34" charset="-120"/>
               </a:rPr>
-              <a:t>KI-assistent: </a:t>
-            </a:r>
+              <a:t>full support uten ekstra kostnad</a:t>
+            </a:r>
+            <a:endParaRPr lang="en-US" sz="1500" dirty="0"/>
+          </a:p>
+          <a:p>
             <a:pPr indent="0" marL="0">
               <a:spcAft>
                 <a:spcPts val="800"/>
@@ -3349,13 +3380,13 @@
             <a:r>
               <a:rPr lang="en-US" sz="1500" b="1" dirty="0">
                 <a:solidFill>
-                  <a:srgbClr val="E8751A"/>
-                </a:solidFill>
-                <a:latin typeface="Calibri" pitchFamily="34" charset="0"/>
-                <a:ea typeface="Calibri" pitchFamily="34" charset="-122"/>
-                <a:cs typeface="Calibri" pitchFamily="34" charset="-120"/>
-              </a:rPr>
-              <a:t>[FYLL INN: inkludert / tillegg?]</a:t>
+                  <a:srgbClr val="1B2A38"/>
+                </a:solidFill>
+                <a:latin typeface="Calibri" pitchFamily="34" charset="0"/>
+                <a:ea typeface="Calibri" pitchFamily="34" charset="-122"/>
+                <a:cs typeface="Calibri" pitchFamily="34" charset="-120"/>
+              </a:rPr>
+              <a:t>Oppdateringer: </a:t>
             </a:r>
             <a:pPr indent="0" marL="0">
               <a:spcAft>
@@ -3363,6 +3394,17 @@
               </a:spcAft>
               <a:buNone/>
             </a:pPr>
+            <a:r>
+              <a:rPr lang="en-US" sz="1500" dirty="0">
+                <a:solidFill>
+                  <a:srgbClr val="1B2A38"/>
+                </a:solidFill>
+                <a:latin typeface="Calibri" pitchFamily="34" charset="0"/>
+                <a:ea typeface="Calibri" pitchFamily="34" charset="-122"/>
+                <a:cs typeface="Calibri" pitchFamily="34" charset="-120"/>
+              </a:rPr>
+              <a:t>alle nye versjoner</a:t>
+            </a:r>
             <a:endParaRPr lang="en-US" sz="1500" dirty="0"/>
           </a:p>
           <a:p>
@@ -3381,7 +3423,7 @@
                 <a:ea typeface="Calibri" pitchFamily="34" charset="-122"/>
                 <a:cs typeface="Calibri" pitchFamily="34" charset="-120"/>
               </a:rPr>
-              <a:t>Oppstart og dataoverføring: </a:t>
+              <a:t>Dataoverføring: </a:t>
             </a:r>
             <a:pPr indent="0" marL="0">
               <a:spcAft>
@@ -3390,25 +3432,36 @@
               <a:buNone/>
             </a:pPr>
             <a:r>
-              <a:rPr lang="en-US" sz="1500" b="1" dirty="0">
-                <a:solidFill>
-                  <a:srgbClr val="E8751A"/>
-                </a:solidFill>
-                <a:latin typeface="Calibri" pitchFamily="34" charset="0"/>
-                <a:ea typeface="Calibri" pitchFamily="34" charset="-122"/>
-                <a:cs typeface="Calibri" pitchFamily="34" charset="-120"/>
-              </a:rPr>
-              <a:t>[FYLL INN: pris]</a:t>
-            </a:r>
+              <a:rPr lang="en-US" sz="1500" dirty="0">
+                <a:solidFill>
+                  <a:srgbClr val="1B2A38"/>
+                </a:solidFill>
+                <a:latin typeface="Calibri" pitchFamily="34" charset="0"/>
+                <a:ea typeface="Calibri" pitchFamily="34" charset="-122"/>
+                <a:cs typeface="Calibri" pitchFamily="34" charset="-120"/>
+              </a:rPr>
+              <a:t>gjør det selv, eller vi gjør det mot et engangsgebyr</a:t>
+            </a:r>
+            <a:endParaRPr lang="en-US" sz="1500" dirty="0"/>
+          </a:p>
+          <a:p>
             <a:pPr indent="0" marL="0">
               <a:spcAft>
                 <a:spcPts val="800"/>
               </a:spcAft>
               <a:buNone/>
             </a:pPr>
-            <a:endParaRPr lang="en-US" sz="1500" dirty="0"/>
-          </a:p>
-          <a:p>
+            <a:r>
+              <a:rPr lang="en-US" sz="1500" b="1" dirty="0">
+                <a:solidFill>
+                  <a:srgbClr val="1B2A38"/>
+                </a:solidFill>
+                <a:latin typeface="Calibri" pitchFamily="34" charset="0"/>
+                <a:ea typeface="Calibri" pitchFamily="34" charset="-122"/>
+                <a:cs typeface="Calibri" pitchFamily="34" charset="-120"/>
+              </a:rPr>
+              <a:t>Pilot: </a:t>
+            </a:r>
             <a:pPr indent="0" marL="0">
               <a:spcAft>
                 <a:spcPts val="800"/>
@@ -3416,7 +3469,7 @@
               <a:buNone/>
             </a:pPr>
             <a:r>
-              <a:rPr lang="en-US" sz="1500" b="1" dirty="0">
+              <a:rPr lang="en-US" sz="1500" dirty="0">
                 <a:solidFill>
                   <a:srgbClr val="1B2A38"/>
                 </a:solidFill>
@@ -3424,67 +3477,7 @@
                 <a:ea typeface="Calibri" pitchFamily="34" charset="-122"/>
                 <a:cs typeface="Calibri" pitchFamily="34" charset="-120"/>
               </a:rPr>
-              <a:t>Opplæring og support: </a:t>
-            </a:r>
-            <a:pPr indent="0" marL="0">
-              <a:spcAft>
-                <a:spcPts val="800"/>
-              </a:spcAft>
-              <a:buNone/>
-            </a:pPr>
-            <a:r>
-              <a:rPr lang="en-US" sz="1500" b="1" dirty="0">
-                <a:solidFill>
-                  <a:srgbClr val="E8751A"/>
-                </a:solidFill>
-                <a:latin typeface="Calibri" pitchFamily="34" charset="0"/>
-                <a:ea typeface="Calibri" pitchFamily="34" charset="-122"/>
-                <a:cs typeface="Calibri" pitchFamily="34" charset="-120"/>
-              </a:rPr>
-              <a:t>[FYLL INN: hva er inkludert]</a:t>
-            </a:r>
-            <a:pPr indent="0" marL="0">
-              <a:spcAft>
-                <a:spcPts val="800"/>
-              </a:spcAft>
-              <a:buNone/>
-            </a:pPr>
-            <a:endParaRPr lang="en-US" sz="1500" dirty="0"/>
-          </a:p>
-          <a:p>
-            <a:pPr indent="0" marL="0">
-              <a:spcAft>
-                <a:spcPts val="800"/>
-              </a:spcAft>
-              <a:buNone/>
-            </a:pPr>
-            <a:r>
-              <a:rPr lang="en-US" sz="1500" b="1" dirty="0">
-                <a:solidFill>
-                  <a:srgbClr val="1B2A38"/>
-                </a:solidFill>
-                <a:latin typeface="Calibri" pitchFamily="34" charset="0"/>
-                <a:ea typeface="Calibri" pitchFamily="34" charset="-122"/>
-                <a:cs typeface="Calibri" pitchFamily="34" charset="-120"/>
-              </a:rPr>
-              <a:t>Pilot, seks uker: </a:t>
-            </a:r>
-            <a:pPr indent="0" marL="0">
-              <a:spcAft>
-                <a:spcPts val="800"/>
-              </a:spcAft>
-              <a:buNone/>
-            </a:pPr>
-            <a:r>
-              <a:rPr lang="en-US" sz="1500" b="1" dirty="0">
-                <a:solidFill>
-                  <a:srgbClr val="E8751A"/>
-                </a:solidFill>
-                <a:latin typeface="Calibri" pitchFamily="34" charset="0"/>
-                <a:ea typeface="Calibri" pitchFamily="34" charset="-122"/>
-                <a:cs typeface="Calibri" pitchFamily="34" charset="-120"/>
-              </a:rPr>
-              <a:t>[FYLL INN: pris og vilkår]</a:t>
+              <a:t>seks uker på ett fartøy til halv pris. Fortsetter dere, trekkes beløpet fra første års avtale.</a:t>
             </a:r>
             <a:endParaRPr lang="en-US" sz="1500" dirty="0"/>
           </a:p>
@@ -3795,7 +3788,7 @@
                 <a:ea typeface="Calibri" pitchFamily="34" charset="-122"/>
                 <a:cs typeface="Calibri" pitchFamily="34" charset="-120"/>
               </a:rPr>
-              <a:t>I Norge/EU. De brukes ikke til å trene KI-modeller.</a:t>
+              <a:t>På server i Norge. De brukes ikke til å trene KI-modeller.</a:t>
             </a:r>
             <a:endParaRPr lang="en-US" sz="1700" dirty="0"/>
           </a:p>
@@ -3856,7 +3849,7 @@
                 <a:ea typeface="Calibri" pitchFamily="34" charset="-122"/>
                 <a:cs typeface="Calibri" pitchFamily="34" charset="-120"/>
               </a:rPr>
-              <a:t>Fungerer det uten nett om bord?</a:t>
+              <a:t>Trenger vi nett om bord?</a:t>
             </a:r>
             <a:endParaRPr lang="en-US" sz="1700" dirty="0"/>
           </a:p>
@@ -3865,15 +3858,15 @@
               <a:buNone/>
             </a:pPr>
             <a:r>
-              <a:rPr lang="en-US" sz="1500" b="1" dirty="0">
-                <a:solidFill>
-                  <a:srgbClr val="E8751A"/>
-                </a:solidFill>
-                <a:latin typeface="Calibri" pitchFamily="34" charset="0"/>
-                <a:ea typeface="Calibri" pitchFamily="34" charset="-122"/>
-                <a:cs typeface="Calibri" pitchFamily="34" charset="-120"/>
-              </a:rPr>
-              <a:t>[FYLL INN: svar]</a:t>
+              <a:rPr lang="en-US" sz="1500" dirty="0">
+                <a:solidFill>
+                  <a:srgbClr val="1B2A38"/>
+                </a:solidFill>
+                <a:latin typeface="Calibri" pitchFamily="34" charset="0"/>
+                <a:ea typeface="Calibri" pitchFamily="34" charset="-122"/>
+                <a:cs typeface="Calibri" pitchFamily="34" charset="-120"/>
+              </a:rPr>
+              <a:t>Ja. Med satellittnett som Starlink er dekningen god også til sjøs.</a:t>
             </a:r>
             <a:endParaRPr lang="en-US" sz="1700" dirty="0"/>
           </a:p>
@@ -3934,7 +3927,7 @@
                 <a:ea typeface="Calibri" pitchFamily="34" charset="-122"/>
                 <a:cs typeface="Calibri" pitchFamily="34" charset="-120"/>
               </a:rPr>
-              <a:t>Er vedlikeholdsmodulen DNV-godkjent?</a:t>
+              <a:t>Er Nautech DNV-godkjent?</a:t>
             </a:r>
             <a:endParaRPr lang="en-US" sz="1700" dirty="0"/>
           </a:p>
@@ -3943,15 +3936,15 @@
               <a:buNone/>
             </a:pPr>
             <a:r>
-              <a:rPr lang="en-US" sz="1500" b="1" dirty="0">
-                <a:solidFill>
-                  <a:srgbClr val="E8751A"/>
-                </a:solidFill>
-                <a:latin typeface="Calibri" pitchFamily="34" charset="0"/>
-                <a:ea typeface="Calibri" pitchFamily="34" charset="-122"/>
-                <a:cs typeface="Calibri" pitchFamily="34" charset="-120"/>
-              </a:rPr>
-              <a:t>[FYLL INN: svar]</a:t>
+              <a:rPr lang="en-US" sz="1500" dirty="0">
+                <a:solidFill>
+                  <a:srgbClr val="1B2A38"/>
+                </a:solidFill>
+                <a:latin typeface="Calibri" pitchFamily="34" charset="0"/>
+                <a:ea typeface="Calibri" pitchFamily="34" charset="-122"/>
+                <a:cs typeface="Calibri" pitchFamily="34" charset="-120"/>
+              </a:rPr>
+              <a:t>Nautech er bygget etter DNVs krav. Godkjenning søkes når produktet er ferdig utviklet.</a:t>
             </a:r>
             <a:endParaRPr lang="en-US" sz="1700" dirty="0"/>
           </a:p>
@@ -4021,15 +4014,15 @@
               <a:buNone/>
             </a:pPr>
             <a:r>
-              <a:rPr lang="en-US" sz="1500" b="1" dirty="0">
-                <a:solidFill>
-                  <a:srgbClr val="E8751A"/>
-                </a:solidFill>
-                <a:latin typeface="Calibri" pitchFamily="34" charset="0"/>
-                <a:ea typeface="Calibri" pitchFamily="34" charset="-122"/>
-                <a:cs typeface="Calibri" pitchFamily="34" charset="-120"/>
-              </a:rPr>
-              <a:t>[FYLL INN: support: hvem, når, hvordan]</a:t>
+              <a:rPr lang="en-US" sz="1500" dirty="0">
+                <a:solidFill>
+                  <a:srgbClr val="1B2A38"/>
+                </a:solidFill>
+                <a:latin typeface="Calibri" pitchFamily="34" charset="0"/>
+                <a:ea typeface="Calibri" pitchFamily="34" charset="-122"/>
+                <a:cs typeface="Calibri" pitchFamily="34" charset="-120"/>
+              </a:rPr>
+              <a:t>Vi gjør det. Full support er inkludert i prisen.</a:t>
             </a:r>
             <a:endParaRPr lang="en-US" sz="1700" dirty="0"/>
           </a:p>
@@ -4099,15 +4092,15 @@
               <a:buNone/>
             </a:pPr>
             <a:r>
-              <a:rPr lang="en-US" sz="1500" b="1" dirty="0">
-                <a:solidFill>
-                  <a:srgbClr val="E8751A"/>
-                </a:solidFill>
-                <a:latin typeface="Calibri" pitchFamily="34" charset="0"/>
-                <a:ea typeface="Calibri" pitchFamily="34" charset="-122"/>
-                <a:cs typeface="Calibri" pitchFamily="34" charset="-120"/>
-              </a:rPr>
-              <a:t>[FYLL INN: typisk tid fra avtale til i bruk]</a:t>
+              <a:rPr lang="en-US" sz="1500" dirty="0">
+                <a:solidFill>
+                  <a:srgbClr val="1B2A38"/>
+                </a:solidFill>
+                <a:latin typeface="Calibri" pitchFamily="34" charset="0"/>
+                <a:ea typeface="Calibri" pitchFamily="34" charset="-122"/>
+                <a:cs typeface="Calibri" pitchFamily="34" charset="-120"/>
+              </a:rPr>
+              <a:t>Én til to uker, avhengig av hvor mye data som skal flyttes.</a:t>
             </a:r>
             <a:endParaRPr lang="en-US" sz="1700" dirty="0"/>
           </a:p>
@@ -4679,7 +4672,7 @@
                 <a:ea typeface="Calibri" pitchFamily="34" charset="-122"/>
                 <a:cs typeface="Calibri" pitchFamily="34" charset="-120"/>
               </a:rPr>
-              <a:t>Seks uker på ett fartøy, med mål vi avtaler sammen.</a:t>
+              <a:t>Seks uker på ett fartøy til halv pris, med mål vi avtaler sammen.</a:t>
             </a:r>
             <a:endParaRPr lang="en-US" sz="2000" dirty="0"/>
           </a:p>
@@ -10254,7 +10247,7 @@
                 <a:ea typeface="Arial" pitchFamily="34" charset="-122"/>
                 <a:cs typeface="Arial" pitchFamily="34" charset="-120"/>
               </a:rPr>
-              <a:t>Trygt bytte – ett fartøy om gangen</a:t>
+              <a:t>I drift på én til to uker – ett fartøy om gangen</a:t>
             </a:r>
             <a:endParaRPr lang="en-US" sz="3000" dirty="0"/>
           </a:p>
@@ -10484,21 +10477,7 @@
                 <a:ea typeface="Calibri" pitchFamily="34" charset="-122"/>
                 <a:cs typeface="Calibri" pitchFamily="34" charset="-120"/>
               </a:rPr>
-              <a:t>Utstyrsliste, mannskap og historikk flyttes over fra dagens system med import fra regneark. </a:t>
-            </a:r>
-            <a:pPr indent="0" marL="0">
-              <a:buNone/>
-            </a:pPr>
-            <a:r>
-              <a:rPr lang="en-US" sz="1500" b="1" dirty="0">
-                <a:solidFill>
-                  <a:srgbClr val="E8751A"/>
-                </a:solidFill>
-                <a:latin typeface="Calibri" pitchFamily="34" charset="0"/>
-                <a:ea typeface="Calibri" pitchFamily="34" charset="-122"/>
-                <a:cs typeface="Calibri" pitchFamily="34" charset="-120"/>
-              </a:rPr>
-              <a:t>[FYLL INN: bekreft hvem som gjør jobben]</a:t>
+              <a:t>Dere flytter dataene selv med våre importmaler, eller vi gjør det for dere mot et engangsgebyr.</a:t>
             </a:r>
             <a:endParaRPr lang="en-US" sz="1700" dirty="0"/>
           </a:p>
@@ -10876,7 +10855,7 @@
                 <a:ea typeface="Calibri" pitchFamily="34" charset="-122"/>
                 <a:cs typeface="Calibri" pitchFamily="34" charset="-120"/>
               </a:rPr>
-              <a:t>Lagres i Norge/EU</a:t>
+              <a:t>Lagres på server i Norge</a:t>
             </a:r>
             <a:endParaRPr lang="en-US" sz="1500" dirty="0"/>
           </a:p>
@@ -10918,31 +10897,8 @@
                 <a:ea typeface="Calibri" pitchFamily="34" charset="-122"/>
                 <a:cs typeface="Calibri" pitchFamily="34" charset="-120"/>
               </a:rPr>
-              <a:t>Dere eier dataene  </a:t>
-            </a:r>
-            <a:pPr indent="0" marL="0">
-              <a:spcAft>
-                <a:spcPts val="800"/>
-              </a:spcAft>
-              <a:buNone/>
-            </a:pPr>
-            <a:r>
-              <a:rPr lang="en-US" sz="1500" b="1" dirty="0">
-                <a:solidFill>
-                  <a:srgbClr val="E8751A"/>
-                </a:solidFill>
-                <a:latin typeface="Calibri" pitchFamily="34" charset="0"/>
-                <a:ea typeface="Calibri" pitchFamily="34" charset="-122"/>
-                <a:cs typeface="Calibri" pitchFamily="34" charset="-120"/>
-              </a:rPr>
-              <a:t>[FYLL INN: bekreft]</a:t>
-            </a:r>
-            <a:pPr indent="0" marL="0">
-              <a:spcAft>
-                <a:spcPts val="800"/>
-              </a:spcAft>
-              <a:buNone/>
-            </a:pPr>
+              <a:t>Dere eier dataene</a:t>
+            </a:r>
             <a:endParaRPr lang="en-US" sz="1500" dirty="0"/>
           </a:p>
           <a:p>
@@ -10962,24 +10918,7 @@
                 <a:ea typeface="Calibri" pitchFamily="34" charset="-122"/>
                 <a:cs typeface="Calibri" pitchFamily="34" charset="-120"/>
               </a:rPr>
-              <a:t>Kan eksporteres hvis dere avslutter  </a:t>
-            </a:r>
-            <a:pPr indent="0" marL="0">
-              <a:spcAft>
-                <a:spcPts val="800"/>
-              </a:spcAft>
-              <a:buNone/>
-            </a:pPr>
-            <a:r>
-              <a:rPr lang="en-US" sz="1500" b="1" dirty="0">
-                <a:solidFill>
-                  <a:srgbClr val="E8751A"/>
-                </a:solidFill>
-                <a:latin typeface="Calibri" pitchFamily="34" charset="0"/>
-                <a:ea typeface="Calibri" pitchFamily="34" charset="-122"/>
-                <a:cs typeface="Calibri" pitchFamily="34" charset="-120"/>
-              </a:rPr>
-              <a:t>[FYLL INN: bekreft]</a:t>
+              <a:t>Kan eksporteres når som helst</a:t>
             </a:r>
             <a:endParaRPr lang="en-US" sz="1500" dirty="0"/>
           </a:p>

--- a/presentasjoner/Nautech - Kundepresentasjon v2.pptx
+++ b/presentasjoner/Nautech - Kundepresentasjon v2.pptx
@@ -17,9 +17,10 @@
     <p:sldId id="265" r:id="rId11"/>
     <p:sldId id="266" r:id="rId12"/>
     <p:sldId id="267" r:id="rId13"/>
+    <p:sldId id="268" r:id="rId14"/>
   </p:sldIdLst>
   <p:notesMasterIdLst>
-    <p:notesMasterId r:id="rId14"/>
+    <p:notesMasterId r:id="rId15"/>
   </p:notesMasterIdLst>
   <p:sldSz cx="12192000" cy="6858000"/>
   <p:notesSz cx="6858000" cy="12192000"/>
@@ -118,28 +119,29 @@
   <p:extLst>
     <p:ext uri="{521415D9-36F7-43E2-AB2F-B90AF26B5E84}">
       <p14:sectionLst xmlns:p14="http://schemas.microsoft.com/office/powerpoint/2010/main">
-        <p14:section name="Utfordringen" id="{3ca7a28d-e996-db9f-1c0f-2d21ee3a0740}">
+        <p14:section name="Utfordringen" id="{996fd396-82ab-a512-33ac-8df2d2871fba}">
           <p14:sldIdLst>
             <p14:sldId id="256"/>
             <p14:sldId id="257"/>
           </p14:sldIdLst>
         </p14:section>
-        <p14:section name="Nautech" id="{8393551d-c088-8b2d-2055-584a4573711e}">
+        <p14:section name="Nautech" id="{b8c51aaf-5cc6-2471-f2ba-96e598a4b0f1}">
           <p14:sldIdLst>
             <p14:sldId id="258"/>
             <p14:sldId id="259"/>
             <p14:sldId id="260"/>
             <p14:sldId id="261"/>
             <p14:sldId id="262"/>
+            <p14:sldId id="263"/>
           </p14:sldIdLst>
         </p14:section>
-        <p14:section name="Bytte og pris" id="{c3549309-ebc2-cda0-c565-9e558f7f3182}">
+        <p14:section name="Bytte og pris" id="{22371951-579d-27e0-2838-3943bc7c4fac}">
           <p14:sldIdLst>
-            <p14:sldId id="263"/>
             <p14:sldId id="264"/>
             <p14:sldId id="265"/>
             <p14:sldId id="266"/>
             <p14:sldId id="267"/>
+            <p14:sldId id="268"/>
           </p14:sldIdLst>
         </p14:section>
       </p14:sectionLst>
@@ -834,6 +836,94 @@
             <a:fld id="{F7021451-1387-4CA6-816F-3879F97B5CBC}" type="slidenum">
               <a:rPr lang="en-US"/>
               <a:t>12</a:t>
+            </a:fld>
+            <a:endParaRPr lang="en-US"/>
+          </a:p>
+        </p:txBody>
+      </p:sp>
+    </p:spTree>
+    <p:extLst>
+      <p:ext uri="{BB962C8B-B14F-4D97-AF65-F5344CB8AC3E}">
+        <p14:creationId xmlns:p14="http://schemas.microsoft.com/office/powerpoint/2010/main" val="1024086991"/>
+      </p:ext>
+    </p:extLst>
+  </p:cSld>
+  <p:clrMapOvr>
+    <a:masterClrMapping/>
+  </p:clrMapOvr>
+</p:notes>
+</file>
+
+<file path=ppt/notesSlides/notesSlide13.xml><?xml version="1.0" encoding="utf-8"?>
+<p:notes xmlns:a="http://schemas.openxmlformats.org/drawingml/2006/main" xmlns:r="http://schemas.openxmlformats.org/officeDocument/2006/relationships" xmlns:p="http://schemas.openxmlformats.org/presentationml/2006/main">
+  <p:cSld>
+    <p:spTree>
+      <p:nvGrpSpPr>
+        <p:cNvPr id="1" name=""/>
+        <p:cNvGrpSpPr/>
+        <p:nvPr/>
+      </p:nvGrpSpPr>
+      <p:grpSpPr>
+        <a:xfrm>
+          <a:off x="0" y="0"/>
+          <a:ext cx="0" cy="0"/>
+          <a:chOff x="0" y="0"/>
+          <a:chExt cx="0" cy="0"/>
+        </a:xfrm>
+      </p:grpSpPr>
+      <p:sp>
+        <p:nvSpPr>
+          <p:cNvPr id="2" name="Slide Image Placeholder 1"/>
+          <p:cNvSpPr>
+            <a:spLocks noGrp="1" noRot="1" noChangeAspect="1"/>
+          </p:cNvSpPr>
+          <p:nvPr>
+            <p:ph type="sldImg"/>
+          </p:nvPr>
+        </p:nvSpPr>
+        <p:spPr/>
+      </p:sp>
+      <p:sp>
+        <p:nvSpPr>
+          <p:cNvPr id="3" name="Notes Placeholder 2"/>
+          <p:cNvSpPr>
+            <a:spLocks noGrp="1"/>
+          </p:cNvSpPr>
+          <p:nvPr>
+            <p:ph type="body" idx="1"/>
+          </p:nvPr>
+        </p:nvSpPr>
+        <p:spPr/>
+        <p:txBody>
+          <a:bodyPr/>
+          <a:lstStyle/>
+          <a:p>
+            <a:r>
+              <a:rPr lang="en-US" dirty="0"/>
+              <a:t/>
+            </a:r>
+            <a:endParaRPr lang="en-US" dirty="0"/>
+          </a:p>
+        </p:txBody>
+      </p:sp>
+      <p:sp>
+        <p:nvSpPr>
+          <p:cNvPr id="4" name="Slide Number Placeholder 3"/>
+          <p:cNvSpPr>
+            <a:spLocks noGrp="1"/>
+          </p:cNvSpPr>
+          <p:nvPr>
+            <p:ph type="sldNum" sz="quarter" idx="10"/>
+          </p:nvPr>
+        </p:nvSpPr>
+        <p:spPr/>
+        <p:txBody>
+          <a:bodyPr/>
+          <a:lstStyle/>
+          <a:p>
+            <a:fld id="{F7021451-1387-4CA6-816F-3879F97B5CBC}" type="slidenum">
+              <a:rPr lang="en-US"/>
+              <a:t>13</a:t>
             </a:fld>
             <a:endParaRPr lang="en-US"/>
           </a:p>
@@ -2377,168 +2467,9 @@
           </a:p>
         </p:txBody>
       </p:sp>
-      <p:sp>
-        <p:nvSpPr>
-          <p:cNvPr id="3" name="Text 1"/>
-          <p:cNvSpPr txBox="1"/>
-          <p:nvPr/>
-        </p:nvSpPr>
-        <p:spPr>
-          <a:xfrm>
-            <a:off x="548640" y="1234440"/>
-            <a:ext cx="8229600" cy="1005840"/>
-          </a:xfrm>
-          <a:prstGeom prst="rect">
-            <a:avLst/>
-          </a:prstGeom>
-          <a:noFill/>
-          <a:ln/>
-        </p:spPr>
-        <p:txBody>
-          <a:bodyPr wrap="square" lIns="0" tIns="0" rIns="0" bIns="0" rtlCol="0" anchor="t"/>
-          <a:lstStyle/>
-          <a:p>
-            <a:pPr indent="0" marL="0">
-              <a:buNone/>
-            </a:pPr>
-            <a:r>
-              <a:rPr lang="en-US" sz="6000" b="1" dirty="0">
-                <a:solidFill>
-                  <a:srgbClr val="FFFFFF"/>
-                </a:solidFill>
-                <a:latin typeface="Arial" pitchFamily="34" charset="0"/>
-                <a:ea typeface="Arial" pitchFamily="34" charset="-122"/>
-                <a:cs typeface="Arial" pitchFamily="34" charset="-120"/>
-              </a:rPr>
-              <a:t>Nautech</a:t>
-            </a:r>
-            <a:endParaRPr lang="en-US" sz="6000" dirty="0"/>
-          </a:p>
-        </p:txBody>
-      </p:sp>
-      <p:sp>
-        <p:nvSpPr>
-          <p:cNvPr id="4" name="Text 2"/>
-          <p:cNvSpPr txBox="1"/>
-          <p:nvPr/>
-        </p:nvSpPr>
-        <p:spPr>
-          <a:xfrm>
-            <a:off x="548640" y="2331720"/>
-            <a:ext cx="9601200" cy="1188720"/>
-          </a:xfrm>
-          <a:prstGeom prst="rect">
-            <a:avLst/>
-          </a:prstGeom>
-          <a:noFill/>
-          <a:ln/>
-        </p:spPr>
-        <p:txBody>
-          <a:bodyPr wrap="square" lIns="0" tIns="0" rIns="0" bIns="0" rtlCol="0" anchor="t"/>
-          <a:lstStyle/>
-          <a:p>
-            <a:pPr indent="0" marL="0">
-              <a:buNone/>
-            </a:pPr>
-            <a:r>
-              <a:rPr lang="en-US" sz="2800" dirty="0">
-                <a:solidFill>
-                  <a:srgbClr val="FFFFFF"/>
-                </a:solidFill>
-                <a:latin typeface="Arial" pitchFamily="34" charset="0"/>
-                <a:ea typeface="Arial" pitchFamily="34" charset="-122"/>
-                <a:cs typeface="Arial" pitchFamily="34" charset="-120"/>
-              </a:rPr>
-              <a:t>Vedlikehold og drift for fiskefartøy – med KI som kjenner båten deres</a:t>
-            </a:r>
-            <a:endParaRPr lang="en-US" sz="2800" dirty="0"/>
-          </a:p>
-        </p:txBody>
-      </p:sp>
-      <p:sp>
-        <p:nvSpPr>
-          <p:cNvPr id="5" name="Text 3"/>
-          <p:cNvSpPr txBox="1"/>
-          <p:nvPr/>
-        </p:nvSpPr>
-        <p:spPr>
-          <a:xfrm>
-            <a:off x="548640" y="3611880"/>
-            <a:ext cx="9601200" cy="457200"/>
-          </a:xfrm>
-          <a:prstGeom prst="rect">
-            <a:avLst/>
-          </a:prstGeom>
-          <a:noFill/>
-          <a:ln/>
-        </p:spPr>
-        <p:txBody>
-          <a:bodyPr wrap="square" lIns="0" tIns="0" rIns="0" bIns="0" rtlCol="0" anchor="t"/>
-          <a:lstStyle/>
-          <a:p>
-            <a:pPr indent="0" marL="0">
-              <a:buNone/>
-            </a:pPr>
-            <a:r>
-              <a:rPr lang="en-US" sz="1800" dirty="0">
-                <a:solidFill>
-                  <a:srgbClr val="7FD1D6"/>
-                </a:solidFill>
-                <a:latin typeface="Calibri" pitchFamily="34" charset="0"/>
-                <a:ea typeface="Calibri" pitchFamily="34" charset="-122"/>
-                <a:cs typeface="Calibri" pitchFamily="34" charset="-120"/>
-              </a:rPr>
-              <a:t>Laget av en maskinsjef fra fiskeflåten, for fiskeflåten.</a:t>
-            </a:r>
-            <a:endParaRPr lang="en-US" sz="1800" dirty="0"/>
-          </a:p>
-        </p:txBody>
-      </p:sp>
-      <p:sp>
-        <p:nvSpPr>
-          <p:cNvPr id="6" name="Kort"/>
-          <p:cNvSpPr/>
-          <p:nvPr/>
-        </p:nvSpPr>
-        <p:spPr>
-          <a:xfrm>
-            <a:off x="548640" y="4572000"/>
-            <a:ext cx="3515258" cy="1051560"/>
-          </a:xfrm>
-          <a:prstGeom prst="roundRect">
-            <a:avLst>
-              <a:gd name="adj" fmla="val 10435"/>
-            </a:avLst>
-          </a:prstGeom>
-          <a:solidFill>
-            <a:srgbClr val="16324D"/>
-          </a:solidFill>
-          <a:ln/>
-        </p:spPr>
-      </p:sp>
-      <p:sp>
-        <p:nvSpPr>
-          <p:cNvPr id="7" name="Ikon-sirkel"/>
-          <p:cNvSpPr/>
-          <p:nvPr/>
-        </p:nvSpPr>
-        <p:spPr>
-          <a:xfrm>
-            <a:off x="777240" y="4773168"/>
-            <a:ext cx="640080" cy="640080"/>
-          </a:xfrm>
-          <a:prstGeom prst="ellipse">
-            <a:avLst/>
-          </a:prstGeom>
-          <a:solidFill>
-            <a:srgbClr val="0E7C86"/>
-          </a:solidFill>
-          <a:ln/>
-        </p:spPr>
-      </p:sp>
       <p:pic>
         <p:nvPicPr>
-          <p:cNvPr id="8" name="Ikon FaLayerGroup" descr="preencoded.png">    </p:cNvPr>
+          <p:cNvPr id="3" name="Nautech-logo" descr="/tmp/claude-0/-home-user-Claude/bbdec16f-2a10-550d-bb32-af07b09e4311/scratchpad/build/img/logo_white.png">    </p:cNvPr>
           <p:cNvPicPr>
             <a:picLocks noChangeAspect="1"/>
           </p:cNvPicPr>
@@ -2552,8 +2483,8 @@
         </p:blipFill>
         <p:spPr>
           <a:xfrm>
-            <a:off x="930859" y="4926787"/>
-            <a:ext cx="332842" cy="332842"/>
+            <a:off x="9631375" y="320040"/>
+            <a:ext cx="2011680" cy="613733"/>
           </a:xfrm>
           <a:prstGeom prst="rect">
             <a:avLst/>
@@ -2562,14 +2493,14 @@
       </p:pic>
       <p:sp>
         <p:nvSpPr>
-          <p:cNvPr id="9" name="Text 6"/>
+          <p:cNvPr id="4" name="Text 1"/>
           <p:cNvSpPr txBox="1"/>
           <p:nvPr/>
         </p:nvSpPr>
         <p:spPr>
           <a:xfrm>
-            <a:off x="1600200" y="4754880"/>
-            <a:ext cx="2326538" cy="731520"/>
+            <a:off x="548640" y="1234440"/>
+            <a:ext cx="8229600" cy="1005840"/>
           </a:xfrm>
           <a:prstGeom prst="rect">
             <a:avLst/>
@@ -2578,53 +2509,114 @@
           <a:ln/>
         </p:spPr>
         <p:txBody>
-          <a:bodyPr wrap="square" lIns="0" tIns="0" rIns="0" bIns="0" rtlCol="0" anchor="ctr"/>
-          <a:lstStyle/>
-          <a:p>
-            <a:pPr indent="0" marL="0">
-              <a:buNone/>
-            </a:pPr>
-            <a:r>
-              <a:rPr lang="en-US" sz="1800" b="1" dirty="0">
+          <a:bodyPr wrap="square" lIns="0" tIns="0" rIns="0" bIns="0" rtlCol="0" anchor="t"/>
+          <a:lstStyle/>
+          <a:p>
+            <a:pPr indent="0" marL="0">
+              <a:buNone/>
+            </a:pPr>
+            <a:r>
+              <a:rPr lang="en-US" sz="6000" b="1" dirty="0">
                 <a:solidFill>
                   <a:srgbClr val="FFFFFF"/>
                 </a:solidFill>
-                <a:latin typeface="Calibri" pitchFamily="34" charset="0"/>
-                <a:ea typeface="Calibri" pitchFamily="34" charset="-122"/>
-                <a:cs typeface="Calibri" pitchFamily="34" charset="-120"/>
-              </a:rPr>
-              <a:t>14 moduler</a:t>
+                <a:latin typeface="Arial" pitchFamily="34" charset="0"/>
+                <a:ea typeface="Arial" pitchFamily="34" charset="-122"/>
+                <a:cs typeface="Arial" pitchFamily="34" charset="-120"/>
+              </a:rPr>
+              <a:t>Nautech</a:t>
+            </a:r>
+            <a:endParaRPr lang="en-US" sz="6000" dirty="0"/>
+          </a:p>
+        </p:txBody>
+      </p:sp>
+      <p:sp>
+        <p:nvSpPr>
+          <p:cNvPr id="5" name="Text 2"/>
+          <p:cNvSpPr txBox="1"/>
+          <p:nvPr/>
+        </p:nvSpPr>
+        <p:spPr>
+          <a:xfrm>
+            <a:off x="548640" y="2331720"/>
+            <a:ext cx="9601200" cy="1188720"/>
+          </a:xfrm>
+          <a:prstGeom prst="rect">
+            <a:avLst/>
+          </a:prstGeom>
+          <a:noFill/>
+          <a:ln/>
+        </p:spPr>
+        <p:txBody>
+          <a:bodyPr wrap="square" lIns="0" tIns="0" rIns="0" bIns="0" rtlCol="0" anchor="t"/>
+          <a:lstStyle/>
+          <a:p>
+            <a:pPr indent="0" marL="0">
+              <a:buNone/>
+            </a:pPr>
+            <a:r>
+              <a:rPr lang="en-US" sz="2800" dirty="0">
+                <a:solidFill>
+                  <a:srgbClr val="FFFFFF"/>
+                </a:solidFill>
+                <a:latin typeface="Arial" pitchFamily="34" charset="0"/>
+                <a:ea typeface="Arial" pitchFamily="34" charset="-122"/>
+                <a:cs typeface="Arial" pitchFamily="34" charset="-120"/>
+              </a:rPr>
+              <a:t>Vedlikehold og drift for fiskefartøy – med KI som kjenner båten deres</a:t>
+            </a:r>
+            <a:endParaRPr lang="en-US" sz="2800" dirty="0"/>
+          </a:p>
+        </p:txBody>
+      </p:sp>
+      <p:sp>
+        <p:nvSpPr>
+          <p:cNvPr id="6" name="Text 3"/>
+          <p:cNvSpPr txBox="1"/>
+          <p:nvPr/>
+        </p:nvSpPr>
+        <p:spPr>
+          <a:xfrm>
+            <a:off x="548640" y="3611880"/>
+            <a:ext cx="9601200" cy="457200"/>
+          </a:xfrm>
+          <a:prstGeom prst="rect">
+            <a:avLst/>
+          </a:prstGeom>
+          <a:noFill/>
+          <a:ln/>
+        </p:spPr>
+        <p:txBody>
+          <a:bodyPr wrap="square" lIns="0" tIns="0" rIns="0" bIns="0" rtlCol="0" anchor="t"/>
+          <a:lstStyle/>
+          <a:p>
+            <a:pPr indent="0" marL="0">
+              <a:buNone/>
+            </a:pPr>
+            <a:r>
+              <a:rPr lang="en-US" sz="1800" dirty="0">
+                <a:solidFill>
+                  <a:srgbClr val="7FD1D6"/>
+                </a:solidFill>
+                <a:latin typeface="Calibri" pitchFamily="34" charset="0"/>
+                <a:ea typeface="Calibri" pitchFamily="34" charset="-122"/>
+                <a:cs typeface="Calibri" pitchFamily="34" charset="-120"/>
+              </a:rPr>
+              <a:t>Laget av en maskinsjef fra fiskeflåten, for fiskeflåten.</a:t>
             </a:r>
             <a:endParaRPr lang="en-US" sz="1800" dirty="0"/>
           </a:p>
-          <a:p>
-            <a:pPr indent="0" marL="0">
-              <a:buNone/>
-            </a:pPr>
-            <a:r>
-              <a:rPr lang="en-US" sz="1400" dirty="0">
-                <a:solidFill>
-                  <a:srgbClr val="B9C8D4"/>
-                </a:solidFill>
-                <a:latin typeface="Calibri" pitchFamily="34" charset="0"/>
-                <a:ea typeface="Calibri" pitchFamily="34" charset="-122"/>
-                <a:cs typeface="Calibri" pitchFamily="34" charset="-120"/>
-              </a:rPr>
-              <a:t>i ett system</a:t>
-            </a:r>
-            <a:endParaRPr lang="en-US" sz="1800" dirty="0"/>
-          </a:p>
-        </p:txBody>
-      </p:sp>
-      <p:sp>
-        <p:nvSpPr>
-          <p:cNvPr id="10" name="Kort"/>
+        </p:txBody>
+      </p:sp>
+      <p:sp>
+        <p:nvSpPr>
+          <p:cNvPr id="7" name="Kort"/>
           <p:cNvSpPr/>
           <p:nvPr/>
         </p:nvSpPr>
         <p:spPr>
           <a:xfrm>
-            <a:off x="4338218" y="4572000"/>
+            <a:off x="548640" y="4572000"/>
             <a:ext cx="3515258" cy="1051560"/>
           </a:xfrm>
           <a:prstGeom prst="roundRect">
@@ -2640,13 +2632,13 @@
       </p:sp>
       <p:sp>
         <p:nvSpPr>
-          <p:cNvPr id="11" name="Ikon-sirkel"/>
+          <p:cNvPr id="8" name="Ikon-sirkel"/>
           <p:cNvSpPr/>
           <p:nvPr/>
         </p:nvSpPr>
         <p:spPr>
           <a:xfrm>
-            <a:off x="4566818" y="4773168"/>
+            <a:off x="777240" y="4773168"/>
             <a:ext cx="640080" cy="640080"/>
           </a:xfrm>
           <a:prstGeom prst="ellipse">
@@ -2660,7 +2652,7 @@
       </p:sp>
       <p:pic>
         <p:nvPicPr>
-          <p:cNvPr id="12" name="Ikon FaBrain" descr="preencoded.png">    </p:cNvPr>
+          <p:cNvPr id="9" name="Ikon FaLayerGroup" descr="preencoded.png">    </p:cNvPr>
           <p:cNvPicPr>
             <a:picLocks noChangeAspect="1"/>
           </p:cNvPicPr>
@@ -2674,7 +2666,7 @@
         </p:blipFill>
         <p:spPr>
           <a:xfrm>
-            <a:off x="4720438" y="4926787"/>
+            <a:off x="930859" y="4926787"/>
             <a:ext cx="332842" cy="332842"/>
           </a:xfrm>
           <a:prstGeom prst="rect">
@@ -2684,13 +2676,13 @@
       </p:pic>
       <p:sp>
         <p:nvSpPr>
-          <p:cNvPr id="13" name="Text 9"/>
+          <p:cNvPr id="10" name="Text 6"/>
           <p:cNvSpPr txBox="1"/>
           <p:nvPr/>
         </p:nvSpPr>
         <p:spPr>
           <a:xfrm>
-            <a:off x="5389778" y="4754880"/>
+            <a:off x="1600200" y="4754880"/>
             <a:ext cx="2326538" cy="731520"/>
           </a:xfrm>
           <a:prstGeom prst="rect">
@@ -2715,7 +2707,7 @@
                 <a:ea typeface="Calibri" pitchFamily="34" charset="-122"/>
                 <a:cs typeface="Calibri" pitchFamily="34" charset="-120"/>
               </a:rPr>
-              <a:t>KI som svarer</a:t>
+              <a:t>14 moduler</a:t>
             </a:r>
             <a:endParaRPr lang="en-US" sz="1800" dirty="0"/>
           </a:p>
@@ -2732,7 +2724,7 @@
                 <a:ea typeface="Calibri" pitchFamily="34" charset="-122"/>
                 <a:cs typeface="Calibri" pitchFamily="34" charset="-120"/>
               </a:rPr>
-              <a:t>med kilde fra egne data</a:t>
+              <a:t>i ett system</a:t>
             </a:r>
             <a:endParaRPr lang="en-US" sz="1800" dirty="0"/>
           </a:p>
@@ -2740,13 +2732,13 @@
       </p:sp>
       <p:sp>
         <p:nvSpPr>
-          <p:cNvPr id="14" name="Kort"/>
+          <p:cNvPr id="11" name="Kort"/>
           <p:cNvSpPr/>
           <p:nvPr/>
         </p:nvSpPr>
         <p:spPr>
           <a:xfrm>
-            <a:off x="8127797" y="4572000"/>
+            <a:off x="4338218" y="4572000"/>
             <a:ext cx="3515258" cy="1051560"/>
           </a:xfrm>
           <a:prstGeom prst="roundRect">
@@ -2762,13 +2754,13 @@
       </p:sp>
       <p:sp>
         <p:nvSpPr>
-          <p:cNvPr id="15" name="Ikon-sirkel"/>
+          <p:cNvPr id="12" name="Ikon-sirkel"/>
           <p:cNvSpPr/>
           <p:nvPr/>
         </p:nvSpPr>
         <p:spPr>
           <a:xfrm>
-            <a:off x="8356397" y="4773168"/>
+            <a:off x="4566818" y="4773168"/>
             <a:ext cx="640080" cy="640080"/>
           </a:xfrm>
           <a:prstGeom prst="ellipse">
@@ -2782,7 +2774,7 @@
       </p:sp>
       <p:pic>
         <p:nvPicPr>
-          <p:cNvPr id="16" name="Ikon FaLock" descr="preencoded.png">    </p:cNvPr>
+          <p:cNvPr id="13" name="Ikon FaBrain" descr="preencoded.png">    </p:cNvPr>
           <p:cNvPicPr>
             <a:picLocks noChangeAspect="1"/>
           </p:cNvPicPr>
@@ -2796,6 +2788,128 @@
         </p:blipFill>
         <p:spPr>
           <a:xfrm>
+            <a:off x="4720438" y="4926787"/>
+            <a:ext cx="332842" cy="332842"/>
+          </a:xfrm>
+          <a:prstGeom prst="rect">
+            <a:avLst/>
+          </a:prstGeom>
+        </p:spPr>
+      </p:pic>
+      <p:sp>
+        <p:nvSpPr>
+          <p:cNvPr id="14" name="Text 9"/>
+          <p:cNvSpPr txBox="1"/>
+          <p:nvPr/>
+        </p:nvSpPr>
+        <p:spPr>
+          <a:xfrm>
+            <a:off x="5389778" y="4754880"/>
+            <a:ext cx="2326538" cy="731520"/>
+          </a:xfrm>
+          <a:prstGeom prst="rect">
+            <a:avLst/>
+          </a:prstGeom>
+          <a:noFill/>
+          <a:ln/>
+        </p:spPr>
+        <p:txBody>
+          <a:bodyPr wrap="square" lIns="0" tIns="0" rIns="0" bIns="0" rtlCol="0" anchor="ctr"/>
+          <a:lstStyle/>
+          <a:p>
+            <a:pPr indent="0" marL="0">
+              <a:buNone/>
+            </a:pPr>
+            <a:r>
+              <a:rPr lang="en-US" sz="1800" b="1" dirty="0">
+                <a:solidFill>
+                  <a:srgbClr val="FFFFFF"/>
+                </a:solidFill>
+                <a:latin typeface="Calibri" pitchFamily="34" charset="0"/>
+                <a:ea typeface="Calibri" pitchFamily="34" charset="-122"/>
+                <a:cs typeface="Calibri" pitchFamily="34" charset="-120"/>
+              </a:rPr>
+              <a:t>KI som svarer</a:t>
+            </a:r>
+            <a:endParaRPr lang="en-US" sz="1800" dirty="0"/>
+          </a:p>
+          <a:p>
+            <a:pPr indent="0" marL="0">
+              <a:buNone/>
+            </a:pPr>
+            <a:r>
+              <a:rPr lang="en-US" sz="1400" dirty="0">
+                <a:solidFill>
+                  <a:srgbClr val="B9C8D4"/>
+                </a:solidFill>
+                <a:latin typeface="Calibri" pitchFamily="34" charset="0"/>
+                <a:ea typeface="Calibri" pitchFamily="34" charset="-122"/>
+                <a:cs typeface="Calibri" pitchFamily="34" charset="-120"/>
+              </a:rPr>
+              <a:t>med kilde fra egne data</a:t>
+            </a:r>
+            <a:endParaRPr lang="en-US" sz="1800" dirty="0"/>
+          </a:p>
+        </p:txBody>
+      </p:sp>
+      <p:sp>
+        <p:nvSpPr>
+          <p:cNvPr id="15" name="Kort"/>
+          <p:cNvSpPr/>
+          <p:nvPr/>
+        </p:nvSpPr>
+        <p:spPr>
+          <a:xfrm>
+            <a:off x="8127797" y="4572000"/>
+            <a:ext cx="3515258" cy="1051560"/>
+          </a:xfrm>
+          <a:prstGeom prst="roundRect">
+            <a:avLst>
+              <a:gd name="adj" fmla="val 10435"/>
+            </a:avLst>
+          </a:prstGeom>
+          <a:solidFill>
+            <a:srgbClr val="16324D"/>
+          </a:solidFill>
+          <a:ln/>
+        </p:spPr>
+      </p:sp>
+      <p:sp>
+        <p:nvSpPr>
+          <p:cNvPr id="16" name="Ikon-sirkel"/>
+          <p:cNvSpPr/>
+          <p:nvPr/>
+        </p:nvSpPr>
+        <p:spPr>
+          <a:xfrm>
+            <a:off x="8356397" y="4773168"/>
+            <a:ext cx="640080" cy="640080"/>
+          </a:xfrm>
+          <a:prstGeom prst="ellipse">
+            <a:avLst/>
+          </a:prstGeom>
+          <a:solidFill>
+            <a:srgbClr val="0E7C86"/>
+          </a:solidFill>
+          <a:ln/>
+        </p:spPr>
+      </p:sp>
+      <p:pic>
+        <p:nvPicPr>
+          <p:cNvPr id="17" name="Ikon FaLock" descr="preencoded.png">    </p:cNvPr>
+          <p:cNvPicPr>
+            <a:picLocks noChangeAspect="1"/>
+          </p:cNvPicPr>
+          <p:nvPr/>
+        </p:nvPicPr>
+        <p:blipFill>
+          <a:blip r:embed="rId4"/>
+          <a:stretch>
+            <a:fillRect/>
+          </a:stretch>
+        </p:blipFill>
+        <p:spPr>
+          <a:xfrm>
             <a:off x="8510016" y="4926787"/>
             <a:ext cx="332842" cy="332842"/>
           </a:xfrm>
@@ -2806,7 +2920,7 @@
       </p:pic>
       <p:sp>
         <p:nvSpPr>
-          <p:cNvPr id="17" name="Text 12"/>
+          <p:cNvPr id="18" name="Text 12"/>
           <p:cNvSpPr txBox="1"/>
           <p:nvPr/>
         </p:nvSpPr>
@@ -2862,7 +2976,7 @@
       </p:sp>
       <p:sp>
         <p:nvSpPr>
-          <p:cNvPr id="19" name="Text 1"/>
+          <p:cNvPr id="20" name="Text 1"/>
           <p:cNvSpPr/>
           <p:nvPr>
             <p:ph idx="102" type="title" hasCustomPrompt="1"/>
@@ -2998,7 +3112,7 @@
                 <a:ea typeface="Calibri" pitchFamily="34" charset="-122"/>
                 <a:cs typeface="Calibri" pitchFamily="34" charset="-120"/>
               </a:rPr>
-              <a:t>PRIS</a:t>
+              <a:t>SLIK BYTTER DERE</a:t>
             </a:r>
             <a:endParaRPr lang="en-US" sz="1200" dirty="0"/>
           </a:p>
@@ -3039,7 +3153,7 @@
                 <a:ea typeface="Arial" pitchFamily="34" charset="-122"/>
                 <a:cs typeface="Arial" pitchFamily="34" charset="-120"/>
               </a:rPr>
-              <a:t>Betal for modulene dere bruker</a:t>
+              <a:t>I drift på én til to uker – ett fartøy om gangen</a:t>
             </a:r>
             <a:endParaRPr lang="en-US" sz="3000" dirty="0"/>
           </a:p>
@@ -3047,14 +3161,34 @@
       </p:sp>
       <p:sp>
         <p:nvSpPr>
-          <p:cNvPr id="4" name="Text 2"/>
+          <p:cNvPr id="4" name="Shape 2"/>
+          <p:cNvSpPr/>
+          <p:nvPr/>
+        </p:nvSpPr>
+        <p:spPr>
+          <a:xfrm>
+            <a:off x="548640" y="1828800"/>
+            <a:ext cx="566928" cy="566928"/>
+          </a:xfrm>
+          <a:prstGeom prst="ellipse">
+            <a:avLst/>
+          </a:prstGeom>
+          <a:solidFill>
+            <a:srgbClr val="0E7C86"/>
+          </a:solidFill>
+          <a:ln/>
+        </p:spPr>
+      </p:sp>
+      <p:sp>
+        <p:nvSpPr>
+          <p:cNvPr id="5" name="Text 3"/>
           <p:cNvSpPr txBox="1"/>
           <p:nvPr/>
         </p:nvSpPr>
         <p:spPr>
           <a:xfrm>
             <a:off x="548640" y="1828800"/>
-            <a:ext cx="5486400" cy="1645920"/>
+            <a:ext cx="566928" cy="566928"/>
           </a:xfrm>
           <a:prstGeom prst="rect">
             <a:avLst/>
@@ -3063,31 +3197,53 @@
           <a:ln/>
         </p:spPr>
         <p:txBody>
-          <a:bodyPr wrap="square" lIns="0" tIns="0" rIns="0" bIns="0" rtlCol="0" anchor="t"/>
-          <a:lstStyle/>
-          <a:p>
-            <a:pPr indent="0" marL="0">
-              <a:buNone/>
-            </a:pPr>
-            <a:r>
-              <a:rPr lang="en-US" sz="6000" b="1" dirty="0">
-                <a:solidFill>
-                  <a:srgbClr val="0E7C86"/>
+          <a:bodyPr wrap="square" lIns="0" tIns="0" rIns="0" bIns="0" rtlCol="0" anchor="ctr"/>
+          <a:lstStyle/>
+          <a:p>
+            <a:pPr algn="ctr" indent="0" marL="0">
+              <a:buNone/>
+            </a:pPr>
+            <a:r>
+              <a:rPr lang="en-US" sz="2000" b="1" dirty="0">
+                <a:solidFill>
+                  <a:srgbClr val="FFFFFF"/>
                 </a:solidFill>
                 <a:latin typeface="Arial" pitchFamily="34" charset="0"/>
                 <a:ea typeface="Arial" pitchFamily="34" charset="-122"/>
                 <a:cs typeface="Arial" pitchFamily="34" charset="-120"/>
               </a:rPr>
-              <a:t>14 000 kr</a:t>
-            </a:r>
-            <a:endParaRPr lang="en-US" sz="6000" dirty="0"/>
-          </a:p>
-          <a:p>
-            <a:pPr indent="0" marL="0">
-              <a:buNone/>
-            </a:pPr>
-            <a:r>
-              <a:rPr lang="en-US" sz="2000" dirty="0">
+              <a:t>1</a:t>
+            </a:r>
+            <a:endParaRPr lang="en-US" sz="2000" dirty="0"/>
+          </a:p>
+        </p:txBody>
+      </p:sp>
+      <p:sp>
+        <p:nvSpPr>
+          <p:cNvPr id="6" name="Text 4"/>
+          <p:cNvSpPr txBox="1"/>
+          <p:nvPr/>
+        </p:nvSpPr>
+        <p:spPr>
+          <a:xfrm>
+            <a:off x="1371600" y="1783080"/>
+            <a:ext cx="5760720" cy="914400"/>
+          </a:xfrm>
+          <a:prstGeom prst="rect">
+            <a:avLst/>
+          </a:prstGeom>
+          <a:noFill/>
+          <a:ln/>
+        </p:spPr>
+        <p:txBody>
+          <a:bodyPr wrap="square" lIns="0" tIns="0" rIns="0" bIns="0" rtlCol="0" anchor="t"/>
+          <a:lstStyle/>
+          <a:p>
+            <a:pPr indent="0" marL="0">
+              <a:buNone/>
+            </a:pPr>
+            <a:r>
+              <a:rPr lang="en-US" sz="1700" b="1" dirty="0">
                 <a:solidFill>
                   <a:srgbClr val="0B1F33"/>
                 </a:solidFill>
@@ -3095,39 +3251,59 @@
                 <a:ea typeface="Calibri" pitchFamily="34" charset="-122"/>
                 <a:cs typeface="Calibri" pitchFamily="34" charset="-120"/>
               </a:rPr>
-              <a:t>per fartøy per måned for alle 14 moduler</a:t>
-            </a:r>
-            <a:endParaRPr lang="en-US" sz="6000" dirty="0"/>
-          </a:p>
-          <a:p>
-            <a:pPr indent="0" marL="0">
-              <a:buNone/>
-            </a:pPr>
-            <a:r>
-              <a:rPr lang="en-US" sz="1600" dirty="0">
-                <a:solidFill>
-                  <a:srgbClr val="5B6B7A"/>
-                </a:solidFill>
-                <a:latin typeface="Calibri" pitchFamily="34" charset="0"/>
-                <a:ea typeface="Calibri" pitchFamily="34" charset="-122"/>
-                <a:cs typeface="Calibri" pitchFamily="34" charset="-120"/>
-              </a:rPr>
-              <a:t>Eller 1 000 kr per modul. Alle priser ekskl. mva.</a:t>
-            </a:r>
-            <a:endParaRPr lang="en-US" sz="6000" dirty="0"/>
-          </a:p>
-        </p:txBody>
-      </p:sp>
-      <p:sp>
-        <p:nvSpPr>
-          <p:cNvPr id="5" name="Text 3"/>
+              <a:t>Kartlegging</a:t>
+            </a:r>
+            <a:endParaRPr lang="en-US" sz="1700" dirty="0"/>
+          </a:p>
+          <a:p>
+            <a:pPr indent="0" marL="0">
+              <a:buNone/>
+            </a:pPr>
+            <a:r>
+              <a:rPr lang="en-US" sz="1500" dirty="0">
+                <a:solidFill>
+                  <a:srgbClr val="1B2A38"/>
+                </a:solidFill>
+                <a:latin typeface="Calibri" pitchFamily="34" charset="0"/>
+                <a:ea typeface="Calibri" pitchFamily="34" charset="-122"/>
+                <a:cs typeface="Calibri" pitchFamily="34" charset="-120"/>
+              </a:rPr>
+              <a:t>Vi går gjennom dagens system, utstyrsliste og rutiner sammen med dere.</a:t>
+            </a:r>
+            <a:endParaRPr lang="en-US" sz="1700" dirty="0"/>
+          </a:p>
+        </p:txBody>
+      </p:sp>
+      <p:sp>
+        <p:nvSpPr>
+          <p:cNvPr id="7" name="Shape 5"/>
+          <p:cNvSpPr/>
+          <p:nvPr/>
+        </p:nvSpPr>
+        <p:spPr>
+          <a:xfrm>
+            <a:off x="548640" y="2816352"/>
+            <a:ext cx="566928" cy="566928"/>
+          </a:xfrm>
+          <a:prstGeom prst="ellipse">
+            <a:avLst/>
+          </a:prstGeom>
+          <a:solidFill>
+            <a:srgbClr val="0E7C86"/>
+          </a:solidFill>
+          <a:ln/>
+        </p:spPr>
+      </p:sp>
+      <p:sp>
+        <p:nvSpPr>
+          <p:cNvPr id="8" name="Text 6"/>
           <p:cNvSpPr txBox="1"/>
           <p:nvPr/>
         </p:nvSpPr>
         <p:spPr>
           <a:xfrm>
-            <a:off x="548640" y="3703320"/>
-            <a:ext cx="5486400" cy="1463040"/>
+            <a:off x="548640" y="2816352"/>
+            <a:ext cx="566928" cy="566928"/>
           </a:xfrm>
           <a:prstGeom prst="rect">
             <a:avLst/>
@@ -3136,6 +3312,45 @@
           <a:ln/>
         </p:spPr>
         <p:txBody>
+          <a:bodyPr wrap="square" lIns="0" tIns="0" rIns="0" bIns="0" rtlCol="0" anchor="ctr"/>
+          <a:lstStyle/>
+          <a:p>
+            <a:pPr algn="ctr" indent="0" marL="0">
+              <a:buNone/>
+            </a:pPr>
+            <a:r>
+              <a:rPr lang="en-US" sz="2000" b="1" dirty="0">
+                <a:solidFill>
+                  <a:srgbClr val="FFFFFF"/>
+                </a:solidFill>
+                <a:latin typeface="Arial" pitchFamily="34" charset="0"/>
+                <a:ea typeface="Arial" pitchFamily="34" charset="-122"/>
+                <a:cs typeface="Arial" pitchFamily="34" charset="-120"/>
+              </a:rPr>
+              <a:t>2</a:t>
+            </a:r>
+            <a:endParaRPr lang="en-US" sz="2000" dirty="0"/>
+          </a:p>
+        </p:txBody>
+      </p:sp>
+      <p:sp>
+        <p:nvSpPr>
+          <p:cNvPr id="9" name="Text 7"/>
+          <p:cNvSpPr txBox="1"/>
+          <p:nvPr/>
+        </p:nvSpPr>
+        <p:spPr>
+          <a:xfrm>
+            <a:off x="1371600" y="2770632"/>
+            <a:ext cx="5760720" cy="914400"/>
+          </a:xfrm>
+          <a:prstGeom prst="rect">
+            <a:avLst/>
+          </a:prstGeom>
+          <a:noFill/>
+          <a:ln/>
+        </p:spPr>
+        <p:txBody>
           <a:bodyPr wrap="square" lIns="0" tIns="0" rIns="0" bIns="0" rtlCol="0" anchor="t"/>
           <a:lstStyle/>
           <a:p>
@@ -3143,7 +3358,7 @@
               <a:buNone/>
             </a:pPr>
             <a:r>
-              <a:rPr lang="en-US" sz="1600" b="1" dirty="0">
+              <a:rPr lang="en-US" sz="1700" b="1" dirty="0">
                 <a:solidFill>
                   <a:srgbClr val="0B1F33"/>
                 </a:solidFill>
@@ -3151,13 +3366,16 @@
                 <a:ea typeface="Calibri" pitchFamily="34" charset="-122"/>
                 <a:cs typeface="Calibri" pitchFamily="34" charset="-120"/>
               </a:rPr>
-              <a:t>Til sammenligning: </a:t>
-            </a:r>
-            <a:pPr indent="0" marL="0">
-              <a:buNone/>
-            </a:pPr>
-            <a:r>
-              <a:rPr lang="en-US" sz="1600" dirty="0">
+              <a:t>Overføring av data</a:t>
+            </a:r>
+            <a:endParaRPr lang="en-US" sz="1700" dirty="0"/>
+          </a:p>
+          <a:p>
+            <a:pPr indent="0" marL="0">
+              <a:buNone/>
+            </a:pPr>
+            <a:r>
+              <a:rPr lang="en-US" sz="1500" dirty="0">
                 <a:solidFill>
                   <a:srgbClr val="1B2A38"/>
                 </a:solidFill>
@@ -3165,22 +3383,252 @@
                 <a:ea typeface="Calibri" pitchFamily="34" charset="-122"/>
                 <a:cs typeface="Calibri" pitchFamily="34" charset="-120"/>
               </a:rPr>
-              <a:t>Hva koster ett døgn ved kai fordi en feil ikke ble fanget opp i tide? For mange fartøy er én unngått driftsstans nok til å dekke abonnementet i lang tid.</a:t>
-            </a:r>
-            <a:endParaRPr lang="en-US" sz="1600" dirty="0"/>
-          </a:p>
-        </p:txBody>
-      </p:sp>
-      <p:sp>
-        <p:nvSpPr>
-          <p:cNvPr id="6" name="Kort"/>
+              <a:t>Dere flytter dataene selv med våre importmaler, eller vi gjør det for dere mot et engangsgebyr.</a:t>
+            </a:r>
+            <a:endParaRPr lang="en-US" sz="1700" dirty="0"/>
+          </a:p>
+        </p:txBody>
+      </p:sp>
+      <p:sp>
+        <p:nvSpPr>
+          <p:cNvPr id="10" name="Shape 8"/>
           <p:cNvSpPr/>
           <p:nvPr/>
         </p:nvSpPr>
         <p:spPr>
           <a:xfrm>
-            <a:off x="6583680" y="1828800"/>
-            <a:ext cx="5059375" cy="3931920"/>
+            <a:off x="548640" y="3803904"/>
+            <a:ext cx="566928" cy="566928"/>
+          </a:xfrm>
+          <a:prstGeom prst="ellipse">
+            <a:avLst/>
+          </a:prstGeom>
+          <a:solidFill>
+            <a:srgbClr val="0E7C86"/>
+          </a:solidFill>
+          <a:ln/>
+        </p:spPr>
+      </p:sp>
+      <p:sp>
+        <p:nvSpPr>
+          <p:cNvPr id="11" name="Text 9"/>
+          <p:cNvSpPr txBox="1"/>
+          <p:nvPr/>
+        </p:nvSpPr>
+        <p:spPr>
+          <a:xfrm>
+            <a:off x="548640" y="3803904"/>
+            <a:ext cx="566928" cy="566928"/>
+          </a:xfrm>
+          <a:prstGeom prst="rect">
+            <a:avLst/>
+          </a:prstGeom>
+          <a:noFill/>
+          <a:ln/>
+        </p:spPr>
+        <p:txBody>
+          <a:bodyPr wrap="square" lIns="0" tIns="0" rIns="0" bIns="0" rtlCol="0" anchor="ctr"/>
+          <a:lstStyle/>
+          <a:p>
+            <a:pPr algn="ctr" indent="0" marL="0">
+              <a:buNone/>
+            </a:pPr>
+            <a:r>
+              <a:rPr lang="en-US" sz="2000" b="1" dirty="0">
+                <a:solidFill>
+                  <a:srgbClr val="FFFFFF"/>
+                </a:solidFill>
+                <a:latin typeface="Arial" pitchFamily="34" charset="0"/>
+                <a:ea typeface="Arial" pitchFamily="34" charset="-122"/>
+                <a:cs typeface="Arial" pitchFamily="34" charset="-120"/>
+              </a:rPr>
+              <a:t>3</a:t>
+            </a:r>
+            <a:endParaRPr lang="en-US" sz="2000" dirty="0"/>
+          </a:p>
+        </p:txBody>
+      </p:sp>
+      <p:sp>
+        <p:nvSpPr>
+          <p:cNvPr id="12" name="Text 10"/>
+          <p:cNvSpPr txBox="1"/>
+          <p:nvPr/>
+        </p:nvSpPr>
+        <p:spPr>
+          <a:xfrm>
+            <a:off x="1371600" y="3758184"/>
+            <a:ext cx="5760720" cy="914400"/>
+          </a:xfrm>
+          <a:prstGeom prst="rect">
+            <a:avLst/>
+          </a:prstGeom>
+          <a:noFill/>
+          <a:ln/>
+        </p:spPr>
+        <p:txBody>
+          <a:bodyPr wrap="square" lIns="0" tIns="0" rIns="0" bIns="0" rtlCol="0" anchor="t"/>
+          <a:lstStyle/>
+          <a:p>
+            <a:pPr indent="0" marL="0">
+              <a:buNone/>
+            </a:pPr>
+            <a:r>
+              <a:rPr lang="en-US" sz="1700" b="1" dirty="0">
+                <a:solidFill>
+                  <a:srgbClr val="0B1F33"/>
+                </a:solidFill>
+                <a:latin typeface="Calibri" pitchFamily="34" charset="0"/>
+                <a:ea typeface="Calibri" pitchFamily="34" charset="-122"/>
+                <a:cs typeface="Calibri" pitchFamily="34" charset="-120"/>
+              </a:rPr>
+              <a:t>Pilot på ett fartøy</a:t>
+            </a:r>
+            <a:endParaRPr lang="en-US" sz="1700" dirty="0"/>
+          </a:p>
+          <a:p>
+            <a:pPr indent="0" marL="0">
+              <a:buNone/>
+            </a:pPr>
+            <a:r>
+              <a:rPr lang="en-US" sz="1500" dirty="0">
+                <a:solidFill>
+                  <a:srgbClr val="1B2A38"/>
+                </a:solidFill>
+                <a:latin typeface="Calibri" pitchFamily="34" charset="0"/>
+                <a:ea typeface="Calibri" pitchFamily="34" charset="-122"/>
+                <a:cs typeface="Calibri" pitchFamily="34" charset="-120"/>
+              </a:rPr>
+              <a:t>Seks uker med mål dere har satt på forhånd. Dagens system kan gå parallelt.</a:t>
+            </a:r>
+            <a:endParaRPr lang="en-US" sz="1700" dirty="0"/>
+          </a:p>
+        </p:txBody>
+      </p:sp>
+      <p:sp>
+        <p:nvSpPr>
+          <p:cNvPr id="13" name="Shape 11"/>
+          <p:cNvSpPr/>
+          <p:nvPr/>
+        </p:nvSpPr>
+        <p:spPr>
+          <a:xfrm>
+            <a:off x="548640" y="4791456"/>
+            <a:ext cx="566928" cy="566928"/>
+          </a:xfrm>
+          <a:prstGeom prst="ellipse">
+            <a:avLst/>
+          </a:prstGeom>
+          <a:solidFill>
+            <a:srgbClr val="0E7C86"/>
+          </a:solidFill>
+          <a:ln/>
+        </p:spPr>
+      </p:sp>
+      <p:sp>
+        <p:nvSpPr>
+          <p:cNvPr id="14" name="Text 12"/>
+          <p:cNvSpPr txBox="1"/>
+          <p:nvPr/>
+        </p:nvSpPr>
+        <p:spPr>
+          <a:xfrm>
+            <a:off x="548640" y="4791456"/>
+            <a:ext cx="566928" cy="566928"/>
+          </a:xfrm>
+          <a:prstGeom prst="rect">
+            <a:avLst/>
+          </a:prstGeom>
+          <a:noFill/>
+          <a:ln/>
+        </p:spPr>
+        <p:txBody>
+          <a:bodyPr wrap="square" lIns="0" tIns="0" rIns="0" bIns="0" rtlCol="0" anchor="ctr"/>
+          <a:lstStyle/>
+          <a:p>
+            <a:pPr algn="ctr" indent="0" marL="0">
+              <a:buNone/>
+            </a:pPr>
+            <a:r>
+              <a:rPr lang="en-US" sz="2000" b="1" dirty="0">
+                <a:solidFill>
+                  <a:srgbClr val="FFFFFF"/>
+                </a:solidFill>
+                <a:latin typeface="Arial" pitchFamily="34" charset="0"/>
+                <a:ea typeface="Arial" pitchFamily="34" charset="-122"/>
+                <a:cs typeface="Arial" pitchFamily="34" charset="-120"/>
+              </a:rPr>
+              <a:t>4</a:t>
+            </a:r>
+            <a:endParaRPr lang="en-US" sz="2000" dirty="0"/>
+          </a:p>
+        </p:txBody>
+      </p:sp>
+      <p:sp>
+        <p:nvSpPr>
+          <p:cNvPr id="15" name="Text 13"/>
+          <p:cNvSpPr txBox="1"/>
+          <p:nvPr/>
+        </p:nvSpPr>
+        <p:spPr>
+          <a:xfrm>
+            <a:off x="1371600" y="4745736"/>
+            <a:ext cx="5760720" cy="914400"/>
+          </a:xfrm>
+          <a:prstGeom prst="rect">
+            <a:avLst/>
+          </a:prstGeom>
+          <a:noFill/>
+          <a:ln/>
+        </p:spPr>
+        <p:txBody>
+          <a:bodyPr wrap="square" lIns="0" tIns="0" rIns="0" bIns="0" rtlCol="0" anchor="t"/>
+          <a:lstStyle/>
+          <a:p>
+            <a:pPr indent="0" marL="0">
+              <a:buNone/>
+            </a:pPr>
+            <a:r>
+              <a:rPr lang="en-US" sz="1700" b="1" dirty="0">
+                <a:solidFill>
+                  <a:srgbClr val="0B1F33"/>
+                </a:solidFill>
+                <a:latin typeface="Calibri" pitchFamily="34" charset="0"/>
+                <a:ea typeface="Calibri" pitchFamily="34" charset="-122"/>
+                <a:cs typeface="Calibri" pitchFamily="34" charset="-120"/>
+              </a:rPr>
+              <a:t>Resten av flåten</a:t>
+            </a:r>
+            <a:endParaRPr lang="en-US" sz="1700" dirty="0"/>
+          </a:p>
+          <a:p>
+            <a:pPr indent="0" marL="0">
+              <a:buNone/>
+            </a:pPr>
+            <a:r>
+              <a:rPr lang="en-US" sz="1500" dirty="0">
+                <a:solidFill>
+                  <a:srgbClr val="1B2A38"/>
+                </a:solidFill>
+                <a:latin typeface="Calibri" pitchFamily="34" charset="0"/>
+                <a:ea typeface="Calibri" pitchFamily="34" charset="-122"/>
+                <a:cs typeface="Calibri" pitchFamily="34" charset="-120"/>
+              </a:rPr>
+              <a:t>Dere bestemmer om og når flere fartøy skal over.</a:t>
+            </a:r>
+            <a:endParaRPr lang="en-US" sz="1700" dirty="0"/>
+          </a:p>
+        </p:txBody>
+      </p:sp>
+      <p:sp>
+        <p:nvSpPr>
+          <p:cNvPr id="16" name="Kort"/>
+          <p:cNvSpPr/>
+          <p:nvPr/>
+        </p:nvSpPr>
+        <p:spPr>
+          <a:xfrm>
+            <a:off x="7543800" y="1828800"/>
+            <a:ext cx="4099255" cy="3931920"/>
           </a:xfrm>
           <a:prstGeom prst="roundRect">
             <a:avLst>
@@ -3188,20 +3636,20 @@
             </a:avLst>
           </a:prstGeom>
           <a:solidFill>
-            <a:srgbClr val="EEF3F6"/>
+            <a:srgbClr val="0B1F33"/>
           </a:solidFill>
           <a:ln/>
         </p:spPr>
       </p:sp>
       <p:sp>
         <p:nvSpPr>
-          <p:cNvPr id="7" name="Ikon-sirkel"/>
+          <p:cNvPr id="17" name="Ikon-sirkel"/>
           <p:cNvSpPr/>
           <p:nvPr/>
         </p:nvSpPr>
         <p:spPr>
           <a:xfrm>
-            <a:off x="6903720" y="2103120"/>
+            <a:off x="7863840" y="2103120"/>
             <a:ext cx="640080" cy="640080"/>
           </a:xfrm>
           <a:prstGeom prst="ellipse">
@@ -3215,7 +3663,7 @@
       </p:sp>
       <p:pic>
         <p:nvPicPr>
-          <p:cNvPr id="8" name="Ikon FaClipboardCheck" descr="preencoded.png">    </p:cNvPr>
+          <p:cNvPr id="18" name="Ikon FaLock" descr="preencoded.png">    </p:cNvPr>
           <p:cNvPicPr>
             <a:picLocks noChangeAspect="1"/>
           </p:cNvPicPr>
@@ -3229,7 +3677,7 @@
         </p:blipFill>
         <p:spPr>
           <a:xfrm>
-            <a:off x="7057339" y="2256739"/>
+            <a:off x="8017459" y="2256739"/>
             <a:ext cx="332842" cy="332842"/>
           </a:xfrm>
           <a:prstGeom prst="rect">
@@ -3239,14 +3687,14 @@
       </p:pic>
       <p:sp>
         <p:nvSpPr>
-          <p:cNvPr id="9" name="Text 6"/>
+          <p:cNvPr id="19" name="Text 16"/>
           <p:cNvSpPr txBox="1"/>
           <p:nvPr/>
         </p:nvSpPr>
         <p:spPr>
           <a:xfrm>
-            <a:off x="7726680" y="2103120"/>
-            <a:ext cx="3687775" cy="640080"/>
+            <a:off x="8686800" y="2103120"/>
+            <a:ext cx="2727655" cy="640080"/>
           </a:xfrm>
           <a:prstGeom prst="rect">
             <a:avLst/>
@@ -3264,13 +3712,13 @@
             <a:r>
               <a:rPr lang="en-US" sz="2000" b="1" dirty="0">
                 <a:solidFill>
-                  <a:srgbClr val="0B1F33"/>
-                </a:solidFill>
-                <a:latin typeface="Calibri" pitchFamily="34" charset="0"/>
-                <a:ea typeface="Calibri" pitchFamily="34" charset="-122"/>
-                <a:cs typeface="Calibri" pitchFamily="34" charset="-120"/>
-              </a:rPr>
-              <a:t>Inkludert i prisen</a:t>
+                  <a:srgbClr val="FFFFFF"/>
+                </a:solidFill>
+                <a:latin typeface="Calibri" pitchFamily="34" charset="0"/>
+                <a:ea typeface="Calibri" pitchFamily="34" charset="-122"/>
+                <a:cs typeface="Calibri" pitchFamily="34" charset="-120"/>
+              </a:rPr>
+              <a:t>Dataene deres</a:t>
             </a:r>
             <a:endParaRPr lang="en-US" sz="2000" dirty="0"/>
           </a:p>
@@ -3278,14 +3726,14 @@
       </p:sp>
       <p:sp>
         <p:nvSpPr>
-          <p:cNvPr id="10" name="Text 7"/>
+          <p:cNvPr id="20" name="Text 17"/>
           <p:cNvSpPr txBox="1"/>
           <p:nvPr/>
         </p:nvSpPr>
         <p:spPr>
           <a:xfrm>
-            <a:off x="6903720" y="3017520"/>
-            <a:ext cx="4419295" cy="2651760"/>
+            <a:off x="7863840" y="3017520"/>
+            <a:ext cx="3459175" cy="2560320"/>
           </a:xfrm>
           <a:prstGeom prst="rect">
             <a:avLst/>
@@ -3297,187 +3745,86 @@
           <a:bodyPr wrap="square" lIns="0" tIns="0" rIns="0" bIns="0" rtlCol="0" anchor="t"/>
           <a:lstStyle/>
           <a:p>
-            <a:pPr indent="0" marL="0">
+            <a:pPr marL="342900" indent="-342900">
               <a:spcAft>
                 <a:spcPts val="800"/>
               </a:spcAft>
-              <a:buNone/>
-            </a:pPr>
-            <a:r>
-              <a:rPr lang="en-US" sz="1500" b="1" dirty="0">
-                <a:solidFill>
-                  <a:srgbClr val="1B2A38"/>
-                </a:solidFill>
-                <a:latin typeface="Calibri" pitchFamily="34" charset="0"/>
-                <a:ea typeface="Calibri" pitchFamily="34" charset="-122"/>
-                <a:cs typeface="Calibri" pitchFamily="34" charset="-120"/>
-              </a:rPr>
-              <a:t>KI-assistent: </a:t>
-            </a:r>
-            <a:pPr indent="0" marL="0">
+              <a:buSzPct val="100000"/>
+              <a:buChar char="•"/>
+            </a:pPr>
+            <a:r>
+              <a:rPr lang="en-US" sz="1500" dirty="0">
+                <a:solidFill>
+                  <a:srgbClr val="DCE6EE"/>
+                </a:solidFill>
+                <a:latin typeface="Calibri" pitchFamily="34" charset="0"/>
+                <a:ea typeface="Calibri" pitchFamily="34" charset="-122"/>
+                <a:cs typeface="Calibri" pitchFamily="34" charset="-120"/>
+              </a:rPr>
+              <a:t>Lagres på server i Norge</a:t>
+            </a:r>
+            <a:endParaRPr lang="en-US" sz="1500" dirty="0"/>
+          </a:p>
+          <a:p>
+            <a:pPr marL="342900" indent="-342900">
               <a:spcAft>
                 <a:spcPts val="800"/>
               </a:spcAft>
-              <a:buNone/>
+              <a:buSzPct val="100000"/>
+              <a:buChar char="•"/>
             </a:pPr>
             <a:r>
               <a:rPr lang="en-US" sz="1500" dirty="0">
                 <a:solidFill>
-                  <a:srgbClr val="1B2A38"/>
-                </a:solidFill>
-                <a:latin typeface="Calibri" pitchFamily="34" charset="0"/>
-                <a:ea typeface="Calibri" pitchFamily="34" charset="-122"/>
-                <a:cs typeface="Calibri" pitchFamily="34" charset="-120"/>
-              </a:rPr>
-              <a:t>inkludert i full pakke</a:t>
+                  <a:srgbClr val="DCE6EE"/>
+                </a:solidFill>
+                <a:latin typeface="Calibri" pitchFamily="34" charset="0"/>
+                <a:ea typeface="Calibri" pitchFamily="34" charset="-122"/>
+                <a:cs typeface="Calibri" pitchFamily="34" charset="-120"/>
+              </a:rPr>
+              <a:t>Brukes aldri til å trene KI-modeller</a:t>
             </a:r>
             <a:endParaRPr lang="en-US" sz="1500" dirty="0"/>
           </a:p>
           <a:p>
-            <a:pPr indent="0" marL="0">
+            <a:pPr marL="342900" indent="-342900">
               <a:spcAft>
                 <a:spcPts val="800"/>
               </a:spcAft>
-              <a:buNone/>
-            </a:pPr>
-            <a:r>
-              <a:rPr lang="en-US" sz="1500" b="1" dirty="0">
-                <a:solidFill>
-                  <a:srgbClr val="1B2A38"/>
-                </a:solidFill>
-                <a:latin typeface="Calibri" pitchFamily="34" charset="0"/>
-                <a:ea typeface="Calibri" pitchFamily="34" charset="-122"/>
-                <a:cs typeface="Calibri" pitchFamily="34" charset="-120"/>
-              </a:rPr>
-              <a:t>Support: </a:t>
-            </a:r>
-            <a:pPr indent="0" marL="0">
+              <a:buSzPct val="100000"/>
+              <a:buChar char="•"/>
+            </a:pPr>
+            <a:r>
+              <a:rPr lang="en-US" sz="1500" dirty="0">
+                <a:solidFill>
+                  <a:srgbClr val="DCE6EE"/>
+                </a:solidFill>
+                <a:latin typeface="Calibri" pitchFamily="34" charset="0"/>
+                <a:ea typeface="Calibri" pitchFamily="34" charset="-122"/>
+                <a:cs typeface="Calibri" pitchFamily="34" charset="-120"/>
+              </a:rPr>
+              <a:t>Dere eier dataene</a:t>
+            </a:r>
+            <a:endParaRPr lang="en-US" sz="1500" dirty="0"/>
+          </a:p>
+          <a:p>
+            <a:pPr marL="342900" indent="-342900">
               <a:spcAft>
                 <a:spcPts val="800"/>
               </a:spcAft>
-              <a:buNone/>
+              <a:buSzPct val="100000"/>
+              <a:buChar char="•"/>
             </a:pPr>
             <a:r>
               <a:rPr lang="en-US" sz="1500" dirty="0">
                 <a:solidFill>
-                  <a:srgbClr val="1B2A38"/>
-                </a:solidFill>
-                <a:latin typeface="Calibri" pitchFamily="34" charset="0"/>
-                <a:ea typeface="Calibri" pitchFamily="34" charset="-122"/>
-                <a:cs typeface="Calibri" pitchFamily="34" charset="-120"/>
-              </a:rPr>
-              <a:t>full support uten ekstra kostnad</a:t>
-            </a:r>
-            <a:endParaRPr lang="en-US" sz="1500" dirty="0"/>
-          </a:p>
-          <a:p>
-            <a:pPr indent="0" marL="0">
-              <a:spcAft>
-                <a:spcPts val="800"/>
-              </a:spcAft>
-              <a:buNone/>
-            </a:pPr>
-            <a:r>
-              <a:rPr lang="en-US" sz="1500" b="1" dirty="0">
-                <a:solidFill>
-                  <a:srgbClr val="1B2A38"/>
-                </a:solidFill>
-                <a:latin typeface="Calibri" pitchFamily="34" charset="0"/>
-                <a:ea typeface="Calibri" pitchFamily="34" charset="-122"/>
-                <a:cs typeface="Calibri" pitchFamily="34" charset="-120"/>
-              </a:rPr>
-              <a:t>Oppdateringer: </a:t>
-            </a:r>
-            <a:pPr indent="0" marL="0">
-              <a:spcAft>
-                <a:spcPts val="800"/>
-              </a:spcAft>
-              <a:buNone/>
-            </a:pPr>
-            <a:r>
-              <a:rPr lang="en-US" sz="1500" dirty="0">
-                <a:solidFill>
-                  <a:srgbClr val="1B2A38"/>
-                </a:solidFill>
-                <a:latin typeface="Calibri" pitchFamily="34" charset="0"/>
-                <a:ea typeface="Calibri" pitchFamily="34" charset="-122"/>
-                <a:cs typeface="Calibri" pitchFamily="34" charset="-120"/>
-              </a:rPr>
-              <a:t>alle nye versjoner</a:t>
-            </a:r>
-            <a:endParaRPr lang="en-US" sz="1500" dirty="0"/>
-          </a:p>
-          <a:p>
-            <a:pPr indent="0" marL="0">
-              <a:spcAft>
-                <a:spcPts val="800"/>
-              </a:spcAft>
-              <a:buNone/>
-            </a:pPr>
-            <a:r>
-              <a:rPr lang="en-US" sz="1500" b="1" dirty="0">
-                <a:solidFill>
-                  <a:srgbClr val="1B2A38"/>
-                </a:solidFill>
-                <a:latin typeface="Calibri" pitchFamily="34" charset="0"/>
-                <a:ea typeface="Calibri" pitchFamily="34" charset="-122"/>
-                <a:cs typeface="Calibri" pitchFamily="34" charset="-120"/>
-              </a:rPr>
-              <a:t>Dataoverføring: </a:t>
-            </a:r>
-            <a:pPr indent="0" marL="0">
-              <a:spcAft>
-                <a:spcPts val="800"/>
-              </a:spcAft>
-              <a:buNone/>
-            </a:pPr>
-            <a:r>
-              <a:rPr lang="en-US" sz="1500" dirty="0">
-                <a:solidFill>
-                  <a:srgbClr val="1B2A38"/>
-                </a:solidFill>
-                <a:latin typeface="Calibri" pitchFamily="34" charset="0"/>
-                <a:ea typeface="Calibri" pitchFamily="34" charset="-122"/>
-                <a:cs typeface="Calibri" pitchFamily="34" charset="-120"/>
-              </a:rPr>
-              <a:t>gjør det selv, eller vi gjør det mot et engangsgebyr</a:t>
-            </a:r>
-            <a:endParaRPr lang="en-US" sz="1500" dirty="0"/>
-          </a:p>
-          <a:p>
-            <a:pPr indent="0" marL="0">
-              <a:spcAft>
-                <a:spcPts val="800"/>
-              </a:spcAft>
-              <a:buNone/>
-            </a:pPr>
-            <a:r>
-              <a:rPr lang="en-US" sz="1500" b="1" dirty="0">
-                <a:solidFill>
-                  <a:srgbClr val="1B2A38"/>
-                </a:solidFill>
-                <a:latin typeface="Calibri" pitchFamily="34" charset="0"/>
-                <a:ea typeface="Calibri" pitchFamily="34" charset="-122"/>
-                <a:cs typeface="Calibri" pitchFamily="34" charset="-120"/>
-              </a:rPr>
-              <a:t>Pilot: </a:t>
-            </a:r>
-            <a:pPr indent="0" marL="0">
-              <a:spcAft>
-                <a:spcPts val="800"/>
-              </a:spcAft>
-              <a:buNone/>
-            </a:pPr>
-            <a:r>
-              <a:rPr lang="en-US" sz="1500" dirty="0">
-                <a:solidFill>
-                  <a:srgbClr val="1B2A38"/>
-                </a:solidFill>
-                <a:latin typeface="Calibri" pitchFamily="34" charset="0"/>
-                <a:ea typeface="Calibri" pitchFamily="34" charset="-122"/>
-                <a:cs typeface="Calibri" pitchFamily="34" charset="-120"/>
-              </a:rPr>
-              <a:t>seks uker på ett fartøy til halv pris. Fortsetter dere, trekkes beløpet fra første års avtale.</a:t>
+                  <a:srgbClr val="DCE6EE"/>
+                </a:solidFill>
+                <a:latin typeface="Calibri" pitchFamily="34" charset="0"/>
+                <a:ea typeface="Calibri" pitchFamily="34" charset="-122"/>
+                <a:cs typeface="Calibri" pitchFamily="34" charset="-120"/>
+              </a:rPr>
+              <a:t>Kan eksporteres når som helst</a:t>
             </a:r>
             <a:endParaRPr lang="en-US" sz="1500" dirty="0"/>
           </a:p>
@@ -3591,7 +3938,7 @@
                 <a:ea typeface="Calibri" pitchFamily="34" charset="-122"/>
                 <a:cs typeface="Calibri" pitchFamily="34" charset="-120"/>
               </a:rPr>
-              <a:t>PRAKTISKE SPØRSMÅL</a:t>
+              <a:t>PRIS</a:t>
             </a:r>
             <a:endParaRPr lang="en-US" sz="1200" dirty="0"/>
           </a:p>
@@ -3632,7 +3979,7 @@
                 <a:ea typeface="Arial" pitchFamily="34" charset="-122"/>
                 <a:cs typeface="Arial" pitchFamily="34" charset="-120"/>
               </a:rPr>
-              <a:t>Det dere sannsynligvis lurer på</a:t>
+              <a:t>Betal for modulene dere bruker</a:t>
             </a:r>
             <a:endParaRPr lang="en-US" sz="3000" dirty="0"/>
           </a:p>
@@ -3640,18 +3987,144 @@
       </p:sp>
       <p:sp>
         <p:nvSpPr>
-          <p:cNvPr id="4" name="Kort"/>
+          <p:cNvPr id="4" name="Text 2"/>
+          <p:cNvSpPr txBox="1"/>
+          <p:nvPr/>
+        </p:nvSpPr>
+        <p:spPr>
+          <a:xfrm>
+            <a:off x="548640" y="1828800"/>
+            <a:ext cx="5486400" cy="1645920"/>
+          </a:xfrm>
+          <a:prstGeom prst="rect">
+            <a:avLst/>
+          </a:prstGeom>
+          <a:noFill/>
+          <a:ln/>
+        </p:spPr>
+        <p:txBody>
+          <a:bodyPr wrap="square" lIns="0" tIns="0" rIns="0" bIns="0" rtlCol="0" anchor="t"/>
+          <a:lstStyle/>
+          <a:p>
+            <a:pPr indent="0" marL="0">
+              <a:buNone/>
+            </a:pPr>
+            <a:r>
+              <a:rPr lang="en-US" sz="6000" b="1" dirty="0">
+                <a:solidFill>
+                  <a:srgbClr val="0E7C86"/>
+                </a:solidFill>
+                <a:latin typeface="Arial" pitchFamily="34" charset="0"/>
+                <a:ea typeface="Arial" pitchFamily="34" charset="-122"/>
+                <a:cs typeface="Arial" pitchFamily="34" charset="-120"/>
+              </a:rPr>
+              <a:t>14 000 kr</a:t>
+            </a:r>
+            <a:endParaRPr lang="en-US" sz="6000" dirty="0"/>
+          </a:p>
+          <a:p>
+            <a:pPr indent="0" marL="0">
+              <a:buNone/>
+            </a:pPr>
+            <a:r>
+              <a:rPr lang="en-US" sz="2000" dirty="0">
+                <a:solidFill>
+                  <a:srgbClr val="0B1F33"/>
+                </a:solidFill>
+                <a:latin typeface="Calibri" pitchFamily="34" charset="0"/>
+                <a:ea typeface="Calibri" pitchFamily="34" charset="-122"/>
+                <a:cs typeface="Calibri" pitchFamily="34" charset="-120"/>
+              </a:rPr>
+              <a:t>per fartøy per måned for alle 14 moduler</a:t>
+            </a:r>
+            <a:endParaRPr lang="en-US" sz="6000" dirty="0"/>
+          </a:p>
+          <a:p>
+            <a:pPr indent="0" marL="0">
+              <a:buNone/>
+            </a:pPr>
+            <a:r>
+              <a:rPr lang="en-US" sz="1600" dirty="0">
+                <a:solidFill>
+                  <a:srgbClr val="5B6B7A"/>
+                </a:solidFill>
+                <a:latin typeface="Calibri" pitchFamily="34" charset="0"/>
+                <a:ea typeface="Calibri" pitchFamily="34" charset="-122"/>
+                <a:cs typeface="Calibri" pitchFamily="34" charset="-120"/>
+              </a:rPr>
+              <a:t>Eller 1 000 kr per modul. Alle priser ekskl. mva.</a:t>
+            </a:r>
+            <a:endParaRPr lang="en-US" sz="6000" dirty="0"/>
+          </a:p>
+        </p:txBody>
+      </p:sp>
+      <p:sp>
+        <p:nvSpPr>
+          <p:cNvPr id="5" name="Text 3"/>
+          <p:cNvSpPr txBox="1"/>
+          <p:nvPr/>
+        </p:nvSpPr>
+        <p:spPr>
+          <a:xfrm>
+            <a:off x="548640" y="3703320"/>
+            <a:ext cx="5486400" cy="1463040"/>
+          </a:xfrm>
+          <a:prstGeom prst="rect">
+            <a:avLst/>
+          </a:prstGeom>
+          <a:noFill/>
+          <a:ln/>
+        </p:spPr>
+        <p:txBody>
+          <a:bodyPr wrap="square" lIns="0" tIns="0" rIns="0" bIns="0" rtlCol="0" anchor="t"/>
+          <a:lstStyle/>
+          <a:p>
+            <a:pPr indent="0" marL="0">
+              <a:buNone/>
+            </a:pPr>
+            <a:r>
+              <a:rPr lang="en-US" sz="1600" b="1" dirty="0">
+                <a:solidFill>
+                  <a:srgbClr val="0B1F33"/>
+                </a:solidFill>
+                <a:latin typeface="Calibri" pitchFamily="34" charset="0"/>
+                <a:ea typeface="Calibri" pitchFamily="34" charset="-122"/>
+                <a:cs typeface="Calibri" pitchFamily="34" charset="-120"/>
+              </a:rPr>
+              <a:t>Til sammenligning: </a:t>
+            </a:r>
+            <a:pPr indent="0" marL="0">
+              <a:buNone/>
+            </a:pPr>
+            <a:r>
+              <a:rPr lang="en-US" sz="1600" dirty="0">
+                <a:solidFill>
+                  <a:srgbClr val="1B2A38"/>
+                </a:solidFill>
+                <a:latin typeface="Calibri" pitchFamily="34" charset="0"/>
+                <a:ea typeface="Calibri" pitchFamily="34" charset="-122"/>
+                <a:cs typeface="Calibri" pitchFamily="34" charset="-120"/>
+              </a:rPr>
+              <a:t>Hva koster ett døgn ved kai fordi en feil ikke ble fanget opp i tide? For mange fartøy er én unngått driftsstans nok til å dekke abonnementet i lang tid.</a:t>
+            </a:r>
+            <a:endParaRPr lang="en-US" sz="1600" dirty="0"/>
+          </a:p>
+        </p:txBody>
+      </p:sp>
+      <p:sp>
+        <p:nvSpPr>
+          <p:cNvPr id="6" name="Kort"/>
           <p:cNvSpPr/>
           <p:nvPr/>
         </p:nvSpPr>
         <p:spPr>
           <a:xfrm>
-            <a:off x="548640" y="1828800"/>
-            <a:ext cx="5410048" cy="1143000"/>
+            <a:off x="6583680" y="1828800"/>
+            <a:ext cx="5059375" cy="3931920"/>
           </a:xfrm>
           <a:prstGeom prst="roundRect">
             <a:avLst>
-              <a:gd name="adj" fmla="val 9600"/>
+              <a:gd name="adj" fmla="val 2791"/>
             </a:avLst>
           </a:prstGeom>
           <a:solidFill>
@@ -3662,14 +4135,58 @@
       </p:sp>
       <p:sp>
         <p:nvSpPr>
-          <p:cNvPr id="5" name="Text 3"/>
+          <p:cNvPr id="7" name="Ikon-sirkel"/>
+          <p:cNvSpPr/>
+          <p:nvPr/>
+        </p:nvSpPr>
+        <p:spPr>
+          <a:xfrm>
+            <a:off x="6903720" y="2103120"/>
+            <a:ext cx="640080" cy="640080"/>
+          </a:xfrm>
+          <a:prstGeom prst="ellipse">
+            <a:avLst/>
+          </a:prstGeom>
+          <a:solidFill>
+            <a:srgbClr val="0E7C86"/>
+          </a:solidFill>
+          <a:ln/>
+        </p:spPr>
+      </p:sp>
+      <p:pic>
+        <p:nvPicPr>
+          <p:cNvPr id="8" name="Ikon FaClipboardCheck" descr="preencoded.png">    </p:cNvPr>
+          <p:cNvPicPr>
+            <a:picLocks noChangeAspect="1"/>
+          </p:cNvPicPr>
+          <p:nvPr/>
+        </p:nvPicPr>
+        <p:blipFill>
+          <a:blip r:embed="rId1"/>
+          <a:stretch>
+            <a:fillRect/>
+          </a:stretch>
+        </p:blipFill>
+        <p:spPr>
+          <a:xfrm>
+            <a:off x="7057339" y="2256739"/>
+            <a:ext cx="332842" cy="332842"/>
+          </a:xfrm>
+          <a:prstGeom prst="rect">
+            <a:avLst/>
+          </a:prstGeom>
+        </p:spPr>
+      </p:pic>
+      <p:sp>
+        <p:nvSpPr>
+          <p:cNvPr id="9" name="Text 6"/>
           <p:cNvSpPr txBox="1"/>
           <p:nvPr/>
         </p:nvSpPr>
         <p:spPr>
           <a:xfrm>
-            <a:off x="868680" y="2011680"/>
-            <a:ext cx="4769968" cy="868680"/>
+            <a:off x="7726680" y="2103120"/>
+            <a:ext cx="3687775" cy="640080"/>
           </a:xfrm>
           <a:prstGeom prst="rect">
             <a:avLst/>
@@ -3678,27 +4195,69 @@
           <a:ln/>
         </p:spPr>
         <p:txBody>
+          <a:bodyPr wrap="square" lIns="0" tIns="0" rIns="0" bIns="0" rtlCol="0" anchor="ctr"/>
+          <a:lstStyle/>
+          <a:p>
+            <a:pPr indent="0" marL="0">
+              <a:buNone/>
+            </a:pPr>
+            <a:r>
+              <a:rPr lang="en-US" sz="2000" b="1" dirty="0">
+                <a:solidFill>
+                  <a:srgbClr val="0B1F33"/>
+                </a:solidFill>
+                <a:latin typeface="Calibri" pitchFamily="34" charset="0"/>
+                <a:ea typeface="Calibri" pitchFamily="34" charset="-122"/>
+                <a:cs typeface="Calibri" pitchFamily="34" charset="-120"/>
+              </a:rPr>
+              <a:t>Inkludert i prisen</a:t>
+            </a:r>
+            <a:endParaRPr lang="en-US" sz="2000" dirty="0"/>
+          </a:p>
+        </p:txBody>
+      </p:sp>
+      <p:sp>
+        <p:nvSpPr>
+          <p:cNvPr id="10" name="Text 7"/>
+          <p:cNvSpPr txBox="1"/>
+          <p:nvPr/>
+        </p:nvSpPr>
+        <p:spPr>
+          <a:xfrm>
+            <a:off x="6903720" y="3017520"/>
+            <a:ext cx="4419295" cy="2651760"/>
+          </a:xfrm>
+          <a:prstGeom prst="rect">
+            <a:avLst/>
+          </a:prstGeom>
+          <a:noFill/>
+          <a:ln/>
+        </p:spPr>
+        <p:txBody>
           <a:bodyPr wrap="square" lIns="0" tIns="0" rIns="0" bIns="0" rtlCol="0" anchor="t"/>
           <a:lstStyle/>
           <a:p>
             <a:pPr indent="0" marL="0">
-              <a:buNone/>
-            </a:pPr>
-            <a:r>
-              <a:rPr lang="en-US" sz="1700" b="1" dirty="0">
-                <a:solidFill>
-                  <a:srgbClr val="0B1F33"/>
-                </a:solidFill>
-                <a:latin typeface="Calibri" pitchFamily="34" charset="0"/>
-                <a:ea typeface="Calibri" pitchFamily="34" charset="-122"/>
-                <a:cs typeface="Calibri" pitchFamily="34" charset="-120"/>
-              </a:rPr>
-              <a:t>Må vi ta i bruk alt på en gang?</a:t>
-            </a:r>
-            <a:endParaRPr lang="en-US" sz="1700" dirty="0"/>
-          </a:p>
-          <a:p>
-            <a:pPr indent="0" marL="0">
+              <a:spcAft>
+                <a:spcPts val="800"/>
+              </a:spcAft>
+              <a:buNone/>
+            </a:pPr>
+            <a:r>
+              <a:rPr lang="en-US" sz="1500" b="1" dirty="0">
+                <a:solidFill>
+                  <a:srgbClr val="1B2A38"/>
+                </a:solidFill>
+                <a:latin typeface="Calibri" pitchFamily="34" charset="0"/>
+                <a:ea typeface="Calibri" pitchFamily="34" charset="-122"/>
+                <a:cs typeface="Calibri" pitchFamily="34" charset="-120"/>
+              </a:rPr>
+              <a:t>KI-assistent: </a:t>
+            </a:r>
+            <a:pPr indent="0" marL="0">
+              <a:spcAft>
+                <a:spcPts val="800"/>
+              </a:spcAft>
               <a:buNone/>
             </a:pPr>
             <a:r>
@@ -3710,73 +4269,32 @@
                 <a:ea typeface="Calibri" pitchFamily="34" charset="-122"/>
                 <a:cs typeface="Calibri" pitchFamily="34" charset="-120"/>
               </a:rPr>
-              <a:t>Nei. Start med vedlikehold på ett fartøy.</a:t>
-            </a:r>
-            <a:endParaRPr lang="en-US" sz="1700" dirty="0"/>
-          </a:p>
-        </p:txBody>
-      </p:sp>
-      <p:sp>
-        <p:nvSpPr>
-          <p:cNvPr id="6" name="Kort"/>
-          <p:cNvSpPr/>
-          <p:nvPr/>
-        </p:nvSpPr>
-        <p:spPr>
-          <a:xfrm>
-            <a:off x="6233008" y="1828800"/>
-            <a:ext cx="5410048" cy="1143000"/>
-          </a:xfrm>
-          <a:prstGeom prst="roundRect">
-            <a:avLst>
-              <a:gd name="adj" fmla="val 9600"/>
-            </a:avLst>
-          </a:prstGeom>
-          <a:solidFill>
-            <a:srgbClr val="EEF3F6"/>
-          </a:solidFill>
-          <a:ln/>
-        </p:spPr>
-      </p:sp>
-      <p:sp>
-        <p:nvSpPr>
-          <p:cNvPr id="7" name="Text 5"/>
-          <p:cNvSpPr txBox="1"/>
-          <p:nvPr/>
-        </p:nvSpPr>
-        <p:spPr>
-          <a:xfrm>
-            <a:off x="6553048" y="2011680"/>
-            <a:ext cx="4769968" cy="868680"/>
-          </a:xfrm>
-          <a:prstGeom prst="rect">
-            <a:avLst/>
-          </a:prstGeom>
-          <a:noFill/>
-          <a:ln/>
-        </p:spPr>
-        <p:txBody>
-          <a:bodyPr wrap="square" lIns="0" tIns="0" rIns="0" bIns="0" rtlCol="0" anchor="t"/>
-          <a:lstStyle/>
-          <a:p>
-            <a:pPr indent="0" marL="0">
-              <a:buNone/>
-            </a:pPr>
-            <a:r>
-              <a:rPr lang="en-US" sz="1700" b="1" dirty="0">
-                <a:solidFill>
-                  <a:srgbClr val="0B1F33"/>
-                </a:solidFill>
-                <a:latin typeface="Calibri" pitchFamily="34" charset="0"/>
-                <a:ea typeface="Calibri" pitchFamily="34" charset="-122"/>
-                <a:cs typeface="Calibri" pitchFamily="34" charset="-120"/>
-              </a:rPr>
-              <a:t>Hvor lagres dataene våre?</a:t>
-            </a:r>
-            <a:endParaRPr lang="en-US" sz="1700" dirty="0"/>
-          </a:p>
-          <a:p>
-            <a:pPr indent="0" marL="0">
+              <a:t>inkludert i full pakke</a:t>
+            </a:r>
+            <a:endParaRPr lang="en-US" sz="1500" dirty="0"/>
+          </a:p>
+          <a:p>
+            <a:pPr indent="0" marL="0">
+              <a:spcAft>
+                <a:spcPts val="800"/>
+              </a:spcAft>
+              <a:buNone/>
+            </a:pPr>
+            <a:r>
+              <a:rPr lang="en-US" sz="1500" b="1" dirty="0">
+                <a:solidFill>
+                  <a:srgbClr val="1B2A38"/>
+                </a:solidFill>
+                <a:latin typeface="Calibri" pitchFamily="34" charset="0"/>
+                <a:ea typeface="Calibri" pitchFamily="34" charset="-122"/>
+                <a:cs typeface="Calibri" pitchFamily="34" charset="-120"/>
+              </a:rPr>
+              <a:t>Support: </a:t>
+            </a:r>
+            <a:pPr indent="0" marL="0">
+              <a:spcAft>
+                <a:spcPts val="800"/>
+              </a:spcAft>
               <a:buNone/>
             </a:pPr>
             <a:r>
@@ -3788,73 +4306,32 @@
                 <a:ea typeface="Calibri" pitchFamily="34" charset="-122"/>
                 <a:cs typeface="Calibri" pitchFamily="34" charset="-120"/>
               </a:rPr>
-              <a:t>På server i Norge. De brukes ikke til å trene KI-modeller.</a:t>
-            </a:r>
-            <a:endParaRPr lang="en-US" sz="1700" dirty="0"/>
-          </a:p>
-        </p:txBody>
-      </p:sp>
-      <p:sp>
-        <p:nvSpPr>
-          <p:cNvPr id="8" name="Kort"/>
-          <p:cNvSpPr/>
-          <p:nvPr/>
-        </p:nvSpPr>
-        <p:spPr>
-          <a:xfrm>
-            <a:off x="548640" y="3154680"/>
-            <a:ext cx="5410048" cy="1143000"/>
-          </a:xfrm>
-          <a:prstGeom prst="roundRect">
-            <a:avLst>
-              <a:gd name="adj" fmla="val 9600"/>
-            </a:avLst>
-          </a:prstGeom>
-          <a:solidFill>
-            <a:srgbClr val="EEF3F6"/>
-          </a:solidFill>
-          <a:ln/>
-        </p:spPr>
-      </p:sp>
-      <p:sp>
-        <p:nvSpPr>
-          <p:cNvPr id="9" name="Text 7"/>
-          <p:cNvSpPr txBox="1"/>
-          <p:nvPr/>
-        </p:nvSpPr>
-        <p:spPr>
-          <a:xfrm>
-            <a:off x="868680" y="3337560"/>
-            <a:ext cx="4769968" cy="868680"/>
-          </a:xfrm>
-          <a:prstGeom prst="rect">
-            <a:avLst/>
-          </a:prstGeom>
-          <a:noFill/>
-          <a:ln/>
-        </p:spPr>
-        <p:txBody>
-          <a:bodyPr wrap="square" lIns="0" tIns="0" rIns="0" bIns="0" rtlCol="0" anchor="t"/>
-          <a:lstStyle/>
-          <a:p>
-            <a:pPr indent="0" marL="0">
-              <a:buNone/>
-            </a:pPr>
-            <a:r>
-              <a:rPr lang="en-US" sz="1700" b="1" dirty="0">
-                <a:solidFill>
-                  <a:srgbClr val="0B1F33"/>
-                </a:solidFill>
-                <a:latin typeface="Calibri" pitchFamily="34" charset="0"/>
-                <a:ea typeface="Calibri" pitchFamily="34" charset="-122"/>
-                <a:cs typeface="Calibri" pitchFamily="34" charset="-120"/>
-              </a:rPr>
-              <a:t>Trenger vi nett om bord?</a:t>
-            </a:r>
-            <a:endParaRPr lang="en-US" sz="1700" dirty="0"/>
-          </a:p>
-          <a:p>
-            <a:pPr indent="0" marL="0">
+              <a:t>full support uten ekstra kostnad</a:t>
+            </a:r>
+            <a:endParaRPr lang="en-US" sz="1500" dirty="0"/>
+          </a:p>
+          <a:p>
+            <a:pPr indent="0" marL="0">
+              <a:spcAft>
+                <a:spcPts val="800"/>
+              </a:spcAft>
+              <a:buNone/>
+            </a:pPr>
+            <a:r>
+              <a:rPr lang="en-US" sz="1500" b="1" dirty="0">
+                <a:solidFill>
+                  <a:srgbClr val="1B2A38"/>
+                </a:solidFill>
+                <a:latin typeface="Calibri" pitchFamily="34" charset="0"/>
+                <a:ea typeface="Calibri" pitchFamily="34" charset="-122"/>
+                <a:cs typeface="Calibri" pitchFamily="34" charset="-120"/>
+              </a:rPr>
+              <a:t>Oppdateringer: </a:t>
+            </a:r>
+            <a:pPr indent="0" marL="0">
+              <a:spcAft>
+                <a:spcPts val="800"/>
+              </a:spcAft>
               <a:buNone/>
             </a:pPr>
             <a:r>
@@ -3866,73 +4343,32 @@
                 <a:ea typeface="Calibri" pitchFamily="34" charset="-122"/>
                 <a:cs typeface="Calibri" pitchFamily="34" charset="-120"/>
               </a:rPr>
-              <a:t>Ja. Med satellittnett som Starlink er dekningen god også til sjøs.</a:t>
-            </a:r>
-            <a:endParaRPr lang="en-US" sz="1700" dirty="0"/>
-          </a:p>
-        </p:txBody>
-      </p:sp>
-      <p:sp>
-        <p:nvSpPr>
-          <p:cNvPr id="10" name="Kort"/>
-          <p:cNvSpPr/>
-          <p:nvPr/>
-        </p:nvSpPr>
-        <p:spPr>
-          <a:xfrm>
-            <a:off x="6233008" y="3154680"/>
-            <a:ext cx="5410048" cy="1143000"/>
-          </a:xfrm>
-          <a:prstGeom prst="roundRect">
-            <a:avLst>
-              <a:gd name="adj" fmla="val 9600"/>
-            </a:avLst>
-          </a:prstGeom>
-          <a:solidFill>
-            <a:srgbClr val="EEF3F6"/>
-          </a:solidFill>
-          <a:ln/>
-        </p:spPr>
-      </p:sp>
-      <p:sp>
-        <p:nvSpPr>
-          <p:cNvPr id="11" name="Text 9"/>
-          <p:cNvSpPr txBox="1"/>
-          <p:nvPr/>
-        </p:nvSpPr>
-        <p:spPr>
-          <a:xfrm>
-            <a:off x="6553048" y="3337560"/>
-            <a:ext cx="4769968" cy="868680"/>
-          </a:xfrm>
-          <a:prstGeom prst="rect">
-            <a:avLst/>
-          </a:prstGeom>
-          <a:noFill/>
-          <a:ln/>
-        </p:spPr>
-        <p:txBody>
-          <a:bodyPr wrap="square" lIns="0" tIns="0" rIns="0" bIns="0" rtlCol="0" anchor="t"/>
-          <a:lstStyle/>
-          <a:p>
-            <a:pPr indent="0" marL="0">
-              <a:buNone/>
-            </a:pPr>
-            <a:r>
-              <a:rPr lang="en-US" sz="1700" b="1" dirty="0">
-                <a:solidFill>
-                  <a:srgbClr val="0B1F33"/>
-                </a:solidFill>
-                <a:latin typeface="Calibri" pitchFamily="34" charset="0"/>
-                <a:ea typeface="Calibri" pitchFamily="34" charset="-122"/>
-                <a:cs typeface="Calibri" pitchFamily="34" charset="-120"/>
-              </a:rPr>
-              <a:t>Er Nautech DNV-godkjent?</a:t>
-            </a:r>
-            <a:endParaRPr lang="en-US" sz="1700" dirty="0"/>
-          </a:p>
-          <a:p>
-            <a:pPr indent="0" marL="0">
+              <a:t>alle nye versjoner</a:t>
+            </a:r>
+            <a:endParaRPr lang="en-US" sz="1500" dirty="0"/>
+          </a:p>
+          <a:p>
+            <a:pPr indent="0" marL="0">
+              <a:spcAft>
+                <a:spcPts val="800"/>
+              </a:spcAft>
+              <a:buNone/>
+            </a:pPr>
+            <a:r>
+              <a:rPr lang="en-US" sz="1500" b="1" dirty="0">
+                <a:solidFill>
+                  <a:srgbClr val="1B2A38"/>
+                </a:solidFill>
+                <a:latin typeface="Calibri" pitchFamily="34" charset="0"/>
+                <a:ea typeface="Calibri" pitchFamily="34" charset="-122"/>
+                <a:cs typeface="Calibri" pitchFamily="34" charset="-120"/>
+              </a:rPr>
+              <a:t>Dataoverføring: </a:t>
+            </a:r>
+            <a:pPr indent="0" marL="0">
+              <a:spcAft>
+                <a:spcPts val="800"/>
+              </a:spcAft>
               <a:buNone/>
             </a:pPr>
             <a:r>
@@ -3944,73 +4380,32 @@
                 <a:ea typeface="Calibri" pitchFamily="34" charset="-122"/>
                 <a:cs typeface="Calibri" pitchFamily="34" charset="-120"/>
               </a:rPr>
-              <a:t>Nautech er bygget etter DNVs krav. Godkjenning søkes når produktet er ferdig utviklet.</a:t>
-            </a:r>
-            <a:endParaRPr lang="en-US" sz="1700" dirty="0"/>
-          </a:p>
-        </p:txBody>
-      </p:sp>
-      <p:sp>
-        <p:nvSpPr>
-          <p:cNvPr id="12" name="Kort"/>
-          <p:cNvSpPr/>
-          <p:nvPr/>
-        </p:nvSpPr>
-        <p:spPr>
-          <a:xfrm>
-            <a:off x="548640" y="4480560"/>
-            <a:ext cx="5410048" cy="1143000"/>
-          </a:xfrm>
-          <a:prstGeom prst="roundRect">
-            <a:avLst>
-              <a:gd name="adj" fmla="val 9600"/>
-            </a:avLst>
-          </a:prstGeom>
-          <a:solidFill>
-            <a:srgbClr val="EEF3F6"/>
-          </a:solidFill>
-          <a:ln/>
-        </p:spPr>
-      </p:sp>
-      <p:sp>
-        <p:nvSpPr>
-          <p:cNvPr id="13" name="Text 11"/>
-          <p:cNvSpPr txBox="1"/>
-          <p:nvPr/>
-        </p:nvSpPr>
-        <p:spPr>
-          <a:xfrm>
-            <a:off x="868680" y="4663440"/>
-            <a:ext cx="4769968" cy="868680"/>
-          </a:xfrm>
-          <a:prstGeom prst="rect">
-            <a:avLst/>
-          </a:prstGeom>
-          <a:noFill/>
-          <a:ln/>
-        </p:spPr>
-        <p:txBody>
-          <a:bodyPr wrap="square" lIns="0" tIns="0" rIns="0" bIns="0" rtlCol="0" anchor="t"/>
-          <a:lstStyle/>
-          <a:p>
-            <a:pPr indent="0" marL="0">
-              <a:buNone/>
-            </a:pPr>
-            <a:r>
-              <a:rPr lang="en-US" sz="1700" b="1" dirty="0">
-                <a:solidFill>
-                  <a:srgbClr val="0B1F33"/>
-                </a:solidFill>
-                <a:latin typeface="Calibri" pitchFamily="34" charset="0"/>
-                <a:ea typeface="Calibri" pitchFamily="34" charset="-122"/>
-                <a:cs typeface="Calibri" pitchFamily="34" charset="-120"/>
-              </a:rPr>
-              <a:t>Hvem hjelper oss når noe ikke virker?</a:t>
-            </a:r>
-            <a:endParaRPr lang="en-US" sz="1700" dirty="0"/>
-          </a:p>
-          <a:p>
-            <a:pPr indent="0" marL="0">
+              <a:t>gjør det selv, eller vi gjør det mot et engangsgebyr</a:t>
+            </a:r>
+            <a:endParaRPr lang="en-US" sz="1500" dirty="0"/>
+          </a:p>
+          <a:p>
+            <a:pPr indent="0" marL="0">
+              <a:spcAft>
+                <a:spcPts val="800"/>
+              </a:spcAft>
+              <a:buNone/>
+            </a:pPr>
+            <a:r>
+              <a:rPr lang="en-US" sz="1500" b="1" dirty="0">
+                <a:solidFill>
+                  <a:srgbClr val="1B2A38"/>
+                </a:solidFill>
+                <a:latin typeface="Calibri" pitchFamily="34" charset="0"/>
+                <a:ea typeface="Calibri" pitchFamily="34" charset="-122"/>
+                <a:cs typeface="Calibri" pitchFamily="34" charset="-120"/>
+              </a:rPr>
+              <a:t>Pilot: </a:t>
+            </a:r>
+            <a:pPr indent="0" marL="0">
+              <a:spcAft>
+                <a:spcPts val="800"/>
+              </a:spcAft>
               <a:buNone/>
             </a:pPr>
             <a:r>
@@ -4022,87 +4417,9 @@
                 <a:ea typeface="Calibri" pitchFamily="34" charset="-122"/>
                 <a:cs typeface="Calibri" pitchFamily="34" charset="-120"/>
               </a:rPr>
-              <a:t>Vi gjør det. Full support er inkludert i prisen.</a:t>
-            </a:r>
-            <a:endParaRPr lang="en-US" sz="1700" dirty="0"/>
-          </a:p>
-        </p:txBody>
-      </p:sp>
-      <p:sp>
-        <p:nvSpPr>
-          <p:cNvPr id="14" name="Kort"/>
-          <p:cNvSpPr/>
-          <p:nvPr/>
-        </p:nvSpPr>
-        <p:spPr>
-          <a:xfrm>
-            <a:off x="6233008" y="4480560"/>
-            <a:ext cx="5410048" cy="1143000"/>
-          </a:xfrm>
-          <a:prstGeom prst="roundRect">
-            <a:avLst>
-              <a:gd name="adj" fmla="val 9600"/>
-            </a:avLst>
-          </a:prstGeom>
-          <a:solidFill>
-            <a:srgbClr val="EEF3F6"/>
-          </a:solidFill>
-          <a:ln/>
-        </p:spPr>
-      </p:sp>
-      <p:sp>
-        <p:nvSpPr>
-          <p:cNvPr id="15" name="Text 13"/>
-          <p:cNvSpPr txBox="1"/>
-          <p:nvPr/>
-        </p:nvSpPr>
-        <p:spPr>
-          <a:xfrm>
-            <a:off x="6553048" y="4663440"/>
-            <a:ext cx="4769968" cy="868680"/>
-          </a:xfrm>
-          <a:prstGeom prst="rect">
-            <a:avLst/>
-          </a:prstGeom>
-          <a:noFill/>
-          <a:ln/>
-        </p:spPr>
-        <p:txBody>
-          <a:bodyPr wrap="square" lIns="0" tIns="0" rIns="0" bIns="0" rtlCol="0" anchor="t"/>
-          <a:lstStyle/>
-          <a:p>
-            <a:pPr indent="0" marL="0">
-              <a:buNone/>
-            </a:pPr>
-            <a:r>
-              <a:rPr lang="en-US" sz="1700" b="1" dirty="0">
-                <a:solidFill>
-                  <a:srgbClr val="0B1F33"/>
-                </a:solidFill>
-                <a:latin typeface="Calibri" pitchFamily="34" charset="0"/>
-                <a:ea typeface="Calibri" pitchFamily="34" charset="-122"/>
-                <a:cs typeface="Calibri" pitchFamily="34" charset="-120"/>
-              </a:rPr>
-              <a:t>Hvor lang tid tar det å komme i gang?</a:t>
-            </a:r>
-            <a:endParaRPr lang="en-US" sz="1700" dirty="0"/>
-          </a:p>
-          <a:p>
-            <a:pPr indent="0" marL="0">
-              <a:buNone/>
-            </a:pPr>
-            <a:r>
-              <a:rPr lang="en-US" sz="1500" dirty="0">
-                <a:solidFill>
-                  <a:srgbClr val="1B2A38"/>
-                </a:solidFill>
-                <a:latin typeface="Calibri" pitchFamily="34" charset="0"/>
-                <a:ea typeface="Calibri" pitchFamily="34" charset="-122"/>
-                <a:cs typeface="Calibri" pitchFamily="34" charset="-120"/>
-              </a:rPr>
-              <a:t>Én til to uker, avhengig av hvor mye data som skal flyttes.</a:t>
-            </a:r>
-            <a:endParaRPr lang="en-US" sz="1700" dirty="0"/>
+              <a:t>seks uker på ett fartøy til halv pris. Fortsetter dere, trekkes beløpet fra første års avtale.</a:t>
+            </a:r>
+            <a:endParaRPr lang="en-US" sz="1500" dirty="0"/>
           </a:p>
         </p:txBody>
       </p:sp>
@@ -4208,6 +4525,629 @@
             <a:r>
               <a:rPr lang="en-US" sz="1200" b="1" spc="200" kern="0" dirty="0">
                 <a:solidFill>
+                  <a:srgbClr val="0E7C86"/>
+                </a:solidFill>
+                <a:latin typeface="Calibri" pitchFamily="34" charset="0"/>
+                <a:ea typeface="Calibri" pitchFamily="34" charset="-122"/>
+                <a:cs typeface="Calibri" pitchFamily="34" charset="-120"/>
+              </a:rPr>
+              <a:t>PRAKTISKE SPØRSMÅL</a:t>
+            </a:r>
+            <a:endParaRPr lang="en-US" sz="1200" dirty="0"/>
+          </a:p>
+        </p:txBody>
+      </p:sp>
+      <p:sp>
+        <p:nvSpPr>
+          <p:cNvPr id="3" name="Text 1"/>
+          <p:cNvSpPr/>
+          <p:nvPr>
+            <p:ph idx="102" type="title" hasCustomPrompt="1"/>
+          </p:nvPr>
+        </p:nvSpPr>
+        <p:spPr>
+          <a:xfrm>
+            <a:off x="548640" y="658368"/>
+            <a:ext cx="11094415" cy="1051560"/>
+          </a:xfrm>
+          <a:prstGeom prst="rect">
+            <a:avLst/>
+          </a:prstGeom>
+          <a:noFill/>
+          <a:ln/>
+        </p:spPr>
+        <p:txBody>
+          <a:bodyPr wrap="square" lIns="0" tIns="0" rIns="0" bIns="0" rtlCol="0" anchor="t"/>
+          <a:lstStyle/>
+          <a:p>
+            <a:pPr algn="l" indent="0" marL="0">
+              <a:buNone/>
+            </a:pPr>
+            <a:r>
+              <a:rPr lang="en-US" sz="3000" b="1" dirty="0">
+                <a:solidFill>
+                  <a:srgbClr val="0B1F33"/>
+                </a:solidFill>
+                <a:latin typeface="Arial" pitchFamily="34" charset="0"/>
+                <a:ea typeface="Arial" pitchFamily="34" charset="-122"/>
+                <a:cs typeface="Arial" pitchFamily="34" charset="-120"/>
+              </a:rPr>
+              <a:t>Det dere sannsynligvis lurer på</a:t>
+            </a:r>
+            <a:endParaRPr lang="en-US" sz="3000" dirty="0"/>
+          </a:p>
+        </p:txBody>
+      </p:sp>
+      <p:sp>
+        <p:nvSpPr>
+          <p:cNvPr id="4" name="Kort"/>
+          <p:cNvSpPr/>
+          <p:nvPr/>
+        </p:nvSpPr>
+        <p:spPr>
+          <a:xfrm>
+            <a:off x="548640" y="1828800"/>
+            <a:ext cx="5410048" cy="1143000"/>
+          </a:xfrm>
+          <a:prstGeom prst="roundRect">
+            <a:avLst>
+              <a:gd name="adj" fmla="val 9600"/>
+            </a:avLst>
+          </a:prstGeom>
+          <a:solidFill>
+            <a:srgbClr val="EEF3F6"/>
+          </a:solidFill>
+          <a:ln/>
+        </p:spPr>
+      </p:sp>
+      <p:sp>
+        <p:nvSpPr>
+          <p:cNvPr id="5" name="Text 3"/>
+          <p:cNvSpPr txBox="1"/>
+          <p:nvPr/>
+        </p:nvSpPr>
+        <p:spPr>
+          <a:xfrm>
+            <a:off x="868680" y="2011680"/>
+            <a:ext cx="4769968" cy="868680"/>
+          </a:xfrm>
+          <a:prstGeom prst="rect">
+            <a:avLst/>
+          </a:prstGeom>
+          <a:noFill/>
+          <a:ln/>
+        </p:spPr>
+        <p:txBody>
+          <a:bodyPr wrap="square" lIns="0" tIns="0" rIns="0" bIns="0" rtlCol="0" anchor="t"/>
+          <a:lstStyle/>
+          <a:p>
+            <a:pPr indent="0" marL="0">
+              <a:buNone/>
+            </a:pPr>
+            <a:r>
+              <a:rPr lang="en-US" sz="1700" b="1" dirty="0">
+                <a:solidFill>
+                  <a:srgbClr val="0B1F33"/>
+                </a:solidFill>
+                <a:latin typeface="Calibri" pitchFamily="34" charset="0"/>
+                <a:ea typeface="Calibri" pitchFamily="34" charset="-122"/>
+                <a:cs typeface="Calibri" pitchFamily="34" charset="-120"/>
+              </a:rPr>
+              <a:t>Må vi ta i bruk alt på en gang?</a:t>
+            </a:r>
+            <a:endParaRPr lang="en-US" sz="1700" dirty="0"/>
+          </a:p>
+          <a:p>
+            <a:pPr indent="0" marL="0">
+              <a:buNone/>
+            </a:pPr>
+            <a:r>
+              <a:rPr lang="en-US" sz="1500" dirty="0">
+                <a:solidFill>
+                  <a:srgbClr val="1B2A38"/>
+                </a:solidFill>
+                <a:latin typeface="Calibri" pitchFamily="34" charset="0"/>
+                <a:ea typeface="Calibri" pitchFamily="34" charset="-122"/>
+                <a:cs typeface="Calibri" pitchFamily="34" charset="-120"/>
+              </a:rPr>
+              <a:t>Nei. Start med vedlikehold på ett fartøy.</a:t>
+            </a:r>
+            <a:endParaRPr lang="en-US" sz="1700" dirty="0"/>
+          </a:p>
+        </p:txBody>
+      </p:sp>
+      <p:sp>
+        <p:nvSpPr>
+          <p:cNvPr id="6" name="Kort"/>
+          <p:cNvSpPr/>
+          <p:nvPr/>
+        </p:nvSpPr>
+        <p:spPr>
+          <a:xfrm>
+            <a:off x="6233008" y="1828800"/>
+            <a:ext cx="5410048" cy="1143000"/>
+          </a:xfrm>
+          <a:prstGeom prst="roundRect">
+            <a:avLst>
+              <a:gd name="adj" fmla="val 9600"/>
+            </a:avLst>
+          </a:prstGeom>
+          <a:solidFill>
+            <a:srgbClr val="EEF3F6"/>
+          </a:solidFill>
+          <a:ln/>
+        </p:spPr>
+      </p:sp>
+      <p:sp>
+        <p:nvSpPr>
+          <p:cNvPr id="7" name="Text 5"/>
+          <p:cNvSpPr txBox="1"/>
+          <p:nvPr/>
+        </p:nvSpPr>
+        <p:spPr>
+          <a:xfrm>
+            <a:off x="6553048" y="2011680"/>
+            <a:ext cx="4769968" cy="868680"/>
+          </a:xfrm>
+          <a:prstGeom prst="rect">
+            <a:avLst/>
+          </a:prstGeom>
+          <a:noFill/>
+          <a:ln/>
+        </p:spPr>
+        <p:txBody>
+          <a:bodyPr wrap="square" lIns="0" tIns="0" rIns="0" bIns="0" rtlCol="0" anchor="t"/>
+          <a:lstStyle/>
+          <a:p>
+            <a:pPr indent="0" marL="0">
+              <a:buNone/>
+            </a:pPr>
+            <a:r>
+              <a:rPr lang="en-US" sz="1700" b="1" dirty="0">
+                <a:solidFill>
+                  <a:srgbClr val="0B1F33"/>
+                </a:solidFill>
+                <a:latin typeface="Calibri" pitchFamily="34" charset="0"/>
+                <a:ea typeface="Calibri" pitchFamily="34" charset="-122"/>
+                <a:cs typeface="Calibri" pitchFamily="34" charset="-120"/>
+              </a:rPr>
+              <a:t>Hvor lagres dataene våre?</a:t>
+            </a:r>
+            <a:endParaRPr lang="en-US" sz="1700" dirty="0"/>
+          </a:p>
+          <a:p>
+            <a:pPr indent="0" marL="0">
+              <a:buNone/>
+            </a:pPr>
+            <a:r>
+              <a:rPr lang="en-US" sz="1500" dirty="0">
+                <a:solidFill>
+                  <a:srgbClr val="1B2A38"/>
+                </a:solidFill>
+                <a:latin typeface="Calibri" pitchFamily="34" charset="0"/>
+                <a:ea typeface="Calibri" pitchFamily="34" charset="-122"/>
+                <a:cs typeface="Calibri" pitchFamily="34" charset="-120"/>
+              </a:rPr>
+              <a:t>På server i Norge. De brukes ikke til å trene KI-modeller.</a:t>
+            </a:r>
+            <a:endParaRPr lang="en-US" sz="1700" dirty="0"/>
+          </a:p>
+        </p:txBody>
+      </p:sp>
+      <p:sp>
+        <p:nvSpPr>
+          <p:cNvPr id="8" name="Kort"/>
+          <p:cNvSpPr/>
+          <p:nvPr/>
+        </p:nvSpPr>
+        <p:spPr>
+          <a:xfrm>
+            <a:off x="548640" y="3154680"/>
+            <a:ext cx="5410048" cy="1143000"/>
+          </a:xfrm>
+          <a:prstGeom prst="roundRect">
+            <a:avLst>
+              <a:gd name="adj" fmla="val 9600"/>
+            </a:avLst>
+          </a:prstGeom>
+          <a:solidFill>
+            <a:srgbClr val="EEF3F6"/>
+          </a:solidFill>
+          <a:ln/>
+        </p:spPr>
+      </p:sp>
+      <p:sp>
+        <p:nvSpPr>
+          <p:cNvPr id="9" name="Text 7"/>
+          <p:cNvSpPr txBox="1"/>
+          <p:nvPr/>
+        </p:nvSpPr>
+        <p:spPr>
+          <a:xfrm>
+            <a:off x="868680" y="3337560"/>
+            <a:ext cx="4769968" cy="868680"/>
+          </a:xfrm>
+          <a:prstGeom prst="rect">
+            <a:avLst/>
+          </a:prstGeom>
+          <a:noFill/>
+          <a:ln/>
+        </p:spPr>
+        <p:txBody>
+          <a:bodyPr wrap="square" lIns="0" tIns="0" rIns="0" bIns="0" rtlCol="0" anchor="t"/>
+          <a:lstStyle/>
+          <a:p>
+            <a:pPr indent="0" marL="0">
+              <a:buNone/>
+            </a:pPr>
+            <a:r>
+              <a:rPr lang="en-US" sz="1700" b="1" dirty="0">
+                <a:solidFill>
+                  <a:srgbClr val="0B1F33"/>
+                </a:solidFill>
+                <a:latin typeface="Calibri" pitchFamily="34" charset="0"/>
+                <a:ea typeface="Calibri" pitchFamily="34" charset="-122"/>
+                <a:cs typeface="Calibri" pitchFamily="34" charset="-120"/>
+              </a:rPr>
+              <a:t>Trenger vi nett om bord?</a:t>
+            </a:r>
+            <a:endParaRPr lang="en-US" sz="1700" dirty="0"/>
+          </a:p>
+          <a:p>
+            <a:pPr indent="0" marL="0">
+              <a:buNone/>
+            </a:pPr>
+            <a:r>
+              <a:rPr lang="en-US" sz="1500" dirty="0">
+                <a:solidFill>
+                  <a:srgbClr val="1B2A38"/>
+                </a:solidFill>
+                <a:latin typeface="Calibri" pitchFamily="34" charset="0"/>
+                <a:ea typeface="Calibri" pitchFamily="34" charset="-122"/>
+                <a:cs typeface="Calibri" pitchFamily="34" charset="-120"/>
+              </a:rPr>
+              <a:t>Ja. Med satellittnett som Starlink er dekningen god også til sjøs.</a:t>
+            </a:r>
+            <a:endParaRPr lang="en-US" sz="1700" dirty="0"/>
+          </a:p>
+        </p:txBody>
+      </p:sp>
+      <p:sp>
+        <p:nvSpPr>
+          <p:cNvPr id="10" name="Kort"/>
+          <p:cNvSpPr/>
+          <p:nvPr/>
+        </p:nvSpPr>
+        <p:spPr>
+          <a:xfrm>
+            <a:off x="6233008" y="3154680"/>
+            <a:ext cx="5410048" cy="1143000"/>
+          </a:xfrm>
+          <a:prstGeom prst="roundRect">
+            <a:avLst>
+              <a:gd name="adj" fmla="val 9600"/>
+            </a:avLst>
+          </a:prstGeom>
+          <a:solidFill>
+            <a:srgbClr val="EEF3F6"/>
+          </a:solidFill>
+          <a:ln/>
+        </p:spPr>
+      </p:sp>
+      <p:sp>
+        <p:nvSpPr>
+          <p:cNvPr id="11" name="Text 9"/>
+          <p:cNvSpPr txBox="1"/>
+          <p:nvPr/>
+        </p:nvSpPr>
+        <p:spPr>
+          <a:xfrm>
+            <a:off x="6553048" y="3337560"/>
+            <a:ext cx="4769968" cy="868680"/>
+          </a:xfrm>
+          <a:prstGeom prst="rect">
+            <a:avLst/>
+          </a:prstGeom>
+          <a:noFill/>
+          <a:ln/>
+        </p:spPr>
+        <p:txBody>
+          <a:bodyPr wrap="square" lIns="0" tIns="0" rIns="0" bIns="0" rtlCol="0" anchor="t"/>
+          <a:lstStyle/>
+          <a:p>
+            <a:pPr indent="0" marL="0">
+              <a:buNone/>
+            </a:pPr>
+            <a:r>
+              <a:rPr lang="en-US" sz="1700" b="1" dirty="0">
+                <a:solidFill>
+                  <a:srgbClr val="0B1F33"/>
+                </a:solidFill>
+                <a:latin typeface="Calibri" pitchFamily="34" charset="0"/>
+                <a:ea typeface="Calibri" pitchFamily="34" charset="-122"/>
+                <a:cs typeface="Calibri" pitchFamily="34" charset="-120"/>
+              </a:rPr>
+              <a:t>Er Nautech DNV-godkjent?</a:t>
+            </a:r>
+            <a:endParaRPr lang="en-US" sz="1700" dirty="0"/>
+          </a:p>
+          <a:p>
+            <a:pPr indent="0" marL="0">
+              <a:buNone/>
+            </a:pPr>
+            <a:r>
+              <a:rPr lang="en-US" sz="1500" dirty="0">
+                <a:solidFill>
+                  <a:srgbClr val="1B2A38"/>
+                </a:solidFill>
+                <a:latin typeface="Calibri" pitchFamily="34" charset="0"/>
+                <a:ea typeface="Calibri" pitchFamily="34" charset="-122"/>
+                <a:cs typeface="Calibri" pitchFamily="34" charset="-120"/>
+              </a:rPr>
+              <a:t>Nautech er bygget etter DNVs krav. Godkjenning søkes når produktet er ferdig utviklet.</a:t>
+            </a:r>
+            <a:endParaRPr lang="en-US" sz="1700" dirty="0"/>
+          </a:p>
+        </p:txBody>
+      </p:sp>
+      <p:sp>
+        <p:nvSpPr>
+          <p:cNvPr id="12" name="Kort"/>
+          <p:cNvSpPr/>
+          <p:nvPr/>
+        </p:nvSpPr>
+        <p:spPr>
+          <a:xfrm>
+            <a:off x="548640" y="4480560"/>
+            <a:ext cx="5410048" cy="1143000"/>
+          </a:xfrm>
+          <a:prstGeom prst="roundRect">
+            <a:avLst>
+              <a:gd name="adj" fmla="val 9600"/>
+            </a:avLst>
+          </a:prstGeom>
+          <a:solidFill>
+            <a:srgbClr val="EEF3F6"/>
+          </a:solidFill>
+          <a:ln/>
+        </p:spPr>
+      </p:sp>
+      <p:sp>
+        <p:nvSpPr>
+          <p:cNvPr id="13" name="Text 11"/>
+          <p:cNvSpPr txBox="1"/>
+          <p:nvPr/>
+        </p:nvSpPr>
+        <p:spPr>
+          <a:xfrm>
+            <a:off x="868680" y="4663440"/>
+            <a:ext cx="4769968" cy="868680"/>
+          </a:xfrm>
+          <a:prstGeom prst="rect">
+            <a:avLst/>
+          </a:prstGeom>
+          <a:noFill/>
+          <a:ln/>
+        </p:spPr>
+        <p:txBody>
+          <a:bodyPr wrap="square" lIns="0" tIns="0" rIns="0" bIns="0" rtlCol="0" anchor="t"/>
+          <a:lstStyle/>
+          <a:p>
+            <a:pPr indent="0" marL="0">
+              <a:buNone/>
+            </a:pPr>
+            <a:r>
+              <a:rPr lang="en-US" sz="1700" b="1" dirty="0">
+                <a:solidFill>
+                  <a:srgbClr val="0B1F33"/>
+                </a:solidFill>
+                <a:latin typeface="Calibri" pitchFamily="34" charset="0"/>
+                <a:ea typeface="Calibri" pitchFamily="34" charset="-122"/>
+                <a:cs typeface="Calibri" pitchFamily="34" charset="-120"/>
+              </a:rPr>
+              <a:t>Hvem hjelper oss når noe ikke virker?</a:t>
+            </a:r>
+            <a:endParaRPr lang="en-US" sz="1700" dirty="0"/>
+          </a:p>
+          <a:p>
+            <a:pPr indent="0" marL="0">
+              <a:buNone/>
+            </a:pPr>
+            <a:r>
+              <a:rPr lang="en-US" sz="1500" dirty="0">
+                <a:solidFill>
+                  <a:srgbClr val="1B2A38"/>
+                </a:solidFill>
+                <a:latin typeface="Calibri" pitchFamily="34" charset="0"/>
+                <a:ea typeface="Calibri" pitchFamily="34" charset="-122"/>
+                <a:cs typeface="Calibri" pitchFamily="34" charset="-120"/>
+              </a:rPr>
+              <a:t>Vi gjør det. Full support er inkludert i prisen.</a:t>
+            </a:r>
+            <a:endParaRPr lang="en-US" sz="1700" dirty="0"/>
+          </a:p>
+        </p:txBody>
+      </p:sp>
+      <p:sp>
+        <p:nvSpPr>
+          <p:cNvPr id="14" name="Kort"/>
+          <p:cNvSpPr/>
+          <p:nvPr/>
+        </p:nvSpPr>
+        <p:spPr>
+          <a:xfrm>
+            <a:off x="6233008" y="4480560"/>
+            <a:ext cx="5410048" cy="1143000"/>
+          </a:xfrm>
+          <a:prstGeom prst="roundRect">
+            <a:avLst>
+              <a:gd name="adj" fmla="val 9600"/>
+            </a:avLst>
+          </a:prstGeom>
+          <a:solidFill>
+            <a:srgbClr val="EEF3F6"/>
+          </a:solidFill>
+          <a:ln/>
+        </p:spPr>
+      </p:sp>
+      <p:sp>
+        <p:nvSpPr>
+          <p:cNvPr id="15" name="Text 13"/>
+          <p:cNvSpPr txBox="1"/>
+          <p:nvPr/>
+        </p:nvSpPr>
+        <p:spPr>
+          <a:xfrm>
+            <a:off x="6553048" y="4663440"/>
+            <a:ext cx="4769968" cy="868680"/>
+          </a:xfrm>
+          <a:prstGeom prst="rect">
+            <a:avLst/>
+          </a:prstGeom>
+          <a:noFill/>
+          <a:ln/>
+        </p:spPr>
+        <p:txBody>
+          <a:bodyPr wrap="square" lIns="0" tIns="0" rIns="0" bIns="0" rtlCol="0" anchor="t"/>
+          <a:lstStyle/>
+          <a:p>
+            <a:pPr indent="0" marL="0">
+              <a:buNone/>
+            </a:pPr>
+            <a:r>
+              <a:rPr lang="en-US" sz="1700" b="1" dirty="0">
+                <a:solidFill>
+                  <a:srgbClr val="0B1F33"/>
+                </a:solidFill>
+                <a:latin typeface="Calibri" pitchFamily="34" charset="0"/>
+                <a:ea typeface="Calibri" pitchFamily="34" charset="-122"/>
+                <a:cs typeface="Calibri" pitchFamily="34" charset="-120"/>
+              </a:rPr>
+              <a:t>Hvor lang tid tar det å komme i gang?</a:t>
+            </a:r>
+            <a:endParaRPr lang="en-US" sz="1700" dirty="0"/>
+          </a:p>
+          <a:p>
+            <a:pPr indent="0" marL="0">
+              <a:buNone/>
+            </a:pPr>
+            <a:r>
+              <a:rPr lang="en-US" sz="1500" dirty="0">
+                <a:solidFill>
+                  <a:srgbClr val="1B2A38"/>
+                </a:solidFill>
+                <a:latin typeface="Calibri" pitchFamily="34" charset="0"/>
+                <a:ea typeface="Calibri" pitchFamily="34" charset="-122"/>
+                <a:cs typeface="Calibri" pitchFamily="34" charset="-120"/>
+              </a:rPr>
+              <a:t>Én til to uker, avhengig av hvor mye data som skal flyttes.</a:t>
+            </a:r>
+            <a:endParaRPr lang="en-US" sz="1700" dirty="0"/>
+          </a:p>
+        </p:txBody>
+      </p:sp>
+      <p:sp>
+        <p:nvSpPr>
+          <p:cNvPr id="25" name="Slide Number Placeholder 0"/>
+          <p:cNvSpPr>
+            <a:spLocks noGrp="1"/>
+          </p:cNvSpPr>
+          <p:nvPr>
+            <p:ph type="sldNum" sz="quarter" idx="4294967295"/>
+          </p:nvPr>
+        </p:nvSpPr>
+        <p:spPr>
+          <a:xfrm>
+            <a:off x="11094415" y="6400800"/>
+            <a:ext cx="548640" cy="274320"/>
+          </a:xfrm>
+          <a:prstGeom prst="rect">
+            <a:avLst/>
+          </a:prstGeom>
+          <a:extLst>
+            <a:ext uri="{C572A759-6A51-4108-AA02-DFA0A04FC94B}">
+              <ma14:wrappingTextBoxFlag xmlns:ma14="http://schemas.microsoft.com/office/mac/drawingml/2011/main" val="0"/>
+            </a:ext>
+          </a:extLst>
+        </p:spPr>
+        <p:txBody>
+          <a:bodyPr/>
+          <a:lstStyle>
+            <a:lvl1pPr>
+              <a:defRPr sz="1000">
+                <a:solidFill>
+                  <a:srgbClr val="5B6B7A"/>
+                </a:solidFill>
+                <a:latin typeface="Calibri"/>
+                <a:ea typeface="Calibri"/>
+                <a:cs typeface="Calibri"/>
+              </a:defRPr>
+            </a:lvl1pPr>
+          </a:lstStyle>
+          <a:p>
+            <a:pPr algn="r"/>
+            <a:fld id="{F7021451-1387-4CA6-816F-3879F97B5CBC}" type="slidenum">
+              <a:rPr b="0" lang="en-US"/>
+              <a:t>12</a:t>
+            </a:fld>
+            <a:endParaRPr lang="en-US"/>
+          </a:p>
+        </p:txBody>
+      </p:sp>
+    </p:spTree>
+  </p:cSld>
+  <p:clrMapOvr>
+    <a:masterClrMapping/>
+  </p:clrMapOvr>
+</p:sld>
+</file>
+
+<file path=ppt/slides/slide13.xml><?xml version="1.0" encoding="utf-8"?>
+<p:sld xmlns:a="http://schemas.openxmlformats.org/drawingml/2006/main" xmlns:r="http://schemas.openxmlformats.org/officeDocument/2006/relationships" xmlns:p="http://schemas.openxmlformats.org/presentationml/2006/main">
+  <p:cSld name="Slide 13">
+    <p:spTree>
+      <p:nvGrpSpPr>
+        <p:cNvPr id="1" name=""/>
+        <p:cNvGrpSpPr/>
+        <p:nvPr/>
+      </p:nvGrpSpPr>
+      <p:grpSpPr>
+        <a:xfrm>
+          <a:off x="0" y="0"/>
+          <a:ext cx="0" cy="0"/>
+          <a:chOff x="0" y="0"/>
+          <a:chExt cx="0" cy="0"/>
+        </a:xfrm>
+      </p:grpSpPr>
+      <p:sp>
+        <p:nvSpPr>
+          <p:cNvPr id="2" name="Text 1"/>
+          <p:cNvSpPr/>
+          <p:nvPr>
+            <p:ph idx="101" type="body" hasCustomPrompt="1"/>
+          </p:nvPr>
+        </p:nvSpPr>
+        <p:spPr>
+          <a:xfrm>
+            <a:off x="548640" y="365760"/>
+            <a:ext cx="9144000" cy="274320"/>
+          </a:xfrm>
+          <a:prstGeom prst="rect">
+            <a:avLst/>
+          </a:prstGeom>
+          <a:noFill/>
+          <a:ln/>
+        </p:spPr>
+        <p:txBody>
+          <a:bodyPr wrap="square" lIns="0" tIns="0" rIns="0" bIns="0" rtlCol="0"/>
+          <a:lstStyle/>
+          <a:p>
+            <a:pPr indent="0" marL="0">
+              <a:buNone/>
+            </a:pPr>
+            <a:r>
+              <a:rPr lang="en-US" sz="1200" b="1" spc="200" kern="0" dirty="0">
+                <a:solidFill>
                   <a:srgbClr val="7FD1D6"/>
                 </a:solidFill>
                 <a:latin typeface="Calibri" pitchFamily="34" charset="0"/>
@@ -4821,7 +5761,7 @@
             <a:pPr algn="r"/>
             <a:fld id="{F7021451-1387-4CA6-816F-3879F97B5CBC}" type="slidenum">
               <a:rPr b="0" lang="en-US"/>
-              <a:t>12</a:t>
+              <a:t>13</a:t>
             </a:fld>
             <a:endParaRPr lang="en-US"/>
           </a:p>
@@ -5630,7 +6570,7 @@
         <p:spPr>
           <a:xfrm>
             <a:off x="1463040" y="1874520"/>
-            <a:ext cx="4480560" cy="1188720"/>
+            <a:ext cx="3520440" cy="1280160"/>
           </a:xfrm>
           <a:prstGeom prst="rect">
             <a:avLst/>
@@ -5730,7 +6670,7 @@
         <p:spPr>
           <a:xfrm>
             <a:off x="1463040" y="3200400"/>
-            <a:ext cx="4480560" cy="1188720"/>
+            <a:ext cx="3520440" cy="1280160"/>
           </a:xfrm>
           <a:prstGeom prst="rect">
             <a:avLst/>
@@ -5830,7 +6770,7 @@
         <p:spPr>
           <a:xfrm>
             <a:off x="1463040" y="4526280"/>
-            <a:ext cx="4480560" cy="1188720"/>
+            <a:ext cx="3520440" cy="1280160"/>
           </a:xfrm>
           <a:prstGeom prst="rect">
             <a:avLst/>
@@ -5879,34 +6819,39 @@
       </p:sp>
       <p:sp>
         <p:nvSpPr>
-          <p:cNvPr id="13" name="SKJERMBILDE: Oversikten i Nautech (dashbord)"/>
+          <p:cNvPr id="13" name="Skjermbilde-ramme"/>
           <p:cNvSpPr/>
           <p:nvPr/>
         </p:nvSpPr>
         <p:spPr>
           <a:xfrm>
-            <a:off x="6172200" y="1828800"/>
-            <a:ext cx="5470855" cy="3931920"/>
-          </a:xfrm>
-          <a:prstGeom prst="roundRect">
-            <a:avLst>
-              <a:gd name="adj" fmla="val 2326"/>
-            </a:avLst>
+            <a:off x="5221224" y="1792224"/>
+            <a:ext cx="6458407" cy="4063937"/>
+          </a:xfrm>
+          <a:prstGeom prst="rect">
+            <a:avLst/>
           </a:prstGeom>
           <a:solidFill>
-            <a:srgbClr val="EEF3F6"/>
+            <a:srgbClr val="FFFFFF"/>
           </a:solidFill>
-          <a:ln w="19050">
+          <a:ln w="12700">
             <a:solidFill>
-              <a:srgbClr val="E8751A"/>
+              <a:srgbClr val="C9D5DE"/>
             </a:solidFill>
-            <a:prstDash val="dash"/>
+            <a:prstDash val="solid"/>
           </a:ln>
+          <a:effectLst>
+            <a:outerShdw sx="100000" sy="100000" kx="0" ky="0" algn="bl" rotWithShape="0" blurRad="101600" dist="38100" dir="5400000">
+              <a:srgbClr val="000000">
+                <a:alpha val="18000"/>
+              </a:srgbClr>
+            </a:outerShdw>
+          </a:effectLst>
         </p:spPr>
       </p:sp>
       <p:pic>
         <p:nvPicPr>
-          <p:cNvPr id="14" name="Kamera" descr="preencoded.png">    </p:cNvPr>
+          <p:cNvPr id="14" name="Skjermbilde command-center__dashboard.png" descr="/tmp/claude-0/-home-user-Claude/bbdec16f-2a10-550d-bb32-af07b09e4311/scratchpad/build/img/command-center__dashboard.png">    </p:cNvPr>
           <p:cNvPicPr>
             <a:picLocks noChangeAspect="1"/>
           </p:cNvPicPr>
@@ -5920,8 +6865,8 @@
         </p:blipFill>
         <p:spPr>
           <a:xfrm>
-            <a:off x="8633308" y="3108960"/>
-            <a:ext cx="548640" cy="548640"/>
+            <a:off x="5257800" y="1828800"/>
+            <a:ext cx="6385255" cy="3990785"/>
           </a:xfrm>
           <a:prstGeom prst="rect">
             <a:avLst/>
@@ -5936,8 +6881,8 @@
         </p:nvSpPr>
         <p:spPr>
           <a:xfrm>
-            <a:off x="6446520" y="3794760"/>
-            <a:ext cx="4922215" cy="822960"/>
+            <a:off x="5257800" y="5929313"/>
+            <a:ext cx="6385255" cy="274320"/>
           </a:xfrm>
           <a:prstGeom prst="rect">
             <a:avLst/>
@@ -5946,35 +6891,24 @@
           <a:ln/>
         </p:spPr>
         <p:txBody>
-          <a:bodyPr wrap="square" lIns="0" tIns="0" rIns="0" bIns="0" rtlCol="0" anchor="t"/>
-          <a:lstStyle/>
-          <a:p>
-            <a:pPr algn="ctr" indent="0" marL="0">
-              <a:buNone/>
-            </a:pPr>
-            <a:r>
-              <a:rPr lang="en-US" sz="1200" b="1" spc="100" kern="0" dirty="0">
-                <a:solidFill>
-                  <a:srgbClr val="E8751A"/>
-                </a:solidFill>
-              </a:rPr>
-              <a:t>SETT INN SKJERMBILDE</a:t>
-            </a:r>
-            <a:endParaRPr lang="en-US" sz="1200" dirty="0"/>
-          </a:p>
-          <a:p>
-            <a:pPr algn="ctr" indent="0" marL="0">
-              <a:buNone/>
-            </a:pPr>
-            <a:r>
-              <a:rPr lang="en-US" sz="1400" dirty="0">
-                <a:solidFill>
-                  <a:srgbClr val="1B2A38"/>
-                </a:solidFill>
-              </a:rPr>
-              <a:t>Oversikten i Nautech (dashbord)</a:t>
-            </a:r>
-            <a:endParaRPr lang="en-US" sz="1200" dirty="0"/>
+          <a:bodyPr wrap="square" lIns="0" tIns="0" rIns="0" bIns="0" rtlCol="0" anchor="ctr"/>
+          <a:lstStyle/>
+          <a:p>
+            <a:pPr indent="0" marL="0">
+              <a:buNone/>
+            </a:pPr>
+            <a:r>
+              <a:rPr lang="en-US" sz="1100" i="1" dirty="0">
+                <a:solidFill>
+                  <a:srgbClr val="5B6B7A"/>
+                </a:solidFill>
+                <a:latin typeface="Calibri" pitchFamily="34" charset="0"/>
+                <a:ea typeface="Calibri" pitchFamily="34" charset="-122"/>
+                <a:cs typeface="Calibri" pitchFamily="34" charset="-120"/>
+              </a:rPr>
+              <a:t>Oversikten i Nautech: fartøy, arbeidsordrer, sertifikater og hendelser på ett sted.</a:t>
+            </a:r>
+            <a:endParaRPr lang="en-US" sz="1100" dirty="0"/>
           </a:p>
         </p:txBody>
       </p:sp>
@@ -6127,7 +7061,7 @@
                 <a:ea typeface="Arial" pitchFamily="34" charset="-122"/>
                 <a:cs typeface="Arial" pitchFamily="34" charset="-120"/>
               </a:rPr>
-              <a:t>Spør om båten deres – og få svar med kilde</a:t>
+              <a:t>KI som kjenner båten deres – og ser hva som kommer</a:t>
             </a:r>
             <a:endParaRPr lang="en-US" sz="3000" dirty="0"/>
           </a:p>
@@ -6142,7 +7076,7 @@
         <p:spPr>
           <a:xfrm>
             <a:off x="548640" y="1828800"/>
-            <a:ext cx="5303520" cy="868680"/>
+            <a:ext cx="4434840" cy="868680"/>
           </a:xfrm>
           <a:prstGeom prst="roundRect">
             <a:avLst>
@@ -6164,7 +7098,7 @@
         <p:spPr>
           <a:xfrm>
             <a:off x="822960" y="1828800"/>
-            <a:ext cx="4754880" cy="868680"/>
+            <a:ext cx="3931920" cy="868680"/>
           </a:xfrm>
           <a:prstGeom prst="rect">
             <a:avLst/>
@@ -6180,7 +7114,7 @@
               <a:buNone/>
             </a:pPr>
             <a:r>
-              <a:rPr lang="en-US" sz="1800" i="1" dirty="0">
+              <a:rPr lang="en-US" sz="1700" i="1" dirty="0">
                 <a:solidFill>
                   <a:srgbClr val="FFFFFF"/>
                 </a:solidFill>
@@ -6190,7 +7124,7 @@
               </a:rPr>
               <a:t>«Hva vet vi om kjølevannspumpa på hjelpemotor 2?»</a:t>
             </a:r>
-            <a:endParaRPr lang="en-US" sz="1800" dirty="0"/>
+            <a:endParaRPr lang="en-US" sz="1700" dirty="0"/>
           </a:p>
         </p:txBody>
       </p:sp>
@@ -6203,7 +7137,7 @@
         <p:spPr>
           <a:xfrm>
             <a:off x="548640" y="2880360"/>
-            <a:ext cx="5303520" cy="365760"/>
+            <a:ext cx="4434840" cy="365760"/>
           </a:xfrm>
           <a:prstGeom prst="rect">
             <a:avLst/>
@@ -6286,7 +7220,7 @@
         <p:spPr>
           <a:xfrm>
             <a:off x="1188720" y="3337560"/>
-            <a:ext cx="4663440" cy="438912"/>
+            <a:ext cx="3794760" cy="438912"/>
           </a:xfrm>
           <a:prstGeom prst="rect">
             <a:avLst/>
@@ -6369,7 +7303,7 @@
         <p:spPr>
           <a:xfrm>
             <a:off x="1188720" y="3904488"/>
-            <a:ext cx="4663440" cy="438912"/>
+            <a:ext cx="3794760" cy="438912"/>
           </a:xfrm>
           <a:prstGeom prst="rect">
             <a:avLst/>
@@ -6452,7 +7386,7 @@
         <p:spPr>
           <a:xfrm>
             <a:off x="1188720" y="4471416"/>
-            <a:ext cx="4663440" cy="438912"/>
+            <a:ext cx="3794760" cy="438912"/>
           </a:xfrm>
           <a:prstGeom prst="rect">
             <a:avLst/>
@@ -6490,12 +7424,12 @@
         </p:nvSpPr>
         <p:spPr>
           <a:xfrm>
-            <a:off x="548640" y="5120640"/>
-            <a:ext cx="5303520" cy="685800"/>
+            <a:off x="548640" y="5074920"/>
+            <a:ext cx="4434840" cy="777240"/>
           </a:xfrm>
           <a:prstGeom prst="roundRect">
             <a:avLst>
-              <a:gd name="adj" fmla="val 16000"/>
+              <a:gd name="adj" fmla="val 14118"/>
             </a:avLst>
           </a:prstGeom>
           <a:solidFill>
@@ -6512,8 +7446,8 @@
         </p:nvSpPr>
         <p:spPr>
           <a:xfrm>
-            <a:off x="822960" y="5120640"/>
-            <a:ext cx="4846320" cy="685800"/>
+            <a:off x="822960" y="5074920"/>
+            <a:ext cx="3977640" cy="777240"/>
           </a:xfrm>
           <a:prstGeom prst="rect">
             <a:avLst/>
@@ -6545,34 +7479,39 @@
       </p:sp>
       <p:sp>
         <p:nvSpPr>
-          <p:cNvPr id="18" name="SKJERMBILDE: KI-assistenten: spørsmål om pumpa, med svar og kildehenvisning"/>
+          <p:cNvPr id="18" name="Skjermbilde-ramme"/>
           <p:cNvSpPr/>
           <p:nvPr/>
         </p:nvSpPr>
         <p:spPr>
           <a:xfrm>
-            <a:off x="6172200" y="1828800"/>
-            <a:ext cx="5470855" cy="3977640"/>
-          </a:xfrm>
-          <a:prstGeom prst="roundRect">
-            <a:avLst>
-              <a:gd name="adj" fmla="val 2299"/>
-            </a:avLst>
+            <a:off x="5221224" y="1792224"/>
+            <a:ext cx="6458407" cy="4063937"/>
+          </a:xfrm>
+          <a:prstGeom prst="rect">
+            <a:avLst/>
           </a:prstGeom>
           <a:solidFill>
-            <a:srgbClr val="EEF3F6"/>
+            <a:srgbClr val="FFFFFF"/>
           </a:solidFill>
-          <a:ln w="19050">
+          <a:ln w="12700">
             <a:solidFill>
-              <a:srgbClr val="E8751A"/>
+              <a:srgbClr val="C9D5DE"/>
             </a:solidFill>
-            <a:prstDash val="dash"/>
+            <a:prstDash val="solid"/>
           </a:ln>
+          <a:effectLst>
+            <a:outerShdw sx="100000" sy="100000" kx="0" ky="0" algn="bl" rotWithShape="0" blurRad="101600" dist="38100" dir="5400000">
+              <a:srgbClr val="000000">
+                <a:alpha val="18000"/>
+              </a:srgbClr>
+            </a:outerShdw>
+          </a:effectLst>
         </p:spPr>
       </p:sp>
       <p:pic>
         <p:nvPicPr>
-          <p:cNvPr id="19" name="Kamera" descr="preencoded.png">    </p:cNvPr>
+          <p:cNvPr id="19" name="Skjermbilde intelligence__forecasting.png" descr="/tmp/claude-0/-home-user-Claude/bbdec16f-2a10-550d-bb32-af07b09e4311/scratchpad/build/img/intelligence__forecasting.png">    </p:cNvPr>
           <p:cNvPicPr>
             <a:picLocks noChangeAspect="1"/>
           </p:cNvPicPr>
@@ -6586,8 +7525,8 @@
         </p:blipFill>
         <p:spPr>
           <a:xfrm>
-            <a:off x="8633308" y="3131820"/>
-            <a:ext cx="548640" cy="548640"/>
+            <a:off x="5257800" y="1828800"/>
+            <a:ext cx="6385255" cy="3990785"/>
           </a:xfrm>
           <a:prstGeom prst="rect">
             <a:avLst/>
@@ -6602,8 +7541,8 @@
         </p:nvSpPr>
         <p:spPr>
           <a:xfrm>
-            <a:off x="6446520" y="3817620"/>
-            <a:ext cx="4922215" cy="822960"/>
+            <a:off x="5257800" y="5929313"/>
+            <a:ext cx="6385255" cy="274320"/>
           </a:xfrm>
           <a:prstGeom prst="rect">
             <a:avLst/>
@@ -6612,35 +7551,24 @@
           <a:ln/>
         </p:spPr>
         <p:txBody>
-          <a:bodyPr wrap="square" lIns="0" tIns="0" rIns="0" bIns="0" rtlCol="0" anchor="t"/>
-          <a:lstStyle/>
-          <a:p>
-            <a:pPr algn="ctr" indent="0" marL="0">
-              <a:buNone/>
-            </a:pPr>
-            <a:r>
-              <a:rPr lang="en-US" sz="1200" b="1" spc="100" kern="0" dirty="0">
-                <a:solidFill>
-                  <a:srgbClr val="E8751A"/>
-                </a:solidFill>
-              </a:rPr>
-              <a:t>SETT INN SKJERMBILDE</a:t>
-            </a:r>
-            <a:endParaRPr lang="en-US" sz="1200" dirty="0"/>
-          </a:p>
-          <a:p>
-            <a:pPr algn="ctr" indent="0" marL="0">
-              <a:buNone/>
-            </a:pPr>
-            <a:r>
-              <a:rPr lang="en-US" sz="1400" dirty="0">
-                <a:solidFill>
-                  <a:srgbClr val="1B2A38"/>
-                </a:solidFill>
-              </a:rPr>
-              <a:t>KI-assistenten: spørsmål om pumpa, med svar og kildehenvisning</a:t>
-            </a:r>
-            <a:endParaRPr lang="en-US" sz="1200" dirty="0"/>
+          <a:bodyPr wrap="square" lIns="0" tIns="0" rIns="0" bIns="0" rtlCol="0" anchor="ctr"/>
+          <a:lstStyle/>
+          <a:p>
+            <a:pPr indent="0" marL="0">
+              <a:buNone/>
+            </a:pPr>
+            <a:r>
+              <a:rPr lang="en-US" sz="1100" i="1" dirty="0">
+                <a:solidFill>
+                  <a:srgbClr val="5B6B7A"/>
+                </a:solidFill>
+                <a:latin typeface="Calibri" pitchFamily="34" charset="0"/>
+                <a:ea typeface="Calibri" pitchFamily="34" charset="-122"/>
+                <a:cs typeface="Calibri" pitchFamily="34" charset="-120"/>
+              </a:rPr>
+              <a:t>KI-prognose: kommende vedlikeholdsbehov de neste seks månedene.</a:t>
+            </a:r>
+            <a:endParaRPr lang="en-US" sz="1100" dirty="0"/>
           </a:p>
         </p:txBody>
       </p:sp>
@@ -6808,7 +7736,7 @@
         <p:spPr>
           <a:xfrm>
             <a:off x="548640" y="1828800"/>
-            <a:ext cx="5394960" cy="822960"/>
+            <a:ext cx="4434840" cy="822960"/>
           </a:xfrm>
           <a:prstGeom prst="rect">
             <a:avLst/>
@@ -6891,7 +7819,7 @@
         <p:spPr>
           <a:xfrm>
             <a:off x="1280160" y="2706624"/>
-            <a:ext cx="4663440" cy="731520"/>
+            <a:ext cx="3703320" cy="731520"/>
           </a:xfrm>
           <a:prstGeom prst="rect">
             <a:avLst/>
@@ -6991,7 +7919,7 @@
         <p:spPr>
           <a:xfrm>
             <a:off x="1280160" y="3483864"/>
-            <a:ext cx="4663440" cy="731520"/>
+            <a:ext cx="3703320" cy="731520"/>
           </a:xfrm>
           <a:prstGeom prst="rect">
             <a:avLst/>
@@ -7091,7 +8019,7 @@
         <p:spPr>
           <a:xfrm>
             <a:off x="1280160" y="4261104"/>
-            <a:ext cx="4663440" cy="731520"/>
+            <a:ext cx="3703320" cy="731520"/>
           </a:xfrm>
           <a:prstGeom prst="rect">
             <a:avLst/>
@@ -7191,7 +8119,7 @@
         <p:spPr>
           <a:xfrm>
             <a:off x="1280160" y="5038344"/>
-            <a:ext cx="4663440" cy="731520"/>
+            <a:ext cx="3703320" cy="731520"/>
           </a:xfrm>
           <a:prstGeom prst="rect">
             <a:avLst/>
@@ -7240,34 +8168,39 @@
       </p:sp>
       <p:sp>
         <p:nvSpPr>
-          <p:cNvPr id="17" name="SKJERMBILDE: Fiskerimodulen: fangst per hal eller samsvar (ERS, VMS, HACCP)"/>
+          <p:cNvPr id="17" name="Skjermbilde-ramme"/>
           <p:cNvSpPr/>
           <p:nvPr/>
         </p:nvSpPr>
         <p:spPr>
           <a:xfrm>
-            <a:off x="6172200" y="1828800"/>
-            <a:ext cx="5470855" cy="3931920"/>
-          </a:xfrm>
-          <a:prstGeom prst="roundRect">
-            <a:avLst>
-              <a:gd name="adj" fmla="val 2326"/>
-            </a:avLst>
+            <a:off x="5221224" y="1792224"/>
+            <a:ext cx="6458407" cy="4063937"/>
+          </a:xfrm>
+          <a:prstGeom prst="rect">
+            <a:avLst/>
           </a:prstGeom>
           <a:solidFill>
-            <a:srgbClr val="EEF3F6"/>
+            <a:srgbClr val="FFFFFF"/>
           </a:solidFill>
-          <a:ln w="19050">
+          <a:ln w="12700">
             <a:solidFill>
-              <a:srgbClr val="E8751A"/>
+              <a:srgbClr val="C9D5DE"/>
             </a:solidFill>
-            <a:prstDash val="dash"/>
+            <a:prstDash val="solid"/>
           </a:ln>
+          <a:effectLst>
+            <a:outerShdw sx="100000" sy="100000" kx="0" ky="0" algn="bl" rotWithShape="0" blurRad="101600" dist="38100" dir="5400000">
+              <a:srgbClr val="000000">
+                <a:alpha val="18000"/>
+              </a:srgbClr>
+            </a:outerShdw>
+          </a:effectLst>
         </p:spPr>
       </p:sp>
       <p:pic>
         <p:nvPicPr>
-          <p:cNvPr id="18" name="Kamera" descr="preencoded.png">    </p:cNvPr>
+          <p:cNvPr id="18" name="Skjermbilde fishery__hauls.png" descr="/tmp/claude-0/-home-user-Claude/bbdec16f-2a10-550d-bb32-af07b09e4311/scratchpad/build/img/fishery__hauls.png">    </p:cNvPr>
           <p:cNvPicPr>
             <a:picLocks noChangeAspect="1"/>
           </p:cNvPicPr>
@@ -7281,8 +8214,8 @@
         </p:blipFill>
         <p:spPr>
           <a:xfrm>
-            <a:off x="8633308" y="3108960"/>
-            <a:ext cx="548640" cy="548640"/>
+            <a:off x="5257800" y="1828800"/>
+            <a:ext cx="6385255" cy="3990785"/>
           </a:xfrm>
           <a:prstGeom prst="rect">
             <a:avLst/>
@@ -7297,8 +8230,8 @@
         </p:nvSpPr>
         <p:spPr>
           <a:xfrm>
-            <a:off x="6446520" y="3794760"/>
-            <a:ext cx="4922215" cy="822960"/>
+            <a:off x="5257800" y="5929313"/>
+            <a:ext cx="6385255" cy="274320"/>
           </a:xfrm>
           <a:prstGeom prst="rect">
             <a:avLst/>
@@ -7307,35 +8240,24 @@
           <a:ln/>
         </p:spPr>
         <p:txBody>
-          <a:bodyPr wrap="square" lIns="0" tIns="0" rIns="0" bIns="0" rtlCol="0" anchor="t"/>
-          <a:lstStyle/>
-          <a:p>
-            <a:pPr algn="ctr" indent="0" marL="0">
-              <a:buNone/>
-            </a:pPr>
-            <a:r>
-              <a:rPr lang="en-US" sz="1200" b="1" spc="100" kern="0" dirty="0">
-                <a:solidFill>
-                  <a:srgbClr val="E8751A"/>
-                </a:solidFill>
-              </a:rPr>
-              <a:t>SETT INN SKJERMBILDE</a:t>
-            </a:r>
-            <a:endParaRPr lang="en-US" sz="1200" dirty="0"/>
-          </a:p>
-          <a:p>
-            <a:pPr algn="ctr" indent="0" marL="0">
-              <a:buNone/>
-            </a:pPr>
-            <a:r>
-              <a:rPr lang="en-US" sz="1400" dirty="0">
-                <a:solidFill>
-                  <a:srgbClr val="1B2A38"/>
-                </a:solidFill>
-              </a:rPr>
-              <a:t>Fiskerimodulen: fangst per hal eller samsvar (ERS, VMS, HACCP)</a:t>
-            </a:r>
-            <a:endParaRPr lang="en-US" sz="1200" dirty="0"/>
+          <a:bodyPr wrap="square" lIns="0" tIns="0" rIns="0" bIns="0" rtlCol="0" anchor="ctr"/>
+          <a:lstStyle/>
+          <a:p>
+            <a:pPr indent="0" marL="0">
+              <a:buNone/>
+            </a:pPr>
+            <a:r>
+              <a:rPr lang="en-US" sz="1100" i="1" dirty="0">
+                <a:solidFill>
+                  <a:srgbClr val="5B6B7A"/>
+                </a:solidFill>
+                <a:latin typeface="Calibri" pitchFamily="34" charset="0"/>
+                <a:ea typeface="Calibri" pitchFamily="34" charset="-122"/>
+                <a:cs typeface="Calibri" pitchFamily="34" charset="-120"/>
+              </a:rPr>
+              <a:t>Fangst per hal: tidspunkt, dyp, temperatur og mengde.</a:t>
+            </a:r>
+            <a:endParaRPr lang="en-US" sz="1100" dirty="0"/>
           </a:p>
         </p:txBody>
       </p:sp>
@@ -9265,7 +10187,7 @@
                 <a:ea typeface="Calibri" pitchFamily="34" charset="-122"/>
                 <a:cs typeface="Calibri" pitchFamily="34" charset="-120"/>
               </a:rPr>
-              <a:t>HVORFOR BYTTE?</a:t>
+              <a:t>PRODUKTET</a:t>
             </a:r>
             <a:endParaRPr lang="en-US" sz="1200" dirty="0"/>
           </a:p>
@@ -9306,7 +10228,7 @@
                 <a:ea typeface="Arial" pitchFamily="34" charset="-122"/>
                 <a:cs typeface="Arial" pitchFamily="34" charset="-120"/>
               </a:rPr>
-              <a:t>Hva dere får med Nautech som dere ikke har i dag</a:t>
+              <a:t>Slik ser Nautech ut</a:t>
             </a:r>
             <a:endParaRPr lang="en-US" sz="3000" dirty="0"/>
           </a:p>
@@ -9314,149 +10236,39 @@
       </p:sp>
       <p:sp>
         <p:nvSpPr>
-          <p:cNvPr id="4" name="Kort"/>
+          <p:cNvPr id="4" name="Skjermbilde-ramme"/>
           <p:cNvSpPr/>
           <p:nvPr/>
         </p:nvSpPr>
         <p:spPr>
           <a:xfrm>
-            <a:off x="548640" y="1828800"/>
-            <a:ext cx="5410048" cy="3931920"/>
-          </a:xfrm>
-          <a:prstGeom prst="roundRect">
-            <a:avLst>
-              <a:gd name="adj" fmla="val 2791"/>
-            </a:avLst>
+            <a:off x="512064" y="1975104"/>
+            <a:ext cx="3588410" cy="2270189"/>
+          </a:xfrm>
+          <a:prstGeom prst="rect">
+            <a:avLst/>
           </a:prstGeom>
           <a:solidFill>
-            <a:srgbClr val="EEF3F6"/>
+            <a:srgbClr val="FFFFFF"/>
           </a:solidFill>
-          <a:ln/>
-        </p:spPr>
-      </p:sp>
-      <p:sp>
-        <p:nvSpPr>
-          <p:cNvPr id="5" name="Kort"/>
-          <p:cNvSpPr/>
-          <p:nvPr/>
-        </p:nvSpPr>
-        <p:spPr>
-          <a:xfrm>
-            <a:off x="6233008" y="1828800"/>
-            <a:ext cx="5410048" cy="3931920"/>
-          </a:xfrm>
-          <a:prstGeom prst="roundRect">
-            <a:avLst>
-              <a:gd name="adj" fmla="val 2791"/>
-            </a:avLst>
-          </a:prstGeom>
-          <a:solidFill>
-            <a:srgbClr val="0B1F33"/>
-          </a:solidFill>
-          <a:ln/>
-        </p:spPr>
-      </p:sp>
-      <p:sp>
-        <p:nvSpPr>
-          <p:cNvPr id="6" name="Text 4"/>
-          <p:cNvSpPr txBox="1"/>
-          <p:nvPr/>
-        </p:nvSpPr>
-        <p:spPr>
-          <a:xfrm>
-            <a:off x="914400" y="2011680"/>
-            <a:ext cx="4678528" cy="365760"/>
-          </a:xfrm>
-          <a:prstGeom prst="rect">
-            <a:avLst/>
-          </a:prstGeom>
-          <a:noFill/>
-          <a:ln/>
-        </p:spPr>
-        <p:txBody>
-          <a:bodyPr wrap="square" lIns="0" tIns="0" rIns="0" bIns="0" rtlCol="0" anchor="t"/>
-          <a:lstStyle/>
-          <a:p>
-            <a:pPr indent="0" marL="0">
-              <a:buNone/>
-            </a:pPr>
-            <a:r>
-              <a:rPr lang="en-US" sz="1300" b="1" spc="200" kern="0" dirty="0">
-                <a:solidFill>
-                  <a:srgbClr val="5B6B7A"/>
-                </a:solidFill>
-                <a:latin typeface="Calibri" pitchFamily="34" charset="0"/>
-                <a:ea typeface="Calibri" pitchFamily="34" charset="-122"/>
-                <a:cs typeface="Calibri" pitchFamily="34" charset="-120"/>
-              </a:rPr>
-              <a:t>TYPISK I DAG</a:t>
-            </a:r>
-            <a:endParaRPr lang="en-US" sz="1300" dirty="0"/>
-          </a:p>
-        </p:txBody>
-      </p:sp>
-      <p:sp>
-        <p:nvSpPr>
-          <p:cNvPr id="7" name="Text 5"/>
-          <p:cNvSpPr txBox="1"/>
-          <p:nvPr/>
-        </p:nvSpPr>
-        <p:spPr>
-          <a:xfrm>
-            <a:off x="6598768" y="2011680"/>
-            <a:ext cx="4678528" cy="365760"/>
-          </a:xfrm>
-          <a:prstGeom prst="rect">
-            <a:avLst/>
-          </a:prstGeom>
-          <a:noFill/>
-          <a:ln/>
-        </p:spPr>
-        <p:txBody>
-          <a:bodyPr wrap="square" lIns="0" tIns="0" rIns="0" bIns="0" rtlCol="0" anchor="t"/>
-          <a:lstStyle/>
-          <a:p>
-            <a:pPr indent="0" marL="0">
-              <a:buNone/>
-            </a:pPr>
-            <a:r>
-              <a:rPr lang="en-US" sz="1300" b="1" spc="200" kern="0" dirty="0">
-                <a:solidFill>
-                  <a:srgbClr val="7FD1D6"/>
-                </a:solidFill>
-                <a:latin typeface="Calibri" pitchFamily="34" charset="0"/>
-                <a:ea typeface="Calibri" pitchFamily="34" charset="-122"/>
-                <a:cs typeface="Calibri" pitchFamily="34" charset="-120"/>
-              </a:rPr>
-              <a:t>MED NAUTECH</a:t>
-            </a:r>
-            <a:endParaRPr lang="en-US" sz="1300" dirty="0"/>
-          </a:p>
-        </p:txBody>
-      </p:sp>
-      <p:sp>
-        <p:nvSpPr>
-          <p:cNvPr id="8" name="Ikon-sirkel"/>
-          <p:cNvSpPr/>
-          <p:nvPr/>
-        </p:nvSpPr>
-        <p:spPr>
-          <a:xfrm>
-            <a:off x="914400" y="2560320"/>
-            <a:ext cx="384048" cy="384048"/>
-          </a:xfrm>
-          <a:prstGeom prst="ellipse">
-            <a:avLst/>
-          </a:prstGeom>
-          <a:solidFill>
-            <a:srgbClr val="DDE7EE"/>
-          </a:solidFill>
-          <a:ln/>
+          <a:ln w="12700">
+            <a:solidFill>
+              <a:srgbClr val="C9D5DE"/>
+            </a:solidFill>
+            <a:prstDash val="solid"/>
+          </a:ln>
+          <a:effectLst>
+            <a:outerShdw sx="100000" sy="100000" kx="0" ky="0" algn="bl" rotWithShape="0" blurRad="101600" dist="38100" dir="5400000">
+              <a:srgbClr val="000000">
+                <a:alpha val="18000"/>
+              </a:srgbClr>
+            </a:outerShdw>
+          </a:effectLst>
         </p:spPr>
       </p:sp>
       <p:pic>
         <p:nvPicPr>
-          <p:cNvPr id="9" name="Ikon FaXmark" descr="preencoded.png">    </p:cNvPr>
+          <p:cNvPr id="5" name="Skjermbilde fleet__vessels.png" descr="/tmp/claude-0/-home-user-Claude/bbdec16f-2a10-550d-bb32-af07b09e4311/scratchpad/build/img/fleet__vessels.png">    </p:cNvPr>
           <p:cNvPicPr>
             <a:picLocks noChangeAspect="1"/>
           </p:cNvPicPr>
@@ -9470,8 +10282,8 @@
         </p:blipFill>
         <p:spPr>
           <a:xfrm>
-            <a:off x="1006572" y="2652492"/>
-            <a:ext cx="199705" cy="199705"/>
+            <a:off x="548640" y="2011680"/>
+            <a:ext cx="3515258" cy="2197037"/>
           </a:xfrm>
           <a:prstGeom prst="rect">
             <a:avLst/>
@@ -9480,14 +10292,14 @@
       </p:pic>
       <p:sp>
         <p:nvSpPr>
-          <p:cNvPr id="10" name="Text 7"/>
+          <p:cNvPr id="6" name="Text 3"/>
           <p:cNvSpPr txBox="1"/>
           <p:nvPr/>
         </p:nvSpPr>
         <p:spPr>
           <a:xfrm>
-            <a:off x="1463040" y="2560320"/>
-            <a:ext cx="4221328" cy="384048"/>
+            <a:off x="548640" y="4483037"/>
+            <a:ext cx="3515258" cy="914400"/>
           </a:xfrm>
           <a:prstGeom prst="rect">
             <a:avLst/>
@@ -9496,14 +10308,31 @@
           <a:ln/>
         </p:spPr>
         <p:txBody>
-          <a:bodyPr wrap="square" lIns="0" tIns="0" rIns="0" bIns="0" rtlCol="0" anchor="ctr"/>
-          <a:lstStyle/>
-          <a:p>
-            <a:pPr indent="0" marL="0">
-              <a:buNone/>
-            </a:pPr>
-            <a:r>
-              <a:rPr lang="en-US" sz="1600" dirty="0">
+          <a:bodyPr wrap="square" lIns="0" tIns="0" rIns="0" bIns="0" rtlCol="0" anchor="t"/>
+          <a:lstStyle/>
+          <a:p>
+            <a:pPr indent="0" marL="0">
+              <a:buNone/>
+            </a:pPr>
+            <a:r>
+              <a:rPr lang="en-US" sz="1700" b="1" dirty="0">
+                <a:solidFill>
+                  <a:srgbClr val="0B1F33"/>
+                </a:solidFill>
+                <a:latin typeface="Calibri" pitchFamily="34" charset="0"/>
+                <a:ea typeface="Calibri" pitchFamily="34" charset="-122"/>
+                <a:cs typeface="Calibri" pitchFamily="34" charset="-120"/>
+              </a:rPr>
+              <a:t>Flåten</a:t>
+            </a:r>
+            <a:endParaRPr lang="en-US" sz="1700" dirty="0"/>
+          </a:p>
+          <a:p>
+            <a:pPr indent="0" marL="0">
+              <a:buNone/>
+            </a:pPr>
+            <a:r>
+              <a:rPr lang="en-US" sz="1500" dirty="0">
                 <a:solidFill>
                   <a:srgbClr val="1B2A38"/>
                 </a:solidFill>
@@ -9511,35 +10340,47 @@
                 <a:ea typeface="Calibri" pitchFamily="34" charset="-122"/>
                 <a:cs typeface="Calibri" pitchFamily="34" charset="-120"/>
               </a:rPr>
-              <a:t>Flere systemer og regneark</a:t>
-            </a:r>
-            <a:endParaRPr lang="en-US" sz="1600" dirty="0"/>
-          </a:p>
-        </p:txBody>
-      </p:sp>
-      <p:sp>
-        <p:nvSpPr>
-          <p:cNvPr id="11" name="Ikon-sirkel"/>
+              <a:t>Alle fartøy samlet: trålere, linebåter og ringnotfartøy.</a:t>
+            </a:r>
+            <a:endParaRPr lang="en-US" sz="1700" dirty="0"/>
+          </a:p>
+        </p:txBody>
+      </p:sp>
+      <p:sp>
+        <p:nvSpPr>
+          <p:cNvPr id="7" name="Skjermbilde-ramme"/>
           <p:cNvSpPr/>
           <p:nvPr/>
         </p:nvSpPr>
         <p:spPr>
           <a:xfrm>
-            <a:off x="6598768" y="2560320"/>
-            <a:ext cx="384048" cy="384048"/>
-          </a:xfrm>
-          <a:prstGeom prst="ellipse">
+            <a:off x="4301642" y="1975104"/>
+            <a:ext cx="3588410" cy="2270189"/>
+          </a:xfrm>
+          <a:prstGeom prst="rect">
             <a:avLst/>
           </a:prstGeom>
           <a:solidFill>
-            <a:srgbClr val="0E7C86"/>
+            <a:srgbClr val="FFFFFF"/>
           </a:solidFill>
-          <a:ln/>
+          <a:ln w="12700">
+            <a:solidFill>
+              <a:srgbClr val="C9D5DE"/>
+            </a:solidFill>
+            <a:prstDash val="solid"/>
+          </a:ln>
+          <a:effectLst>
+            <a:outerShdw sx="100000" sy="100000" kx="0" ky="0" algn="bl" rotWithShape="0" blurRad="101600" dist="38100" dir="5400000">
+              <a:srgbClr val="000000">
+                <a:alpha val="18000"/>
+              </a:srgbClr>
+            </a:outerShdw>
+          </a:effectLst>
         </p:spPr>
       </p:sp>
       <p:pic>
         <p:nvPicPr>
-          <p:cNvPr id="12" name="Ikon FaCheck" descr="preencoded.png">    </p:cNvPr>
+          <p:cNvPr id="8" name="Skjermbilde maintenance__work-orders.png" descr="/tmp/claude-0/-home-user-Claude/bbdec16f-2a10-550d-bb32-af07b09e4311/scratchpad/build/img/maintenance__work-orders.png">    </p:cNvPr>
           <p:cNvPicPr>
             <a:picLocks noChangeAspect="1"/>
           </p:cNvPicPr>
@@ -9553,8 +10394,8 @@
         </p:blipFill>
         <p:spPr>
           <a:xfrm>
-            <a:off x="6690939" y="2652492"/>
-            <a:ext cx="199705" cy="199705"/>
+            <a:off x="4338218" y="2011680"/>
+            <a:ext cx="3515258" cy="2197037"/>
           </a:xfrm>
           <a:prstGeom prst="rect">
             <a:avLst/>
@@ -9563,14 +10404,14 @@
       </p:pic>
       <p:sp>
         <p:nvSpPr>
-          <p:cNvPr id="13" name="Text 9"/>
+          <p:cNvPr id="9" name="Text 5"/>
           <p:cNvSpPr txBox="1"/>
           <p:nvPr/>
         </p:nvSpPr>
         <p:spPr>
           <a:xfrm>
-            <a:off x="7147408" y="2560320"/>
-            <a:ext cx="3947008" cy="384048"/>
+            <a:off x="4338218" y="4483037"/>
+            <a:ext cx="3515258" cy="914400"/>
           </a:xfrm>
           <a:prstGeom prst="rect">
             <a:avLst/>
@@ -9579,50 +10420,79 @@
           <a:ln/>
         </p:spPr>
         <p:txBody>
-          <a:bodyPr wrap="square" lIns="0" tIns="0" rIns="0" bIns="0" rtlCol="0" anchor="ctr"/>
-          <a:lstStyle/>
-          <a:p>
-            <a:pPr indent="0" marL="0">
-              <a:buNone/>
-            </a:pPr>
-            <a:r>
-              <a:rPr lang="en-US" sz="1600" b="1" dirty="0">
-                <a:solidFill>
-                  <a:srgbClr val="FFFFFF"/>
-                </a:solidFill>
-                <a:latin typeface="Calibri" pitchFamily="34" charset="0"/>
-                <a:ea typeface="Calibri" pitchFamily="34" charset="-122"/>
-                <a:cs typeface="Calibri" pitchFamily="34" charset="-120"/>
-              </a:rPr>
-              <a:t>Ett system for hele driften</a:t>
-            </a:r>
-            <a:endParaRPr lang="en-US" sz="1600" dirty="0"/>
-          </a:p>
-        </p:txBody>
-      </p:sp>
-      <p:sp>
-        <p:nvSpPr>
-          <p:cNvPr id="14" name="Ikon-sirkel"/>
+          <a:bodyPr wrap="square" lIns="0" tIns="0" rIns="0" bIns="0" rtlCol="0" anchor="t"/>
+          <a:lstStyle/>
+          <a:p>
+            <a:pPr indent="0" marL="0">
+              <a:buNone/>
+            </a:pPr>
+            <a:r>
+              <a:rPr lang="en-US" sz="1700" b="1" dirty="0">
+                <a:solidFill>
+                  <a:srgbClr val="0B1F33"/>
+                </a:solidFill>
+                <a:latin typeface="Calibri" pitchFamily="34" charset="0"/>
+                <a:ea typeface="Calibri" pitchFamily="34" charset="-122"/>
+                <a:cs typeface="Calibri" pitchFamily="34" charset="-120"/>
+              </a:rPr>
+              <a:t>Arbeidsordrer</a:t>
+            </a:r>
+            <a:endParaRPr lang="en-US" sz="1700" dirty="0"/>
+          </a:p>
+          <a:p>
+            <a:pPr indent="0" marL="0">
+              <a:buNone/>
+            </a:pPr>
+            <a:r>
+              <a:rPr lang="en-US" sz="1500" dirty="0">
+                <a:solidFill>
+                  <a:srgbClr val="1B2A38"/>
+                </a:solidFill>
+                <a:latin typeface="Calibri" pitchFamily="34" charset="0"/>
+                <a:ea typeface="Calibri" pitchFamily="34" charset="-122"/>
+                <a:cs typeface="Calibri" pitchFamily="34" charset="-120"/>
+              </a:rPr>
+              <a:t>Planlagt vedlikehold med ansvarlig, prioritet og frist.</a:t>
+            </a:r>
+            <a:endParaRPr lang="en-US" sz="1700" dirty="0"/>
+          </a:p>
+        </p:txBody>
+      </p:sp>
+      <p:sp>
+        <p:nvSpPr>
+          <p:cNvPr id="10" name="Skjermbilde-ramme"/>
           <p:cNvSpPr/>
           <p:nvPr/>
         </p:nvSpPr>
         <p:spPr>
           <a:xfrm>
-            <a:off x="914400" y="3337560"/>
-            <a:ext cx="384048" cy="384048"/>
-          </a:xfrm>
-          <a:prstGeom prst="ellipse">
+            <a:off x="8091221" y="1975104"/>
+            <a:ext cx="3588410" cy="2270189"/>
+          </a:xfrm>
+          <a:prstGeom prst="rect">
             <a:avLst/>
           </a:prstGeom>
           <a:solidFill>
-            <a:srgbClr val="DDE7EE"/>
+            <a:srgbClr val="FFFFFF"/>
           </a:solidFill>
-          <a:ln/>
+          <a:ln w="12700">
+            <a:solidFill>
+              <a:srgbClr val="C9D5DE"/>
+            </a:solidFill>
+            <a:prstDash val="solid"/>
+          </a:ln>
+          <a:effectLst>
+            <a:outerShdw sx="100000" sy="100000" kx="0" ky="0" algn="bl" rotWithShape="0" blurRad="101600" dist="38100" dir="5400000">
+              <a:srgbClr val="000000">
+                <a:alpha val="18000"/>
+              </a:srgbClr>
+            </a:outerShdw>
+          </a:effectLst>
         </p:spPr>
       </p:sp>
       <p:pic>
         <p:nvPicPr>
-          <p:cNvPr id="15" name="Ikon FaXmark" descr="preencoded.png">    </p:cNvPr>
+          <p:cNvPr id="11" name="Skjermbilde safety__dashboard.png" descr="/tmp/claude-0/-home-user-Claude/bbdec16f-2a10-550d-bb32-af07b09e4311/scratchpad/build/img/safety__dashboard.png">    </p:cNvPr>
           <p:cNvPicPr>
             <a:picLocks noChangeAspect="1"/>
           </p:cNvPicPr>
@@ -9636,8 +10506,8 @@
         </p:blipFill>
         <p:spPr>
           <a:xfrm>
-            <a:off x="1006572" y="3429732"/>
-            <a:ext cx="199705" cy="199705"/>
+            <a:off x="8127797" y="2011680"/>
+            <a:ext cx="3515258" cy="2197037"/>
           </a:xfrm>
           <a:prstGeom prst="rect">
             <a:avLst/>
@@ -9646,14 +10516,14 @@
       </p:pic>
       <p:sp>
         <p:nvSpPr>
-          <p:cNvPr id="16" name="Text 11"/>
+          <p:cNvPr id="12" name="Text 7"/>
           <p:cNvSpPr txBox="1"/>
           <p:nvPr/>
         </p:nvSpPr>
         <p:spPr>
           <a:xfrm>
-            <a:off x="1463040" y="3337560"/>
-            <a:ext cx="4221328" cy="384048"/>
+            <a:off x="8127797" y="4483037"/>
+            <a:ext cx="3515258" cy="914400"/>
           </a:xfrm>
           <a:prstGeom prst="rect">
             <a:avLst/>
@@ -9662,14 +10532,31 @@
           <a:ln/>
         </p:spPr>
         <p:txBody>
-          <a:bodyPr wrap="square" lIns="0" tIns="0" rIns="0" bIns="0" rtlCol="0" anchor="ctr"/>
-          <a:lstStyle/>
-          <a:p>
-            <a:pPr indent="0" marL="0">
-              <a:buNone/>
-            </a:pPr>
-            <a:r>
-              <a:rPr lang="en-US" sz="1600" dirty="0">
+          <a:bodyPr wrap="square" lIns="0" tIns="0" rIns="0" bIns="0" rtlCol="0" anchor="t"/>
+          <a:lstStyle/>
+          <a:p>
+            <a:pPr indent="0" marL="0">
+              <a:buNone/>
+            </a:pPr>
+            <a:r>
+              <a:rPr lang="en-US" sz="1700" b="1" dirty="0">
+                <a:solidFill>
+                  <a:srgbClr val="0B1F33"/>
+                </a:solidFill>
+                <a:latin typeface="Calibri" pitchFamily="34" charset="0"/>
+                <a:ea typeface="Calibri" pitchFamily="34" charset="-122"/>
+                <a:cs typeface="Calibri" pitchFamily="34" charset="-120"/>
+              </a:rPr>
+              <a:t>Sikkerhet</a:t>
+            </a:r>
+            <a:endParaRPr lang="en-US" sz="1700" dirty="0"/>
+          </a:p>
+          <a:p>
+            <a:pPr indent="0" marL="0">
+              <a:buNone/>
+            </a:pPr>
+            <a:r>
+              <a:rPr lang="en-US" sz="1500" dirty="0">
                 <a:solidFill>
                   <a:srgbClr val="1B2A38"/>
                 </a:solidFill>
@@ -9677,424 +10564,9 @@
                 <a:ea typeface="Calibri" pitchFamily="34" charset="-122"/>
                 <a:cs typeface="Calibri" pitchFamily="34" charset="-120"/>
               </a:rPr>
-              <a:t>Leting i historikk, e-post og permer</a:t>
-            </a:r>
-            <a:endParaRPr lang="en-US" sz="1600" dirty="0"/>
-          </a:p>
-        </p:txBody>
-      </p:sp>
-      <p:sp>
-        <p:nvSpPr>
-          <p:cNvPr id="17" name="Ikon-sirkel"/>
-          <p:cNvSpPr/>
-          <p:nvPr/>
-        </p:nvSpPr>
-        <p:spPr>
-          <a:xfrm>
-            <a:off x="6598768" y="3337560"/>
-            <a:ext cx="384048" cy="384048"/>
-          </a:xfrm>
-          <a:prstGeom prst="ellipse">
-            <a:avLst/>
-          </a:prstGeom>
-          <a:solidFill>
-            <a:srgbClr val="0E7C86"/>
-          </a:solidFill>
-          <a:ln/>
-        </p:spPr>
-      </p:sp>
-      <p:pic>
-        <p:nvPicPr>
-          <p:cNvPr id="18" name="Ikon FaCheck" descr="preencoded.png">    </p:cNvPr>
-          <p:cNvPicPr>
-            <a:picLocks noChangeAspect="1"/>
-          </p:cNvPicPr>
-          <p:nvPr/>
-        </p:nvPicPr>
-        <p:blipFill>
-          <a:blip r:embed="rId4"/>
-          <a:stretch>
-            <a:fillRect/>
-          </a:stretch>
-        </p:blipFill>
-        <p:spPr>
-          <a:xfrm>
-            <a:off x="6690939" y="3429732"/>
-            <a:ext cx="199705" cy="199705"/>
-          </a:xfrm>
-          <a:prstGeom prst="rect">
-            <a:avLst/>
-          </a:prstGeom>
-        </p:spPr>
-      </p:pic>
-      <p:sp>
-        <p:nvSpPr>
-          <p:cNvPr id="19" name="Text 13"/>
-          <p:cNvSpPr txBox="1"/>
-          <p:nvPr/>
-        </p:nvSpPr>
-        <p:spPr>
-          <a:xfrm>
-            <a:off x="7147408" y="3337560"/>
-            <a:ext cx="3947008" cy="384048"/>
-          </a:xfrm>
-          <a:prstGeom prst="rect">
-            <a:avLst/>
-          </a:prstGeom>
-          <a:noFill/>
-          <a:ln/>
-        </p:spPr>
-        <p:txBody>
-          <a:bodyPr wrap="square" lIns="0" tIns="0" rIns="0" bIns="0" rtlCol="0" anchor="ctr"/>
-          <a:lstStyle/>
-          <a:p>
-            <a:pPr indent="0" marL="0">
-              <a:buNone/>
-            </a:pPr>
-            <a:r>
-              <a:rPr lang="en-US" sz="1600" b="1" dirty="0">
-                <a:solidFill>
-                  <a:srgbClr val="FFFFFF"/>
-                </a:solidFill>
-                <a:latin typeface="Calibri" pitchFamily="34" charset="0"/>
-                <a:ea typeface="Calibri" pitchFamily="34" charset="-122"/>
-                <a:cs typeface="Calibri" pitchFamily="34" charset="-120"/>
-              </a:rPr>
-              <a:t>Spør og få svar med kilde</a:t>
-            </a:r>
-            <a:endParaRPr lang="en-US" sz="1600" dirty="0"/>
-          </a:p>
-        </p:txBody>
-      </p:sp>
-      <p:sp>
-        <p:nvSpPr>
-          <p:cNvPr id="20" name="Ikon-sirkel"/>
-          <p:cNvSpPr/>
-          <p:nvPr/>
-        </p:nvSpPr>
-        <p:spPr>
-          <a:xfrm>
-            <a:off x="914400" y="4114800"/>
-            <a:ext cx="384048" cy="384048"/>
-          </a:xfrm>
-          <a:prstGeom prst="ellipse">
-            <a:avLst/>
-          </a:prstGeom>
-          <a:solidFill>
-            <a:srgbClr val="DDE7EE"/>
-          </a:solidFill>
-          <a:ln/>
-        </p:spPr>
-      </p:sp>
-      <p:pic>
-        <p:nvPicPr>
-          <p:cNvPr id="21" name="Ikon FaXmark" descr="preencoded.png">    </p:cNvPr>
-          <p:cNvPicPr>
-            <a:picLocks noChangeAspect="1"/>
-          </p:cNvPicPr>
-          <p:nvPr/>
-        </p:nvPicPr>
-        <p:blipFill>
-          <a:blip r:embed="rId5"/>
-          <a:stretch>
-            <a:fillRect/>
-          </a:stretch>
-        </p:blipFill>
-        <p:spPr>
-          <a:xfrm>
-            <a:off x="1006572" y="4206972"/>
-            <a:ext cx="199705" cy="199705"/>
-          </a:xfrm>
-          <a:prstGeom prst="rect">
-            <a:avLst/>
-          </a:prstGeom>
-        </p:spPr>
-      </p:pic>
-      <p:sp>
-        <p:nvSpPr>
-          <p:cNvPr id="22" name="Text 15"/>
-          <p:cNvSpPr txBox="1"/>
-          <p:nvPr/>
-        </p:nvSpPr>
-        <p:spPr>
-          <a:xfrm>
-            <a:off x="1463040" y="4114800"/>
-            <a:ext cx="4221328" cy="384048"/>
-          </a:xfrm>
-          <a:prstGeom prst="rect">
-            <a:avLst/>
-          </a:prstGeom>
-          <a:noFill/>
-          <a:ln/>
-        </p:spPr>
-        <p:txBody>
-          <a:bodyPr wrap="square" lIns="0" tIns="0" rIns="0" bIns="0" rtlCol="0" anchor="ctr"/>
-          <a:lstStyle/>
-          <a:p>
-            <a:pPr indent="0" marL="0">
-              <a:buNone/>
-            </a:pPr>
-            <a:r>
-              <a:rPr lang="en-US" sz="1600" dirty="0">
-                <a:solidFill>
-                  <a:srgbClr val="1B2A38"/>
-                </a:solidFill>
-                <a:latin typeface="Calibri" pitchFamily="34" charset="0"/>
-                <a:ea typeface="Calibri" pitchFamily="34" charset="-122"/>
-                <a:cs typeface="Calibri" pitchFamily="34" charset="-120"/>
-              </a:rPr>
-              <a:t>Status kommer frem på telefon og e-post</a:t>
-            </a:r>
-            <a:endParaRPr lang="en-US" sz="1600" dirty="0"/>
-          </a:p>
-        </p:txBody>
-      </p:sp>
-      <p:sp>
-        <p:nvSpPr>
-          <p:cNvPr id="23" name="Ikon-sirkel"/>
-          <p:cNvSpPr/>
-          <p:nvPr/>
-        </p:nvSpPr>
-        <p:spPr>
-          <a:xfrm>
-            <a:off x="6598768" y="4114800"/>
-            <a:ext cx="384048" cy="384048"/>
-          </a:xfrm>
-          <a:prstGeom prst="ellipse">
-            <a:avLst/>
-          </a:prstGeom>
-          <a:solidFill>
-            <a:srgbClr val="0E7C86"/>
-          </a:solidFill>
-          <a:ln/>
-        </p:spPr>
-      </p:sp>
-      <p:pic>
-        <p:nvPicPr>
-          <p:cNvPr id="24" name="Ikon FaCheck" descr="preencoded.png">    </p:cNvPr>
-          <p:cNvPicPr>
-            <a:picLocks noChangeAspect="1"/>
-          </p:cNvPicPr>
-          <p:nvPr/>
-        </p:nvPicPr>
-        <p:blipFill>
-          <a:blip r:embed="rId6"/>
-          <a:stretch>
-            <a:fillRect/>
-          </a:stretch>
-        </p:blipFill>
-        <p:spPr>
-          <a:xfrm>
-            <a:off x="6690939" y="4206972"/>
-            <a:ext cx="199705" cy="199705"/>
-          </a:xfrm>
-          <a:prstGeom prst="rect">
-            <a:avLst/>
-          </a:prstGeom>
-        </p:spPr>
-      </p:pic>
-      <p:sp>
-        <p:nvSpPr>
-          <p:cNvPr id="25" name="Text 17"/>
-          <p:cNvSpPr txBox="1"/>
-          <p:nvPr/>
-        </p:nvSpPr>
-        <p:spPr>
-          <a:xfrm>
-            <a:off x="7147408" y="4114800"/>
-            <a:ext cx="3947008" cy="384048"/>
-          </a:xfrm>
-          <a:prstGeom prst="rect">
-            <a:avLst/>
-          </a:prstGeom>
-          <a:noFill/>
-          <a:ln/>
-        </p:spPr>
-        <p:txBody>
-          <a:bodyPr wrap="square" lIns="0" tIns="0" rIns="0" bIns="0" rtlCol="0" anchor="ctr"/>
-          <a:lstStyle/>
-          <a:p>
-            <a:pPr indent="0" marL="0">
-              <a:buNone/>
-            </a:pPr>
-            <a:r>
-              <a:rPr lang="en-US" sz="1600" b="1" dirty="0">
-                <a:solidFill>
-                  <a:srgbClr val="FFFFFF"/>
-                </a:solidFill>
-                <a:latin typeface="Calibri" pitchFamily="34" charset="0"/>
-                <a:ea typeface="Calibri" pitchFamily="34" charset="-122"/>
-                <a:cs typeface="Calibri" pitchFamily="34" charset="-120"/>
-              </a:rPr>
-              <a:t>Samme oversikt om bord og på land</a:t>
-            </a:r>
-            <a:endParaRPr lang="en-US" sz="1600" dirty="0"/>
-          </a:p>
-        </p:txBody>
-      </p:sp>
-      <p:sp>
-        <p:nvSpPr>
-          <p:cNvPr id="26" name="Ikon-sirkel"/>
-          <p:cNvSpPr/>
-          <p:nvPr/>
-        </p:nvSpPr>
-        <p:spPr>
-          <a:xfrm>
-            <a:off x="914400" y="4892040"/>
-            <a:ext cx="384048" cy="384048"/>
-          </a:xfrm>
-          <a:prstGeom prst="ellipse">
-            <a:avLst/>
-          </a:prstGeom>
-          <a:solidFill>
-            <a:srgbClr val="DDE7EE"/>
-          </a:solidFill>
-          <a:ln/>
-        </p:spPr>
-      </p:sp>
-      <p:pic>
-        <p:nvPicPr>
-          <p:cNvPr id="27" name="Ikon FaXmark" descr="preencoded.png">    </p:cNvPr>
-          <p:cNvPicPr>
-            <a:picLocks noChangeAspect="1"/>
-          </p:cNvPicPr>
-          <p:nvPr/>
-        </p:nvPicPr>
-        <p:blipFill>
-          <a:blip r:embed="rId7"/>
-          <a:stretch>
-            <a:fillRect/>
-          </a:stretch>
-        </p:blipFill>
-        <p:spPr>
-          <a:xfrm>
-            <a:off x="1006572" y="4984212"/>
-            <a:ext cx="199705" cy="199705"/>
-          </a:xfrm>
-          <a:prstGeom prst="rect">
-            <a:avLst/>
-          </a:prstGeom>
-        </p:spPr>
-      </p:pic>
-      <p:sp>
-        <p:nvSpPr>
-          <p:cNvPr id="28" name="Text 19"/>
-          <p:cNvSpPr txBox="1"/>
-          <p:nvPr/>
-        </p:nvSpPr>
-        <p:spPr>
-          <a:xfrm>
-            <a:off x="1463040" y="4892040"/>
-            <a:ext cx="4221328" cy="384048"/>
-          </a:xfrm>
-          <a:prstGeom prst="rect">
-            <a:avLst/>
-          </a:prstGeom>
-          <a:noFill/>
-          <a:ln/>
-        </p:spPr>
-        <p:txBody>
-          <a:bodyPr wrap="square" lIns="0" tIns="0" rIns="0" bIns="0" rtlCol="0" anchor="ctr"/>
-          <a:lstStyle/>
-          <a:p>
-            <a:pPr indent="0" marL="0">
-              <a:buNone/>
-            </a:pPr>
-            <a:r>
-              <a:rPr lang="en-US" sz="1600" dirty="0">
-                <a:solidFill>
-                  <a:srgbClr val="1B2A38"/>
-                </a:solidFill>
-                <a:latin typeface="Calibri" pitchFamily="34" charset="0"/>
-                <a:ea typeface="Calibri" pitchFamily="34" charset="-122"/>
-                <a:cs typeface="Calibri" pitchFamily="34" charset="-120"/>
-              </a:rPr>
-              <a:t>Generelle systemer for mange typer skip</a:t>
-            </a:r>
-            <a:endParaRPr lang="en-US" sz="1600" dirty="0"/>
-          </a:p>
-        </p:txBody>
-      </p:sp>
-      <p:sp>
-        <p:nvSpPr>
-          <p:cNvPr id="29" name="Ikon-sirkel"/>
-          <p:cNvSpPr/>
-          <p:nvPr/>
-        </p:nvSpPr>
-        <p:spPr>
-          <a:xfrm>
-            <a:off x="6598768" y="4892040"/>
-            <a:ext cx="384048" cy="384048"/>
-          </a:xfrm>
-          <a:prstGeom prst="ellipse">
-            <a:avLst/>
-          </a:prstGeom>
-          <a:solidFill>
-            <a:srgbClr val="0E7C86"/>
-          </a:solidFill>
-          <a:ln/>
-        </p:spPr>
-      </p:sp>
-      <p:pic>
-        <p:nvPicPr>
-          <p:cNvPr id="30" name="Ikon FaCheck" descr="preencoded.png">    </p:cNvPr>
-          <p:cNvPicPr>
-            <a:picLocks noChangeAspect="1"/>
-          </p:cNvPicPr>
-          <p:nvPr/>
-        </p:nvPicPr>
-        <p:blipFill>
-          <a:blip r:embed="rId8"/>
-          <a:stretch>
-            <a:fillRect/>
-          </a:stretch>
-        </p:blipFill>
-        <p:spPr>
-          <a:xfrm>
-            <a:off x="6690939" y="4984212"/>
-            <a:ext cx="199705" cy="199705"/>
-          </a:xfrm>
-          <a:prstGeom prst="rect">
-            <a:avLst/>
-          </a:prstGeom>
-        </p:spPr>
-      </p:pic>
-      <p:sp>
-        <p:nvSpPr>
-          <p:cNvPr id="31" name="Text 21"/>
-          <p:cNvSpPr txBox="1"/>
-          <p:nvPr/>
-        </p:nvSpPr>
-        <p:spPr>
-          <a:xfrm>
-            <a:off x="7147408" y="4892040"/>
-            <a:ext cx="3947008" cy="384048"/>
-          </a:xfrm>
-          <a:prstGeom prst="rect">
-            <a:avLst/>
-          </a:prstGeom>
-          <a:noFill/>
-          <a:ln/>
-        </p:spPr>
-        <p:txBody>
-          <a:bodyPr wrap="square" lIns="0" tIns="0" rIns="0" bIns="0" rtlCol="0" anchor="ctr"/>
-          <a:lstStyle/>
-          <a:p>
-            <a:pPr indent="0" marL="0">
-              <a:buNone/>
-            </a:pPr>
-            <a:r>
-              <a:rPr lang="en-US" sz="1600" b="1" dirty="0">
-                <a:solidFill>
-                  <a:srgbClr val="FFFFFF"/>
-                </a:solidFill>
-                <a:latin typeface="Calibri" pitchFamily="34" charset="0"/>
-                <a:ea typeface="Calibri" pitchFamily="34" charset="-122"/>
-                <a:cs typeface="Calibri" pitchFamily="34" charset="-120"/>
-              </a:rPr>
-              <a:t>Laget for fiskefartøy, av folk fra fiskeflåten</a:t>
-            </a:r>
-            <a:endParaRPr lang="en-US" sz="1600" dirty="0"/>
+              <a:t>Hendelser, øvelser og risikovurderinger med status.</a:t>
+            </a:r>
+            <a:endParaRPr lang="en-US" sz="1700" dirty="0"/>
           </a:p>
         </p:txBody>
       </p:sp>
@@ -10206,7 +10678,7 @@
                 <a:ea typeface="Calibri" pitchFamily="34" charset="-122"/>
                 <a:cs typeface="Calibri" pitchFamily="34" charset="-120"/>
               </a:rPr>
-              <a:t>SLIK BYTTER DERE</a:t>
+              <a:t>HVORFOR BYTTE?</a:t>
             </a:r>
             <a:endParaRPr lang="en-US" sz="1200" dirty="0"/>
           </a:p>
@@ -10247,7 +10719,7 @@
                 <a:ea typeface="Arial" pitchFamily="34" charset="-122"/>
                 <a:cs typeface="Arial" pitchFamily="34" charset="-120"/>
               </a:rPr>
-              <a:t>I drift på én til to uker – ett fartøy om gangen</a:t>
+              <a:t>Hva dere får med Nautech som dere ikke har i dag</a:t>
             </a:r>
             <a:endParaRPr lang="en-US" sz="3000" dirty="0"/>
           </a:p>
@@ -10255,474 +10727,14 @@
       </p:sp>
       <p:sp>
         <p:nvSpPr>
-          <p:cNvPr id="4" name="Shape 2"/>
+          <p:cNvPr id="4" name="Kort"/>
           <p:cNvSpPr/>
           <p:nvPr/>
         </p:nvSpPr>
         <p:spPr>
           <a:xfrm>
             <a:off x="548640" y="1828800"/>
-            <a:ext cx="566928" cy="566928"/>
-          </a:xfrm>
-          <a:prstGeom prst="ellipse">
-            <a:avLst/>
-          </a:prstGeom>
-          <a:solidFill>
-            <a:srgbClr val="0E7C86"/>
-          </a:solidFill>
-          <a:ln/>
-        </p:spPr>
-      </p:sp>
-      <p:sp>
-        <p:nvSpPr>
-          <p:cNvPr id="5" name="Text 3"/>
-          <p:cNvSpPr txBox="1"/>
-          <p:nvPr/>
-        </p:nvSpPr>
-        <p:spPr>
-          <a:xfrm>
-            <a:off x="548640" y="1828800"/>
-            <a:ext cx="566928" cy="566928"/>
-          </a:xfrm>
-          <a:prstGeom prst="rect">
-            <a:avLst/>
-          </a:prstGeom>
-          <a:noFill/>
-          <a:ln/>
-        </p:spPr>
-        <p:txBody>
-          <a:bodyPr wrap="square" lIns="0" tIns="0" rIns="0" bIns="0" rtlCol="0" anchor="ctr"/>
-          <a:lstStyle/>
-          <a:p>
-            <a:pPr algn="ctr" indent="0" marL="0">
-              <a:buNone/>
-            </a:pPr>
-            <a:r>
-              <a:rPr lang="en-US" sz="2000" b="1" dirty="0">
-                <a:solidFill>
-                  <a:srgbClr val="FFFFFF"/>
-                </a:solidFill>
-                <a:latin typeface="Arial" pitchFamily="34" charset="0"/>
-                <a:ea typeface="Arial" pitchFamily="34" charset="-122"/>
-                <a:cs typeface="Arial" pitchFamily="34" charset="-120"/>
-              </a:rPr>
-              <a:t>1</a:t>
-            </a:r>
-            <a:endParaRPr lang="en-US" sz="2000" dirty="0"/>
-          </a:p>
-        </p:txBody>
-      </p:sp>
-      <p:sp>
-        <p:nvSpPr>
-          <p:cNvPr id="6" name="Text 4"/>
-          <p:cNvSpPr txBox="1"/>
-          <p:nvPr/>
-        </p:nvSpPr>
-        <p:spPr>
-          <a:xfrm>
-            <a:off x="1371600" y="1783080"/>
-            <a:ext cx="5760720" cy="914400"/>
-          </a:xfrm>
-          <a:prstGeom prst="rect">
-            <a:avLst/>
-          </a:prstGeom>
-          <a:noFill/>
-          <a:ln/>
-        </p:spPr>
-        <p:txBody>
-          <a:bodyPr wrap="square" lIns="0" tIns="0" rIns="0" bIns="0" rtlCol="0" anchor="t"/>
-          <a:lstStyle/>
-          <a:p>
-            <a:pPr indent="0" marL="0">
-              <a:buNone/>
-            </a:pPr>
-            <a:r>
-              <a:rPr lang="en-US" sz="1700" b="1" dirty="0">
-                <a:solidFill>
-                  <a:srgbClr val="0B1F33"/>
-                </a:solidFill>
-                <a:latin typeface="Calibri" pitchFamily="34" charset="0"/>
-                <a:ea typeface="Calibri" pitchFamily="34" charset="-122"/>
-                <a:cs typeface="Calibri" pitchFamily="34" charset="-120"/>
-              </a:rPr>
-              <a:t>Kartlegging</a:t>
-            </a:r>
-            <a:endParaRPr lang="en-US" sz="1700" dirty="0"/>
-          </a:p>
-          <a:p>
-            <a:pPr indent="0" marL="0">
-              <a:buNone/>
-            </a:pPr>
-            <a:r>
-              <a:rPr lang="en-US" sz="1500" dirty="0">
-                <a:solidFill>
-                  <a:srgbClr val="1B2A38"/>
-                </a:solidFill>
-                <a:latin typeface="Calibri" pitchFamily="34" charset="0"/>
-                <a:ea typeface="Calibri" pitchFamily="34" charset="-122"/>
-                <a:cs typeface="Calibri" pitchFamily="34" charset="-120"/>
-              </a:rPr>
-              <a:t>Vi går gjennom dagens system, utstyrsliste og rutiner sammen med dere.</a:t>
-            </a:r>
-            <a:endParaRPr lang="en-US" sz="1700" dirty="0"/>
-          </a:p>
-        </p:txBody>
-      </p:sp>
-      <p:sp>
-        <p:nvSpPr>
-          <p:cNvPr id="7" name="Shape 5"/>
-          <p:cNvSpPr/>
-          <p:nvPr/>
-        </p:nvSpPr>
-        <p:spPr>
-          <a:xfrm>
-            <a:off x="548640" y="2816352"/>
-            <a:ext cx="566928" cy="566928"/>
-          </a:xfrm>
-          <a:prstGeom prst="ellipse">
-            <a:avLst/>
-          </a:prstGeom>
-          <a:solidFill>
-            <a:srgbClr val="0E7C86"/>
-          </a:solidFill>
-          <a:ln/>
-        </p:spPr>
-      </p:sp>
-      <p:sp>
-        <p:nvSpPr>
-          <p:cNvPr id="8" name="Text 6"/>
-          <p:cNvSpPr txBox="1"/>
-          <p:nvPr/>
-        </p:nvSpPr>
-        <p:spPr>
-          <a:xfrm>
-            <a:off x="548640" y="2816352"/>
-            <a:ext cx="566928" cy="566928"/>
-          </a:xfrm>
-          <a:prstGeom prst="rect">
-            <a:avLst/>
-          </a:prstGeom>
-          <a:noFill/>
-          <a:ln/>
-        </p:spPr>
-        <p:txBody>
-          <a:bodyPr wrap="square" lIns="0" tIns="0" rIns="0" bIns="0" rtlCol="0" anchor="ctr"/>
-          <a:lstStyle/>
-          <a:p>
-            <a:pPr algn="ctr" indent="0" marL="0">
-              <a:buNone/>
-            </a:pPr>
-            <a:r>
-              <a:rPr lang="en-US" sz="2000" b="1" dirty="0">
-                <a:solidFill>
-                  <a:srgbClr val="FFFFFF"/>
-                </a:solidFill>
-                <a:latin typeface="Arial" pitchFamily="34" charset="0"/>
-                <a:ea typeface="Arial" pitchFamily="34" charset="-122"/>
-                <a:cs typeface="Arial" pitchFamily="34" charset="-120"/>
-              </a:rPr>
-              <a:t>2</a:t>
-            </a:r>
-            <a:endParaRPr lang="en-US" sz="2000" dirty="0"/>
-          </a:p>
-        </p:txBody>
-      </p:sp>
-      <p:sp>
-        <p:nvSpPr>
-          <p:cNvPr id="9" name="Text 7"/>
-          <p:cNvSpPr txBox="1"/>
-          <p:nvPr/>
-        </p:nvSpPr>
-        <p:spPr>
-          <a:xfrm>
-            <a:off x="1371600" y="2770632"/>
-            <a:ext cx="5760720" cy="914400"/>
-          </a:xfrm>
-          <a:prstGeom prst="rect">
-            <a:avLst/>
-          </a:prstGeom>
-          <a:noFill/>
-          <a:ln/>
-        </p:spPr>
-        <p:txBody>
-          <a:bodyPr wrap="square" lIns="0" tIns="0" rIns="0" bIns="0" rtlCol="0" anchor="t"/>
-          <a:lstStyle/>
-          <a:p>
-            <a:pPr indent="0" marL="0">
-              <a:buNone/>
-            </a:pPr>
-            <a:r>
-              <a:rPr lang="en-US" sz="1700" b="1" dirty="0">
-                <a:solidFill>
-                  <a:srgbClr val="0B1F33"/>
-                </a:solidFill>
-                <a:latin typeface="Calibri" pitchFamily="34" charset="0"/>
-                <a:ea typeface="Calibri" pitchFamily="34" charset="-122"/>
-                <a:cs typeface="Calibri" pitchFamily="34" charset="-120"/>
-              </a:rPr>
-              <a:t>Overføring av data</a:t>
-            </a:r>
-            <a:endParaRPr lang="en-US" sz="1700" dirty="0"/>
-          </a:p>
-          <a:p>
-            <a:pPr indent="0" marL="0">
-              <a:buNone/>
-            </a:pPr>
-            <a:r>
-              <a:rPr lang="en-US" sz="1500" dirty="0">
-                <a:solidFill>
-                  <a:srgbClr val="1B2A38"/>
-                </a:solidFill>
-                <a:latin typeface="Calibri" pitchFamily="34" charset="0"/>
-                <a:ea typeface="Calibri" pitchFamily="34" charset="-122"/>
-                <a:cs typeface="Calibri" pitchFamily="34" charset="-120"/>
-              </a:rPr>
-              <a:t>Dere flytter dataene selv med våre importmaler, eller vi gjør det for dere mot et engangsgebyr.</a:t>
-            </a:r>
-            <a:endParaRPr lang="en-US" sz="1700" dirty="0"/>
-          </a:p>
-        </p:txBody>
-      </p:sp>
-      <p:sp>
-        <p:nvSpPr>
-          <p:cNvPr id="10" name="Shape 8"/>
-          <p:cNvSpPr/>
-          <p:nvPr/>
-        </p:nvSpPr>
-        <p:spPr>
-          <a:xfrm>
-            <a:off x="548640" y="3803904"/>
-            <a:ext cx="566928" cy="566928"/>
-          </a:xfrm>
-          <a:prstGeom prst="ellipse">
-            <a:avLst/>
-          </a:prstGeom>
-          <a:solidFill>
-            <a:srgbClr val="0E7C86"/>
-          </a:solidFill>
-          <a:ln/>
-        </p:spPr>
-      </p:sp>
-      <p:sp>
-        <p:nvSpPr>
-          <p:cNvPr id="11" name="Text 9"/>
-          <p:cNvSpPr txBox="1"/>
-          <p:nvPr/>
-        </p:nvSpPr>
-        <p:spPr>
-          <a:xfrm>
-            <a:off x="548640" y="3803904"/>
-            <a:ext cx="566928" cy="566928"/>
-          </a:xfrm>
-          <a:prstGeom prst="rect">
-            <a:avLst/>
-          </a:prstGeom>
-          <a:noFill/>
-          <a:ln/>
-        </p:spPr>
-        <p:txBody>
-          <a:bodyPr wrap="square" lIns="0" tIns="0" rIns="0" bIns="0" rtlCol="0" anchor="ctr"/>
-          <a:lstStyle/>
-          <a:p>
-            <a:pPr algn="ctr" indent="0" marL="0">
-              <a:buNone/>
-            </a:pPr>
-            <a:r>
-              <a:rPr lang="en-US" sz="2000" b="1" dirty="0">
-                <a:solidFill>
-                  <a:srgbClr val="FFFFFF"/>
-                </a:solidFill>
-                <a:latin typeface="Arial" pitchFamily="34" charset="0"/>
-                <a:ea typeface="Arial" pitchFamily="34" charset="-122"/>
-                <a:cs typeface="Arial" pitchFamily="34" charset="-120"/>
-              </a:rPr>
-              <a:t>3</a:t>
-            </a:r>
-            <a:endParaRPr lang="en-US" sz="2000" dirty="0"/>
-          </a:p>
-        </p:txBody>
-      </p:sp>
-      <p:sp>
-        <p:nvSpPr>
-          <p:cNvPr id="12" name="Text 10"/>
-          <p:cNvSpPr txBox="1"/>
-          <p:nvPr/>
-        </p:nvSpPr>
-        <p:spPr>
-          <a:xfrm>
-            <a:off x="1371600" y="3758184"/>
-            <a:ext cx="5760720" cy="914400"/>
-          </a:xfrm>
-          <a:prstGeom prst="rect">
-            <a:avLst/>
-          </a:prstGeom>
-          <a:noFill/>
-          <a:ln/>
-        </p:spPr>
-        <p:txBody>
-          <a:bodyPr wrap="square" lIns="0" tIns="0" rIns="0" bIns="0" rtlCol="0" anchor="t"/>
-          <a:lstStyle/>
-          <a:p>
-            <a:pPr indent="0" marL="0">
-              <a:buNone/>
-            </a:pPr>
-            <a:r>
-              <a:rPr lang="en-US" sz="1700" b="1" dirty="0">
-                <a:solidFill>
-                  <a:srgbClr val="0B1F33"/>
-                </a:solidFill>
-                <a:latin typeface="Calibri" pitchFamily="34" charset="0"/>
-                <a:ea typeface="Calibri" pitchFamily="34" charset="-122"/>
-                <a:cs typeface="Calibri" pitchFamily="34" charset="-120"/>
-              </a:rPr>
-              <a:t>Pilot på ett fartøy</a:t>
-            </a:r>
-            <a:endParaRPr lang="en-US" sz="1700" dirty="0"/>
-          </a:p>
-          <a:p>
-            <a:pPr indent="0" marL="0">
-              <a:buNone/>
-            </a:pPr>
-            <a:r>
-              <a:rPr lang="en-US" sz="1500" dirty="0">
-                <a:solidFill>
-                  <a:srgbClr val="1B2A38"/>
-                </a:solidFill>
-                <a:latin typeface="Calibri" pitchFamily="34" charset="0"/>
-                <a:ea typeface="Calibri" pitchFamily="34" charset="-122"/>
-                <a:cs typeface="Calibri" pitchFamily="34" charset="-120"/>
-              </a:rPr>
-              <a:t>Seks uker med mål dere har satt på forhånd. Dagens system kan gå parallelt.</a:t>
-            </a:r>
-            <a:endParaRPr lang="en-US" sz="1700" dirty="0"/>
-          </a:p>
-        </p:txBody>
-      </p:sp>
-      <p:sp>
-        <p:nvSpPr>
-          <p:cNvPr id="13" name="Shape 11"/>
-          <p:cNvSpPr/>
-          <p:nvPr/>
-        </p:nvSpPr>
-        <p:spPr>
-          <a:xfrm>
-            <a:off x="548640" y="4791456"/>
-            <a:ext cx="566928" cy="566928"/>
-          </a:xfrm>
-          <a:prstGeom prst="ellipse">
-            <a:avLst/>
-          </a:prstGeom>
-          <a:solidFill>
-            <a:srgbClr val="0E7C86"/>
-          </a:solidFill>
-          <a:ln/>
-        </p:spPr>
-      </p:sp>
-      <p:sp>
-        <p:nvSpPr>
-          <p:cNvPr id="14" name="Text 12"/>
-          <p:cNvSpPr txBox="1"/>
-          <p:nvPr/>
-        </p:nvSpPr>
-        <p:spPr>
-          <a:xfrm>
-            <a:off x="548640" y="4791456"/>
-            <a:ext cx="566928" cy="566928"/>
-          </a:xfrm>
-          <a:prstGeom prst="rect">
-            <a:avLst/>
-          </a:prstGeom>
-          <a:noFill/>
-          <a:ln/>
-        </p:spPr>
-        <p:txBody>
-          <a:bodyPr wrap="square" lIns="0" tIns="0" rIns="0" bIns="0" rtlCol="0" anchor="ctr"/>
-          <a:lstStyle/>
-          <a:p>
-            <a:pPr algn="ctr" indent="0" marL="0">
-              <a:buNone/>
-            </a:pPr>
-            <a:r>
-              <a:rPr lang="en-US" sz="2000" b="1" dirty="0">
-                <a:solidFill>
-                  <a:srgbClr val="FFFFFF"/>
-                </a:solidFill>
-                <a:latin typeface="Arial" pitchFamily="34" charset="0"/>
-                <a:ea typeface="Arial" pitchFamily="34" charset="-122"/>
-                <a:cs typeface="Arial" pitchFamily="34" charset="-120"/>
-              </a:rPr>
-              <a:t>4</a:t>
-            </a:r>
-            <a:endParaRPr lang="en-US" sz="2000" dirty="0"/>
-          </a:p>
-        </p:txBody>
-      </p:sp>
-      <p:sp>
-        <p:nvSpPr>
-          <p:cNvPr id="15" name="Text 13"/>
-          <p:cNvSpPr txBox="1"/>
-          <p:nvPr/>
-        </p:nvSpPr>
-        <p:spPr>
-          <a:xfrm>
-            <a:off x="1371600" y="4745736"/>
-            <a:ext cx="5760720" cy="914400"/>
-          </a:xfrm>
-          <a:prstGeom prst="rect">
-            <a:avLst/>
-          </a:prstGeom>
-          <a:noFill/>
-          <a:ln/>
-        </p:spPr>
-        <p:txBody>
-          <a:bodyPr wrap="square" lIns="0" tIns="0" rIns="0" bIns="0" rtlCol="0" anchor="t"/>
-          <a:lstStyle/>
-          <a:p>
-            <a:pPr indent="0" marL="0">
-              <a:buNone/>
-            </a:pPr>
-            <a:r>
-              <a:rPr lang="en-US" sz="1700" b="1" dirty="0">
-                <a:solidFill>
-                  <a:srgbClr val="0B1F33"/>
-                </a:solidFill>
-                <a:latin typeface="Calibri" pitchFamily="34" charset="0"/>
-                <a:ea typeface="Calibri" pitchFamily="34" charset="-122"/>
-                <a:cs typeface="Calibri" pitchFamily="34" charset="-120"/>
-              </a:rPr>
-              <a:t>Resten av flåten</a:t>
-            </a:r>
-            <a:endParaRPr lang="en-US" sz="1700" dirty="0"/>
-          </a:p>
-          <a:p>
-            <a:pPr indent="0" marL="0">
-              <a:buNone/>
-            </a:pPr>
-            <a:r>
-              <a:rPr lang="en-US" sz="1500" dirty="0">
-                <a:solidFill>
-                  <a:srgbClr val="1B2A38"/>
-                </a:solidFill>
-                <a:latin typeface="Calibri" pitchFamily="34" charset="0"/>
-                <a:ea typeface="Calibri" pitchFamily="34" charset="-122"/>
-                <a:cs typeface="Calibri" pitchFamily="34" charset="-120"/>
-              </a:rPr>
-              <a:t>Dere bestemmer om og når flere fartøy skal over.</a:t>
-            </a:r>
-            <a:endParaRPr lang="en-US" sz="1700" dirty="0"/>
-          </a:p>
-        </p:txBody>
-      </p:sp>
-      <p:sp>
-        <p:nvSpPr>
-          <p:cNvPr id="16" name="Kort"/>
-          <p:cNvSpPr/>
-          <p:nvPr/>
-        </p:nvSpPr>
-        <p:spPr>
-          <a:xfrm>
-            <a:off x="7543800" y="1828800"/>
-            <a:ext cx="4099255" cy="3931920"/>
+            <a:ext cx="5410048" cy="3931920"/>
           </a:xfrm>
           <a:prstGeom prst="roundRect">
             <a:avLst>
@@ -10730,6 +10742,28 @@
             </a:avLst>
           </a:prstGeom>
           <a:solidFill>
+            <a:srgbClr val="EEF3F6"/>
+          </a:solidFill>
+          <a:ln/>
+        </p:spPr>
+      </p:sp>
+      <p:sp>
+        <p:nvSpPr>
+          <p:cNvPr id="5" name="Kort"/>
+          <p:cNvSpPr/>
+          <p:nvPr/>
+        </p:nvSpPr>
+        <p:spPr>
+          <a:xfrm>
+            <a:off x="6233008" y="1828800"/>
+            <a:ext cx="5410048" cy="3931920"/>
+          </a:xfrm>
+          <a:prstGeom prst="roundRect">
+            <a:avLst>
+              <a:gd name="adj" fmla="val 2791"/>
+            </a:avLst>
+          </a:prstGeom>
+          <a:solidFill>
             <a:srgbClr val="0B1F33"/>
           </a:solidFill>
           <a:ln/>
@@ -10737,27 +10771,105 @@
       </p:sp>
       <p:sp>
         <p:nvSpPr>
-          <p:cNvPr id="17" name="Ikon-sirkel"/>
+          <p:cNvPr id="6" name="Text 4"/>
+          <p:cNvSpPr txBox="1"/>
+          <p:nvPr/>
+        </p:nvSpPr>
+        <p:spPr>
+          <a:xfrm>
+            <a:off x="914400" y="2011680"/>
+            <a:ext cx="4678528" cy="365760"/>
+          </a:xfrm>
+          <a:prstGeom prst="rect">
+            <a:avLst/>
+          </a:prstGeom>
+          <a:noFill/>
+          <a:ln/>
+        </p:spPr>
+        <p:txBody>
+          <a:bodyPr wrap="square" lIns="0" tIns="0" rIns="0" bIns="0" rtlCol="0" anchor="t"/>
+          <a:lstStyle/>
+          <a:p>
+            <a:pPr indent="0" marL="0">
+              <a:buNone/>
+            </a:pPr>
+            <a:r>
+              <a:rPr lang="en-US" sz="1300" b="1" spc="200" kern="0" dirty="0">
+                <a:solidFill>
+                  <a:srgbClr val="5B6B7A"/>
+                </a:solidFill>
+                <a:latin typeface="Calibri" pitchFamily="34" charset="0"/>
+                <a:ea typeface="Calibri" pitchFamily="34" charset="-122"/>
+                <a:cs typeface="Calibri" pitchFamily="34" charset="-120"/>
+              </a:rPr>
+              <a:t>TYPISK I DAG</a:t>
+            </a:r>
+            <a:endParaRPr lang="en-US" sz="1300" dirty="0"/>
+          </a:p>
+        </p:txBody>
+      </p:sp>
+      <p:sp>
+        <p:nvSpPr>
+          <p:cNvPr id="7" name="Text 5"/>
+          <p:cNvSpPr txBox="1"/>
+          <p:nvPr/>
+        </p:nvSpPr>
+        <p:spPr>
+          <a:xfrm>
+            <a:off x="6598768" y="2011680"/>
+            <a:ext cx="4678528" cy="365760"/>
+          </a:xfrm>
+          <a:prstGeom prst="rect">
+            <a:avLst/>
+          </a:prstGeom>
+          <a:noFill/>
+          <a:ln/>
+        </p:spPr>
+        <p:txBody>
+          <a:bodyPr wrap="square" lIns="0" tIns="0" rIns="0" bIns="0" rtlCol="0" anchor="t"/>
+          <a:lstStyle/>
+          <a:p>
+            <a:pPr indent="0" marL="0">
+              <a:buNone/>
+            </a:pPr>
+            <a:r>
+              <a:rPr lang="en-US" sz="1300" b="1" spc="200" kern="0" dirty="0">
+                <a:solidFill>
+                  <a:srgbClr val="7FD1D6"/>
+                </a:solidFill>
+                <a:latin typeface="Calibri" pitchFamily="34" charset="0"/>
+                <a:ea typeface="Calibri" pitchFamily="34" charset="-122"/>
+                <a:cs typeface="Calibri" pitchFamily="34" charset="-120"/>
+              </a:rPr>
+              <a:t>MED NAUTECH</a:t>
+            </a:r>
+            <a:endParaRPr lang="en-US" sz="1300" dirty="0"/>
+          </a:p>
+        </p:txBody>
+      </p:sp>
+      <p:sp>
+        <p:nvSpPr>
+          <p:cNvPr id="8" name="Ikon-sirkel"/>
           <p:cNvSpPr/>
           <p:nvPr/>
         </p:nvSpPr>
         <p:spPr>
           <a:xfrm>
-            <a:off x="7863840" y="2103120"/>
-            <a:ext cx="640080" cy="640080"/>
+            <a:off x="914400" y="2560320"/>
+            <a:ext cx="384048" cy="384048"/>
           </a:xfrm>
           <a:prstGeom prst="ellipse">
             <a:avLst/>
           </a:prstGeom>
           <a:solidFill>
-            <a:srgbClr val="0E7C86"/>
+            <a:srgbClr val="DDE7EE"/>
           </a:solidFill>
           <a:ln/>
         </p:spPr>
       </p:sp>
       <p:pic>
         <p:nvPicPr>
-          <p:cNvPr id="18" name="Ikon FaLock" descr="preencoded.png">    </p:cNvPr>
+          <p:cNvPr id="9" name="Ikon FaXmark" descr="preencoded.png">    </p:cNvPr>
           <p:cNvPicPr>
             <a:picLocks noChangeAspect="1"/>
           </p:cNvPicPr>
@@ -10771,8 +10883,8 @@
         </p:blipFill>
         <p:spPr>
           <a:xfrm>
-            <a:off x="8017459" y="2256739"/>
-            <a:ext cx="332842" cy="332842"/>
+            <a:off x="1006572" y="2652492"/>
+            <a:ext cx="199705" cy="199705"/>
           </a:xfrm>
           <a:prstGeom prst="rect">
             <a:avLst/>
@@ -10781,14 +10893,14 @@
       </p:pic>
       <p:sp>
         <p:nvSpPr>
-          <p:cNvPr id="19" name="Text 16"/>
+          <p:cNvPr id="10" name="Text 7"/>
           <p:cNvSpPr txBox="1"/>
           <p:nvPr/>
         </p:nvSpPr>
         <p:spPr>
           <a:xfrm>
-            <a:off x="8686800" y="2103120"/>
-            <a:ext cx="2727655" cy="640080"/>
+            <a:off x="1463040" y="2560320"/>
+            <a:ext cx="4221328" cy="384048"/>
           </a:xfrm>
           <a:prstGeom prst="rect">
             <a:avLst/>
@@ -10804,7 +10916,90 @@
               <a:buNone/>
             </a:pPr>
             <a:r>
-              <a:rPr lang="en-US" sz="2000" b="1" dirty="0">
+              <a:rPr lang="en-US" sz="1600" dirty="0">
+                <a:solidFill>
+                  <a:srgbClr val="1B2A38"/>
+                </a:solidFill>
+                <a:latin typeface="Calibri" pitchFamily="34" charset="0"/>
+                <a:ea typeface="Calibri" pitchFamily="34" charset="-122"/>
+                <a:cs typeface="Calibri" pitchFamily="34" charset="-120"/>
+              </a:rPr>
+              <a:t>Flere systemer og regneark</a:t>
+            </a:r>
+            <a:endParaRPr lang="en-US" sz="1600" dirty="0"/>
+          </a:p>
+        </p:txBody>
+      </p:sp>
+      <p:sp>
+        <p:nvSpPr>
+          <p:cNvPr id="11" name="Ikon-sirkel"/>
+          <p:cNvSpPr/>
+          <p:nvPr/>
+        </p:nvSpPr>
+        <p:spPr>
+          <a:xfrm>
+            <a:off x="6598768" y="2560320"/>
+            <a:ext cx="384048" cy="384048"/>
+          </a:xfrm>
+          <a:prstGeom prst="ellipse">
+            <a:avLst/>
+          </a:prstGeom>
+          <a:solidFill>
+            <a:srgbClr val="0E7C86"/>
+          </a:solidFill>
+          <a:ln/>
+        </p:spPr>
+      </p:sp>
+      <p:pic>
+        <p:nvPicPr>
+          <p:cNvPr id="12" name="Ikon FaCheck" descr="preencoded.png">    </p:cNvPr>
+          <p:cNvPicPr>
+            <a:picLocks noChangeAspect="1"/>
+          </p:cNvPicPr>
+          <p:nvPr/>
+        </p:nvPicPr>
+        <p:blipFill>
+          <a:blip r:embed="rId2"/>
+          <a:stretch>
+            <a:fillRect/>
+          </a:stretch>
+        </p:blipFill>
+        <p:spPr>
+          <a:xfrm>
+            <a:off x="6690939" y="2652492"/>
+            <a:ext cx="199705" cy="199705"/>
+          </a:xfrm>
+          <a:prstGeom prst="rect">
+            <a:avLst/>
+          </a:prstGeom>
+        </p:spPr>
+      </p:pic>
+      <p:sp>
+        <p:nvSpPr>
+          <p:cNvPr id="13" name="Text 9"/>
+          <p:cNvSpPr txBox="1"/>
+          <p:nvPr/>
+        </p:nvSpPr>
+        <p:spPr>
+          <a:xfrm>
+            <a:off x="7147408" y="2560320"/>
+            <a:ext cx="3947008" cy="384048"/>
+          </a:xfrm>
+          <a:prstGeom prst="rect">
+            <a:avLst/>
+          </a:prstGeom>
+          <a:noFill/>
+          <a:ln/>
+        </p:spPr>
+        <p:txBody>
+          <a:bodyPr wrap="square" lIns="0" tIns="0" rIns="0" bIns="0" rtlCol="0" anchor="ctr"/>
+          <a:lstStyle/>
+          <a:p>
+            <a:pPr indent="0" marL="0">
+              <a:buNone/>
+            </a:pPr>
+            <a:r>
+              <a:rPr lang="en-US" sz="1600" b="1" dirty="0">
                 <a:solidFill>
                   <a:srgbClr val="FFFFFF"/>
                 </a:solidFill>
@@ -10812,22 +11007,66 @@
                 <a:ea typeface="Calibri" pitchFamily="34" charset="-122"/>
                 <a:cs typeface="Calibri" pitchFamily="34" charset="-120"/>
               </a:rPr>
-              <a:t>Dataene deres</a:t>
-            </a:r>
-            <a:endParaRPr lang="en-US" sz="2000" dirty="0"/>
-          </a:p>
-        </p:txBody>
-      </p:sp>
-      <p:sp>
-        <p:nvSpPr>
-          <p:cNvPr id="20" name="Text 17"/>
+              <a:t>Ett system for hele driften</a:t>
+            </a:r>
+            <a:endParaRPr lang="en-US" sz="1600" dirty="0"/>
+          </a:p>
+        </p:txBody>
+      </p:sp>
+      <p:sp>
+        <p:nvSpPr>
+          <p:cNvPr id="14" name="Ikon-sirkel"/>
+          <p:cNvSpPr/>
+          <p:nvPr/>
+        </p:nvSpPr>
+        <p:spPr>
+          <a:xfrm>
+            <a:off x="914400" y="3337560"/>
+            <a:ext cx="384048" cy="384048"/>
+          </a:xfrm>
+          <a:prstGeom prst="ellipse">
+            <a:avLst/>
+          </a:prstGeom>
+          <a:solidFill>
+            <a:srgbClr val="DDE7EE"/>
+          </a:solidFill>
+          <a:ln/>
+        </p:spPr>
+      </p:sp>
+      <p:pic>
+        <p:nvPicPr>
+          <p:cNvPr id="15" name="Ikon FaXmark" descr="preencoded.png">    </p:cNvPr>
+          <p:cNvPicPr>
+            <a:picLocks noChangeAspect="1"/>
+          </p:cNvPicPr>
+          <p:nvPr/>
+        </p:nvPicPr>
+        <p:blipFill>
+          <a:blip r:embed="rId3"/>
+          <a:stretch>
+            <a:fillRect/>
+          </a:stretch>
+        </p:blipFill>
+        <p:spPr>
+          <a:xfrm>
+            <a:off x="1006572" y="3429732"/>
+            <a:ext cx="199705" cy="199705"/>
+          </a:xfrm>
+          <a:prstGeom prst="rect">
+            <a:avLst/>
+          </a:prstGeom>
+        </p:spPr>
+      </p:pic>
+      <p:sp>
+        <p:nvSpPr>
+          <p:cNvPr id="16" name="Text 11"/>
           <p:cNvSpPr txBox="1"/>
           <p:nvPr/>
         </p:nvSpPr>
         <p:spPr>
           <a:xfrm>
-            <a:off x="7863840" y="3017520"/>
-            <a:ext cx="3459175" cy="2560320"/>
+            <a:off x="1463040" y="3337560"/>
+            <a:ext cx="4221328" cy="384048"/>
           </a:xfrm>
           <a:prstGeom prst="rect">
             <a:avLst/>
@@ -10836,91 +11075,439 @@
           <a:ln/>
         </p:spPr>
         <p:txBody>
-          <a:bodyPr wrap="square" lIns="0" tIns="0" rIns="0" bIns="0" rtlCol="0" anchor="t"/>
-          <a:lstStyle/>
-          <a:p>
-            <a:pPr marL="342900" indent="-342900">
-              <a:spcAft>
-                <a:spcPts val="800"/>
-              </a:spcAft>
-              <a:buSzPct val="100000"/>
-              <a:buChar char="•"/>
-            </a:pPr>
-            <a:r>
-              <a:rPr lang="en-US" sz="1500" dirty="0">
-                <a:solidFill>
-                  <a:srgbClr val="DCE6EE"/>
-                </a:solidFill>
-                <a:latin typeface="Calibri" pitchFamily="34" charset="0"/>
-                <a:ea typeface="Calibri" pitchFamily="34" charset="-122"/>
-                <a:cs typeface="Calibri" pitchFamily="34" charset="-120"/>
-              </a:rPr>
-              <a:t>Lagres på server i Norge</a:t>
-            </a:r>
-            <a:endParaRPr lang="en-US" sz="1500" dirty="0"/>
-          </a:p>
-          <a:p>
-            <a:pPr marL="342900" indent="-342900">
-              <a:spcAft>
-                <a:spcPts val="800"/>
-              </a:spcAft>
-              <a:buSzPct val="100000"/>
-              <a:buChar char="•"/>
-            </a:pPr>
-            <a:r>
-              <a:rPr lang="en-US" sz="1500" dirty="0">
-                <a:solidFill>
-                  <a:srgbClr val="DCE6EE"/>
-                </a:solidFill>
-                <a:latin typeface="Calibri" pitchFamily="34" charset="0"/>
-                <a:ea typeface="Calibri" pitchFamily="34" charset="-122"/>
-                <a:cs typeface="Calibri" pitchFamily="34" charset="-120"/>
-              </a:rPr>
-              <a:t>Brukes aldri til å trene KI-modeller</a:t>
-            </a:r>
-            <a:endParaRPr lang="en-US" sz="1500" dirty="0"/>
-          </a:p>
-          <a:p>
-            <a:pPr marL="342900" indent="-342900">
-              <a:spcAft>
-                <a:spcPts val="800"/>
-              </a:spcAft>
-              <a:buSzPct val="100000"/>
-              <a:buChar char="•"/>
-            </a:pPr>
-            <a:r>
-              <a:rPr lang="en-US" sz="1500" dirty="0">
-                <a:solidFill>
-                  <a:srgbClr val="DCE6EE"/>
-                </a:solidFill>
-                <a:latin typeface="Calibri" pitchFamily="34" charset="0"/>
-                <a:ea typeface="Calibri" pitchFamily="34" charset="-122"/>
-                <a:cs typeface="Calibri" pitchFamily="34" charset="-120"/>
-              </a:rPr>
-              <a:t>Dere eier dataene</a:t>
-            </a:r>
-            <a:endParaRPr lang="en-US" sz="1500" dirty="0"/>
-          </a:p>
-          <a:p>
-            <a:pPr marL="342900" indent="-342900">
-              <a:spcAft>
-                <a:spcPts val="800"/>
-              </a:spcAft>
-              <a:buSzPct val="100000"/>
-              <a:buChar char="•"/>
-            </a:pPr>
-            <a:r>
-              <a:rPr lang="en-US" sz="1500" dirty="0">
-                <a:solidFill>
-                  <a:srgbClr val="DCE6EE"/>
-                </a:solidFill>
-                <a:latin typeface="Calibri" pitchFamily="34" charset="0"/>
-                <a:ea typeface="Calibri" pitchFamily="34" charset="-122"/>
-                <a:cs typeface="Calibri" pitchFamily="34" charset="-120"/>
-              </a:rPr>
-              <a:t>Kan eksporteres når som helst</a:t>
-            </a:r>
-            <a:endParaRPr lang="en-US" sz="1500" dirty="0"/>
+          <a:bodyPr wrap="square" lIns="0" tIns="0" rIns="0" bIns="0" rtlCol="0" anchor="ctr"/>
+          <a:lstStyle/>
+          <a:p>
+            <a:pPr indent="0" marL="0">
+              <a:buNone/>
+            </a:pPr>
+            <a:r>
+              <a:rPr lang="en-US" sz="1600" dirty="0">
+                <a:solidFill>
+                  <a:srgbClr val="1B2A38"/>
+                </a:solidFill>
+                <a:latin typeface="Calibri" pitchFamily="34" charset="0"/>
+                <a:ea typeface="Calibri" pitchFamily="34" charset="-122"/>
+                <a:cs typeface="Calibri" pitchFamily="34" charset="-120"/>
+              </a:rPr>
+              <a:t>Leting i historikk, e-post og permer</a:t>
+            </a:r>
+            <a:endParaRPr lang="en-US" sz="1600" dirty="0"/>
+          </a:p>
+        </p:txBody>
+      </p:sp>
+      <p:sp>
+        <p:nvSpPr>
+          <p:cNvPr id="17" name="Ikon-sirkel"/>
+          <p:cNvSpPr/>
+          <p:nvPr/>
+        </p:nvSpPr>
+        <p:spPr>
+          <a:xfrm>
+            <a:off x="6598768" y="3337560"/>
+            <a:ext cx="384048" cy="384048"/>
+          </a:xfrm>
+          <a:prstGeom prst="ellipse">
+            <a:avLst/>
+          </a:prstGeom>
+          <a:solidFill>
+            <a:srgbClr val="0E7C86"/>
+          </a:solidFill>
+          <a:ln/>
+        </p:spPr>
+      </p:sp>
+      <p:pic>
+        <p:nvPicPr>
+          <p:cNvPr id="18" name="Ikon FaCheck" descr="preencoded.png">    </p:cNvPr>
+          <p:cNvPicPr>
+            <a:picLocks noChangeAspect="1"/>
+          </p:cNvPicPr>
+          <p:nvPr/>
+        </p:nvPicPr>
+        <p:blipFill>
+          <a:blip r:embed="rId4"/>
+          <a:stretch>
+            <a:fillRect/>
+          </a:stretch>
+        </p:blipFill>
+        <p:spPr>
+          <a:xfrm>
+            <a:off x="6690939" y="3429732"/>
+            <a:ext cx="199705" cy="199705"/>
+          </a:xfrm>
+          <a:prstGeom prst="rect">
+            <a:avLst/>
+          </a:prstGeom>
+        </p:spPr>
+      </p:pic>
+      <p:sp>
+        <p:nvSpPr>
+          <p:cNvPr id="19" name="Text 13"/>
+          <p:cNvSpPr txBox="1"/>
+          <p:nvPr/>
+        </p:nvSpPr>
+        <p:spPr>
+          <a:xfrm>
+            <a:off x="7147408" y="3337560"/>
+            <a:ext cx="3947008" cy="384048"/>
+          </a:xfrm>
+          <a:prstGeom prst="rect">
+            <a:avLst/>
+          </a:prstGeom>
+          <a:noFill/>
+          <a:ln/>
+        </p:spPr>
+        <p:txBody>
+          <a:bodyPr wrap="square" lIns="0" tIns="0" rIns="0" bIns="0" rtlCol="0" anchor="ctr"/>
+          <a:lstStyle/>
+          <a:p>
+            <a:pPr indent="0" marL="0">
+              <a:buNone/>
+            </a:pPr>
+            <a:r>
+              <a:rPr lang="en-US" sz="1600" b="1" dirty="0">
+                <a:solidFill>
+                  <a:srgbClr val="FFFFFF"/>
+                </a:solidFill>
+                <a:latin typeface="Calibri" pitchFamily="34" charset="0"/>
+                <a:ea typeface="Calibri" pitchFamily="34" charset="-122"/>
+                <a:cs typeface="Calibri" pitchFamily="34" charset="-120"/>
+              </a:rPr>
+              <a:t>Spør og få svar med kilde</a:t>
+            </a:r>
+            <a:endParaRPr lang="en-US" sz="1600" dirty="0"/>
+          </a:p>
+        </p:txBody>
+      </p:sp>
+      <p:sp>
+        <p:nvSpPr>
+          <p:cNvPr id="20" name="Ikon-sirkel"/>
+          <p:cNvSpPr/>
+          <p:nvPr/>
+        </p:nvSpPr>
+        <p:spPr>
+          <a:xfrm>
+            <a:off x="914400" y="4114800"/>
+            <a:ext cx="384048" cy="384048"/>
+          </a:xfrm>
+          <a:prstGeom prst="ellipse">
+            <a:avLst/>
+          </a:prstGeom>
+          <a:solidFill>
+            <a:srgbClr val="DDE7EE"/>
+          </a:solidFill>
+          <a:ln/>
+        </p:spPr>
+      </p:sp>
+      <p:pic>
+        <p:nvPicPr>
+          <p:cNvPr id="21" name="Ikon FaXmark" descr="preencoded.png">    </p:cNvPr>
+          <p:cNvPicPr>
+            <a:picLocks noChangeAspect="1"/>
+          </p:cNvPicPr>
+          <p:nvPr/>
+        </p:nvPicPr>
+        <p:blipFill>
+          <a:blip r:embed="rId5"/>
+          <a:stretch>
+            <a:fillRect/>
+          </a:stretch>
+        </p:blipFill>
+        <p:spPr>
+          <a:xfrm>
+            <a:off x="1006572" y="4206972"/>
+            <a:ext cx="199705" cy="199705"/>
+          </a:xfrm>
+          <a:prstGeom prst="rect">
+            <a:avLst/>
+          </a:prstGeom>
+        </p:spPr>
+      </p:pic>
+      <p:sp>
+        <p:nvSpPr>
+          <p:cNvPr id="22" name="Text 15"/>
+          <p:cNvSpPr txBox="1"/>
+          <p:nvPr/>
+        </p:nvSpPr>
+        <p:spPr>
+          <a:xfrm>
+            <a:off x="1463040" y="4114800"/>
+            <a:ext cx="4221328" cy="384048"/>
+          </a:xfrm>
+          <a:prstGeom prst="rect">
+            <a:avLst/>
+          </a:prstGeom>
+          <a:noFill/>
+          <a:ln/>
+        </p:spPr>
+        <p:txBody>
+          <a:bodyPr wrap="square" lIns="0" tIns="0" rIns="0" bIns="0" rtlCol="0" anchor="ctr"/>
+          <a:lstStyle/>
+          <a:p>
+            <a:pPr indent="0" marL="0">
+              <a:buNone/>
+            </a:pPr>
+            <a:r>
+              <a:rPr lang="en-US" sz="1600" dirty="0">
+                <a:solidFill>
+                  <a:srgbClr val="1B2A38"/>
+                </a:solidFill>
+                <a:latin typeface="Calibri" pitchFamily="34" charset="0"/>
+                <a:ea typeface="Calibri" pitchFamily="34" charset="-122"/>
+                <a:cs typeface="Calibri" pitchFamily="34" charset="-120"/>
+              </a:rPr>
+              <a:t>Status kommer frem på telefon og e-post</a:t>
+            </a:r>
+            <a:endParaRPr lang="en-US" sz="1600" dirty="0"/>
+          </a:p>
+        </p:txBody>
+      </p:sp>
+      <p:sp>
+        <p:nvSpPr>
+          <p:cNvPr id="23" name="Ikon-sirkel"/>
+          <p:cNvSpPr/>
+          <p:nvPr/>
+        </p:nvSpPr>
+        <p:spPr>
+          <a:xfrm>
+            <a:off x="6598768" y="4114800"/>
+            <a:ext cx="384048" cy="384048"/>
+          </a:xfrm>
+          <a:prstGeom prst="ellipse">
+            <a:avLst/>
+          </a:prstGeom>
+          <a:solidFill>
+            <a:srgbClr val="0E7C86"/>
+          </a:solidFill>
+          <a:ln/>
+        </p:spPr>
+      </p:sp>
+      <p:pic>
+        <p:nvPicPr>
+          <p:cNvPr id="24" name="Ikon FaCheck" descr="preencoded.png">    </p:cNvPr>
+          <p:cNvPicPr>
+            <a:picLocks noChangeAspect="1"/>
+          </p:cNvPicPr>
+          <p:nvPr/>
+        </p:nvPicPr>
+        <p:blipFill>
+          <a:blip r:embed="rId6"/>
+          <a:stretch>
+            <a:fillRect/>
+          </a:stretch>
+        </p:blipFill>
+        <p:spPr>
+          <a:xfrm>
+            <a:off x="6690939" y="4206972"/>
+            <a:ext cx="199705" cy="199705"/>
+          </a:xfrm>
+          <a:prstGeom prst="rect">
+            <a:avLst/>
+          </a:prstGeom>
+        </p:spPr>
+      </p:pic>
+      <p:sp>
+        <p:nvSpPr>
+          <p:cNvPr id="25" name="Text 17"/>
+          <p:cNvSpPr txBox="1"/>
+          <p:nvPr/>
+        </p:nvSpPr>
+        <p:spPr>
+          <a:xfrm>
+            <a:off x="7147408" y="4114800"/>
+            <a:ext cx="3947008" cy="384048"/>
+          </a:xfrm>
+          <a:prstGeom prst="rect">
+            <a:avLst/>
+          </a:prstGeom>
+          <a:noFill/>
+          <a:ln/>
+        </p:spPr>
+        <p:txBody>
+          <a:bodyPr wrap="square" lIns="0" tIns="0" rIns="0" bIns="0" rtlCol="0" anchor="ctr"/>
+          <a:lstStyle/>
+          <a:p>
+            <a:pPr indent="0" marL="0">
+              <a:buNone/>
+            </a:pPr>
+            <a:r>
+              <a:rPr lang="en-US" sz="1600" b="1" dirty="0">
+                <a:solidFill>
+                  <a:srgbClr val="FFFFFF"/>
+                </a:solidFill>
+                <a:latin typeface="Calibri" pitchFamily="34" charset="0"/>
+                <a:ea typeface="Calibri" pitchFamily="34" charset="-122"/>
+                <a:cs typeface="Calibri" pitchFamily="34" charset="-120"/>
+              </a:rPr>
+              <a:t>Samme oversikt om bord og på land</a:t>
+            </a:r>
+            <a:endParaRPr lang="en-US" sz="1600" dirty="0"/>
+          </a:p>
+        </p:txBody>
+      </p:sp>
+      <p:sp>
+        <p:nvSpPr>
+          <p:cNvPr id="26" name="Ikon-sirkel"/>
+          <p:cNvSpPr/>
+          <p:nvPr/>
+        </p:nvSpPr>
+        <p:spPr>
+          <a:xfrm>
+            <a:off x="914400" y="4892040"/>
+            <a:ext cx="384048" cy="384048"/>
+          </a:xfrm>
+          <a:prstGeom prst="ellipse">
+            <a:avLst/>
+          </a:prstGeom>
+          <a:solidFill>
+            <a:srgbClr val="DDE7EE"/>
+          </a:solidFill>
+          <a:ln/>
+        </p:spPr>
+      </p:sp>
+      <p:pic>
+        <p:nvPicPr>
+          <p:cNvPr id="27" name="Ikon FaXmark" descr="preencoded.png">    </p:cNvPr>
+          <p:cNvPicPr>
+            <a:picLocks noChangeAspect="1"/>
+          </p:cNvPicPr>
+          <p:nvPr/>
+        </p:nvPicPr>
+        <p:blipFill>
+          <a:blip r:embed="rId7"/>
+          <a:stretch>
+            <a:fillRect/>
+          </a:stretch>
+        </p:blipFill>
+        <p:spPr>
+          <a:xfrm>
+            <a:off x="1006572" y="4984212"/>
+            <a:ext cx="199705" cy="199705"/>
+          </a:xfrm>
+          <a:prstGeom prst="rect">
+            <a:avLst/>
+          </a:prstGeom>
+        </p:spPr>
+      </p:pic>
+      <p:sp>
+        <p:nvSpPr>
+          <p:cNvPr id="28" name="Text 19"/>
+          <p:cNvSpPr txBox="1"/>
+          <p:nvPr/>
+        </p:nvSpPr>
+        <p:spPr>
+          <a:xfrm>
+            <a:off x="1463040" y="4892040"/>
+            <a:ext cx="4221328" cy="384048"/>
+          </a:xfrm>
+          <a:prstGeom prst="rect">
+            <a:avLst/>
+          </a:prstGeom>
+          <a:noFill/>
+          <a:ln/>
+        </p:spPr>
+        <p:txBody>
+          <a:bodyPr wrap="square" lIns="0" tIns="0" rIns="0" bIns="0" rtlCol="0" anchor="ctr"/>
+          <a:lstStyle/>
+          <a:p>
+            <a:pPr indent="0" marL="0">
+              <a:buNone/>
+            </a:pPr>
+            <a:r>
+              <a:rPr lang="en-US" sz="1600" dirty="0">
+                <a:solidFill>
+                  <a:srgbClr val="1B2A38"/>
+                </a:solidFill>
+                <a:latin typeface="Calibri" pitchFamily="34" charset="0"/>
+                <a:ea typeface="Calibri" pitchFamily="34" charset="-122"/>
+                <a:cs typeface="Calibri" pitchFamily="34" charset="-120"/>
+              </a:rPr>
+              <a:t>Generelle systemer for mange typer skip</a:t>
+            </a:r>
+            <a:endParaRPr lang="en-US" sz="1600" dirty="0"/>
+          </a:p>
+        </p:txBody>
+      </p:sp>
+      <p:sp>
+        <p:nvSpPr>
+          <p:cNvPr id="29" name="Ikon-sirkel"/>
+          <p:cNvSpPr/>
+          <p:nvPr/>
+        </p:nvSpPr>
+        <p:spPr>
+          <a:xfrm>
+            <a:off x="6598768" y="4892040"/>
+            <a:ext cx="384048" cy="384048"/>
+          </a:xfrm>
+          <a:prstGeom prst="ellipse">
+            <a:avLst/>
+          </a:prstGeom>
+          <a:solidFill>
+            <a:srgbClr val="0E7C86"/>
+          </a:solidFill>
+          <a:ln/>
+        </p:spPr>
+      </p:sp>
+      <p:pic>
+        <p:nvPicPr>
+          <p:cNvPr id="30" name="Ikon FaCheck" descr="preencoded.png">    </p:cNvPr>
+          <p:cNvPicPr>
+            <a:picLocks noChangeAspect="1"/>
+          </p:cNvPicPr>
+          <p:nvPr/>
+        </p:nvPicPr>
+        <p:blipFill>
+          <a:blip r:embed="rId8"/>
+          <a:stretch>
+            <a:fillRect/>
+          </a:stretch>
+        </p:blipFill>
+        <p:spPr>
+          <a:xfrm>
+            <a:off x="6690939" y="4984212"/>
+            <a:ext cx="199705" cy="199705"/>
+          </a:xfrm>
+          <a:prstGeom prst="rect">
+            <a:avLst/>
+          </a:prstGeom>
+        </p:spPr>
+      </p:pic>
+      <p:sp>
+        <p:nvSpPr>
+          <p:cNvPr id="31" name="Text 21"/>
+          <p:cNvSpPr txBox="1"/>
+          <p:nvPr/>
+        </p:nvSpPr>
+        <p:spPr>
+          <a:xfrm>
+            <a:off x="7147408" y="4892040"/>
+            <a:ext cx="3947008" cy="384048"/>
+          </a:xfrm>
+          <a:prstGeom prst="rect">
+            <a:avLst/>
+          </a:prstGeom>
+          <a:noFill/>
+          <a:ln/>
+        </p:spPr>
+        <p:txBody>
+          <a:bodyPr wrap="square" lIns="0" tIns="0" rIns="0" bIns="0" rtlCol="0" anchor="ctr"/>
+          <a:lstStyle/>
+          <a:p>
+            <a:pPr indent="0" marL="0">
+              <a:buNone/>
+            </a:pPr>
+            <a:r>
+              <a:rPr lang="en-US" sz="1600" b="1" dirty="0">
+                <a:solidFill>
+                  <a:srgbClr val="FFFFFF"/>
+                </a:solidFill>
+                <a:latin typeface="Calibri" pitchFamily="34" charset="0"/>
+                <a:ea typeface="Calibri" pitchFamily="34" charset="-122"/>
+                <a:cs typeface="Calibri" pitchFamily="34" charset="-120"/>
+              </a:rPr>
+              <a:t>Laget for fiskefartøy, av folk fra fiskeflåten</a:t>
+            </a:r>
+            <a:endParaRPr lang="en-US" sz="1600" dirty="0"/>
           </a:p>
         </p:txBody>
       </p:sp>
